--- a/templates/BackgroundDefaultTemplate/template_default_withgroups2019.pptx
+++ b/templates/BackgroundDefaultTemplate/template_default_withgroups2019.pptx
@@ -265,7 +265,7 @@
               <a:pPr>
                 <a:defRPr/>
               </a:pPr>
-              <a:t>3/7/2023</a:t>
+              <a:t>10/7/2025</a:t>
             </a:fld>
             <a:endParaRPr lang="en-US"/>
           </a:p>
@@ -475,7 +475,7 @@
               <a:pPr>
                 <a:defRPr/>
               </a:pPr>
-              <a:t>3/7/2023</a:t>
+              <a:t>10/7/2025</a:t>
             </a:fld>
             <a:endParaRPr lang="en-US"/>
           </a:p>
@@ -4357,426 +4357,6 @@
       </p:sp>
       <p:sp>
         <p:nvSpPr>
-          <p:cNvPr id="24" name="TextBox 3"/>
-          <p:cNvSpPr txBox="1">
-            <a:spLocks noChangeArrowheads="1"/>
-          </p:cNvSpPr>
-          <p:nvPr/>
-        </p:nvSpPr>
-        <p:spPr bwMode="auto">
-          <a:xfrm>
-            <a:off x="643148" y="1186776"/>
-            <a:ext cx="8204635" cy="4343400"/>
-          </a:xfrm>
-          <a:prstGeom prst="rect">
-            <a:avLst/>
-          </a:prstGeom>
-          <a:noFill/>
-          <a:ln>
-            <a:noFill/>
-          </a:ln>
-        </p:spPr>
-        <p:txBody>
-          <a:bodyPr numCol="2" anchor="ctr"/>
-          <a:lstStyle>
-            <a:lvl1pPr>
-              <a:defRPr>
-                <a:solidFill>
-                  <a:schemeClr val="tx1"/>
-                </a:solidFill>
-                <a:latin typeface="Arial" panose="020B0604020202020204" pitchFamily="34" charset="0"/>
-                <a:cs typeface="Arial" panose="020B0604020202020204" pitchFamily="34" charset="0"/>
-              </a:defRPr>
-            </a:lvl1pPr>
-            <a:lvl2pPr marL="742950" indent="-285750">
-              <a:defRPr>
-                <a:solidFill>
-                  <a:schemeClr val="tx1"/>
-                </a:solidFill>
-                <a:latin typeface="Arial" panose="020B0604020202020204" pitchFamily="34" charset="0"/>
-                <a:cs typeface="Arial" panose="020B0604020202020204" pitchFamily="34" charset="0"/>
-              </a:defRPr>
-            </a:lvl2pPr>
-            <a:lvl3pPr marL="1143000" indent="-228600">
-              <a:defRPr>
-                <a:solidFill>
-                  <a:schemeClr val="tx1"/>
-                </a:solidFill>
-                <a:latin typeface="Arial" panose="020B0604020202020204" pitchFamily="34" charset="0"/>
-                <a:cs typeface="Arial" panose="020B0604020202020204" pitchFamily="34" charset="0"/>
-              </a:defRPr>
-            </a:lvl3pPr>
-            <a:lvl4pPr marL="1600200" indent="-228600">
-              <a:defRPr>
-                <a:solidFill>
-                  <a:schemeClr val="tx1"/>
-                </a:solidFill>
-                <a:latin typeface="Arial" panose="020B0604020202020204" pitchFamily="34" charset="0"/>
-                <a:cs typeface="Arial" panose="020B0604020202020204" pitchFamily="34" charset="0"/>
-              </a:defRPr>
-            </a:lvl4pPr>
-            <a:lvl5pPr marL="2057400" indent="-228600">
-              <a:defRPr>
-                <a:solidFill>
-                  <a:schemeClr val="tx1"/>
-                </a:solidFill>
-                <a:latin typeface="Arial" panose="020B0604020202020204" pitchFamily="34" charset="0"/>
-                <a:cs typeface="Arial" panose="020B0604020202020204" pitchFamily="34" charset="0"/>
-              </a:defRPr>
-            </a:lvl5pPr>
-            <a:lvl6pPr marL="2514600" indent="-228600" eaLnBrk="0" fontAlgn="base" hangingPunct="0">
-              <a:spcBef>
-                <a:spcPct val="0"/>
-              </a:spcBef>
-              <a:spcAft>
-                <a:spcPct val="0"/>
-              </a:spcAft>
-              <a:defRPr>
-                <a:solidFill>
-                  <a:schemeClr val="tx1"/>
-                </a:solidFill>
-                <a:latin typeface="Arial" panose="020B0604020202020204" pitchFamily="34" charset="0"/>
-                <a:cs typeface="Arial" panose="020B0604020202020204" pitchFamily="34" charset="0"/>
-              </a:defRPr>
-            </a:lvl6pPr>
-            <a:lvl7pPr marL="2971800" indent="-228600" eaLnBrk="0" fontAlgn="base" hangingPunct="0">
-              <a:spcBef>
-                <a:spcPct val="0"/>
-              </a:spcBef>
-              <a:spcAft>
-                <a:spcPct val="0"/>
-              </a:spcAft>
-              <a:defRPr>
-                <a:solidFill>
-                  <a:schemeClr val="tx1"/>
-                </a:solidFill>
-                <a:latin typeface="Arial" panose="020B0604020202020204" pitchFamily="34" charset="0"/>
-                <a:cs typeface="Arial" panose="020B0604020202020204" pitchFamily="34" charset="0"/>
-              </a:defRPr>
-            </a:lvl7pPr>
-            <a:lvl8pPr marL="3429000" indent="-228600" eaLnBrk="0" fontAlgn="base" hangingPunct="0">
-              <a:spcBef>
-                <a:spcPct val="0"/>
-              </a:spcBef>
-              <a:spcAft>
-                <a:spcPct val="0"/>
-              </a:spcAft>
-              <a:defRPr>
-                <a:solidFill>
-                  <a:schemeClr val="tx1"/>
-                </a:solidFill>
-                <a:latin typeface="Arial" panose="020B0604020202020204" pitchFamily="34" charset="0"/>
-                <a:cs typeface="Arial" panose="020B0604020202020204" pitchFamily="34" charset="0"/>
-              </a:defRPr>
-            </a:lvl8pPr>
-            <a:lvl9pPr marL="3886200" indent="-228600" eaLnBrk="0" fontAlgn="base" hangingPunct="0">
-              <a:spcBef>
-                <a:spcPct val="0"/>
-              </a:spcBef>
-              <a:spcAft>
-                <a:spcPct val="0"/>
-              </a:spcAft>
-              <a:defRPr>
-                <a:solidFill>
-                  <a:schemeClr val="tx1"/>
-                </a:solidFill>
-                <a:latin typeface="Arial" panose="020B0604020202020204" pitchFamily="34" charset="0"/>
-                <a:cs typeface="Arial" panose="020B0604020202020204" pitchFamily="34" charset="0"/>
-              </a:defRPr>
-            </a:lvl9pPr>
-          </a:lstStyle>
-          <a:p>
-            <a:pPr marL="342900" indent="-342900" eaLnBrk="1" hangingPunct="1">
-              <a:buFont typeface="Wingdings" panose="05000000000000000000" pitchFamily="2" charset="2"/>
-              <a:buChar char="q"/>
-              <a:defRPr/>
-            </a:pPr>
-            <a:r>
-              <a:rPr lang="en-US" altLang="en-US" sz="2400" dirty="0">
-                <a:latin typeface="Verdana" panose="020B0604030504040204" pitchFamily="34" charset="0"/>
-                <a:ea typeface="Verdana" panose="020B0604030504040204" pitchFamily="34" charset="0"/>
-                <a:cs typeface="Verdana" panose="020B0604030504040204" pitchFamily="34" charset="0"/>
-              </a:rPr>
-              <a:t> </a:t>
-            </a:r>
-          </a:p>
-          <a:p>
-            <a:pPr eaLnBrk="1" hangingPunct="1">
-              <a:defRPr/>
-            </a:pPr>
-            <a:endParaRPr lang="en-US" altLang="en-US" sz="2400" dirty="0">
-              <a:latin typeface="Verdana" panose="020B0604030504040204" pitchFamily="34" charset="0"/>
-              <a:ea typeface="Verdana" panose="020B0604030504040204" pitchFamily="34" charset="0"/>
-              <a:cs typeface="Verdana" panose="020B0604030504040204" pitchFamily="34" charset="0"/>
-            </a:endParaRPr>
-          </a:p>
-          <a:p>
-            <a:pPr marL="342900" indent="-342900" eaLnBrk="1" hangingPunct="1">
-              <a:buFont typeface="Wingdings" panose="05000000000000000000" pitchFamily="2" charset="2"/>
-              <a:buChar char="q"/>
-              <a:defRPr/>
-            </a:pPr>
-            <a:r>
-              <a:rPr lang="en-US" altLang="en-US" sz="2400" dirty="0">
-                <a:latin typeface="Verdana" panose="020B0604030504040204" pitchFamily="34" charset="0"/>
-                <a:ea typeface="Verdana" panose="020B0604030504040204" pitchFamily="34" charset="0"/>
-                <a:cs typeface="Verdana" panose="020B0604030504040204" pitchFamily="34" charset="0"/>
-              </a:rPr>
-              <a:t> </a:t>
-            </a:r>
-          </a:p>
-          <a:p>
-            <a:pPr eaLnBrk="1" hangingPunct="1">
-              <a:defRPr/>
-            </a:pPr>
-            <a:endParaRPr lang="en-US" altLang="en-US" sz="2400" dirty="0">
-              <a:latin typeface="Verdana" panose="020B0604030504040204" pitchFamily="34" charset="0"/>
-              <a:ea typeface="Verdana" panose="020B0604030504040204" pitchFamily="34" charset="0"/>
-              <a:cs typeface="Verdana" panose="020B0604030504040204" pitchFamily="34" charset="0"/>
-            </a:endParaRPr>
-          </a:p>
-          <a:p>
-            <a:pPr marL="342900" indent="-342900" eaLnBrk="1" hangingPunct="1">
-              <a:buFont typeface="Wingdings" panose="05000000000000000000" pitchFamily="2" charset="2"/>
-              <a:buChar char="q"/>
-              <a:defRPr/>
-            </a:pPr>
-            <a:r>
-              <a:rPr lang="en-US" altLang="en-US" sz="2400" dirty="0">
-                <a:latin typeface="Verdana" panose="020B0604030504040204" pitchFamily="34" charset="0"/>
-                <a:ea typeface="Verdana" panose="020B0604030504040204" pitchFamily="34" charset="0"/>
-                <a:cs typeface="Verdana" panose="020B0604030504040204" pitchFamily="34" charset="0"/>
-              </a:rPr>
-              <a:t> </a:t>
-            </a:r>
-          </a:p>
-          <a:p>
-            <a:pPr eaLnBrk="1" hangingPunct="1">
-              <a:defRPr/>
-            </a:pPr>
-            <a:endParaRPr lang="en-US" altLang="en-US" sz="2400" dirty="0">
-              <a:latin typeface="Verdana" panose="020B0604030504040204" pitchFamily="34" charset="0"/>
-              <a:ea typeface="Verdana" panose="020B0604030504040204" pitchFamily="34" charset="0"/>
-              <a:cs typeface="Verdana" panose="020B0604030504040204" pitchFamily="34" charset="0"/>
-            </a:endParaRPr>
-          </a:p>
-          <a:p>
-            <a:pPr marL="342900" indent="-342900" eaLnBrk="1" hangingPunct="1">
-              <a:buFont typeface="Wingdings" panose="05000000000000000000" pitchFamily="2" charset="2"/>
-              <a:buChar char="q"/>
-              <a:defRPr/>
-            </a:pPr>
-            <a:r>
-              <a:rPr lang="en-US" altLang="en-US" sz="2400" dirty="0">
-                <a:latin typeface="Verdana" panose="020B0604030504040204" pitchFamily="34" charset="0"/>
-                <a:ea typeface="Verdana" panose="020B0604030504040204" pitchFamily="34" charset="0"/>
-                <a:cs typeface="Verdana" panose="020B0604030504040204" pitchFamily="34" charset="0"/>
-              </a:rPr>
-              <a:t> </a:t>
-            </a:r>
-          </a:p>
-          <a:p>
-            <a:pPr marL="342900" indent="-342900" eaLnBrk="1" hangingPunct="1">
-              <a:buFont typeface="Wingdings" panose="05000000000000000000" pitchFamily="2" charset="2"/>
-              <a:buChar char="q"/>
-              <a:defRPr/>
-            </a:pPr>
-            <a:endParaRPr lang="en-US" altLang="en-US" sz="2400" dirty="0">
-              <a:latin typeface="Verdana" panose="020B0604030504040204" pitchFamily="34" charset="0"/>
-              <a:ea typeface="Verdana" panose="020B0604030504040204" pitchFamily="34" charset="0"/>
-              <a:cs typeface="Verdana" panose="020B0604030504040204" pitchFamily="34" charset="0"/>
-            </a:endParaRPr>
-          </a:p>
-          <a:p>
-            <a:pPr marL="342900" indent="-342900" eaLnBrk="1" hangingPunct="1">
-              <a:buFont typeface="Wingdings" panose="05000000000000000000" pitchFamily="2" charset="2"/>
-              <a:buChar char="q"/>
-              <a:defRPr/>
-            </a:pPr>
-            <a:r>
-              <a:rPr lang="en-US" altLang="en-US" sz="2400" dirty="0">
-                <a:latin typeface="Verdana" panose="020B0604030504040204" pitchFamily="34" charset="0"/>
-                <a:ea typeface="Verdana" panose="020B0604030504040204" pitchFamily="34" charset="0"/>
-                <a:cs typeface="Verdana" panose="020B0604030504040204" pitchFamily="34" charset="0"/>
-              </a:rPr>
-              <a:t> </a:t>
-            </a:r>
-          </a:p>
-          <a:p>
-            <a:pPr marL="342900" indent="-342900" eaLnBrk="1" hangingPunct="1">
-              <a:buFont typeface="Wingdings" panose="05000000000000000000" pitchFamily="2" charset="2"/>
-              <a:buChar char="q"/>
-              <a:defRPr/>
-            </a:pPr>
-            <a:endParaRPr lang="en-US" altLang="en-US" sz="2400" dirty="0">
-              <a:latin typeface="Verdana" panose="020B0604030504040204" pitchFamily="34" charset="0"/>
-              <a:ea typeface="Verdana" panose="020B0604030504040204" pitchFamily="34" charset="0"/>
-              <a:cs typeface="Verdana" panose="020B0604030504040204" pitchFamily="34" charset="0"/>
-            </a:endParaRPr>
-          </a:p>
-          <a:p>
-            <a:pPr marL="342900" indent="-342900" eaLnBrk="1" hangingPunct="1">
-              <a:buFont typeface="Wingdings" panose="05000000000000000000" pitchFamily="2" charset="2"/>
-              <a:buChar char="q"/>
-              <a:defRPr/>
-            </a:pPr>
-            <a:endParaRPr lang="en-US" altLang="en-US" sz="2400" dirty="0">
-              <a:latin typeface="Verdana" panose="020B0604030504040204" pitchFamily="34" charset="0"/>
-              <a:ea typeface="Verdana" panose="020B0604030504040204" pitchFamily="34" charset="0"/>
-              <a:cs typeface="Verdana" panose="020B0604030504040204" pitchFamily="34" charset="0"/>
-            </a:endParaRPr>
-          </a:p>
-          <a:p>
-            <a:pPr marL="342900" indent="-342900" eaLnBrk="1" hangingPunct="1">
-              <a:buFont typeface="Wingdings" panose="05000000000000000000" pitchFamily="2" charset="2"/>
-              <a:buChar char="q"/>
-              <a:defRPr/>
-            </a:pPr>
-            <a:r>
-              <a:rPr lang="en-US" altLang="en-US" sz="2400" dirty="0">
-                <a:latin typeface="Verdana" panose="020B0604030504040204" pitchFamily="34" charset="0"/>
-                <a:ea typeface="Verdana" panose="020B0604030504040204" pitchFamily="34" charset="0"/>
-                <a:cs typeface="Verdana" panose="020B0604030504040204" pitchFamily="34" charset="0"/>
-              </a:rPr>
-              <a:t> </a:t>
-            </a:r>
-          </a:p>
-          <a:p>
-            <a:pPr marL="342900" indent="-342900" eaLnBrk="1" hangingPunct="1">
-              <a:buFont typeface="Wingdings" panose="05000000000000000000" pitchFamily="2" charset="2"/>
-              <a:buChar char="q"/>
-              <a:defRPr/>
-            </a:pPr>
-            <a:endParaRPr lang="en-US" altLang="en-US" sz="2400" dirty="0">
-              <a:latin typeface="Verdana" panose="020B0604030504040204" pitchFamily="34" charset="0"/>
-              <a:ea typeface="Verdana" panose="020B0604030504040204" pitchFamily="34" charset="0"/>
-              <a:cs typeface="Verdana" panose="020B0604030504040204" pitchFamily="34" charset="0"/>
-            </a:endParaRPr>
-          </a:p>
-          <a:p>
-            <a:pPr marL="342900" indent="-342900" eaLnBrk="1" hangingPunct="1">
-              <a:buFont typeface="Wingdings" panose="05000000000000000000" pitchFamily="2" charset="2"/>
-              <a:buChar char="q"/>
-              <a:defRPr/>
-            </a:pPr>
-            <a:r>
-              <a:rPr lang="en-US" altLang="en-US" sz="2400" dirty="0">
-                <a:latin typeface="Verdana" panose="020B0604030504040204" pitchFamily="34" charset="0"/>
-                <a:ea typeface="Verdana" panose="020B0604030504040204" pitchFamily="34" charset="0"/>
-                <a:cs typeface="Verdana" panose="020B0604030504040204" pitchFamily="34" charset="0"/>
-              </a:rPr>
-              <a:t> </a:t>
-            </a:r>
-          </a:p>
-          <a:p>
-            <a:pPr marL="342900" indent="-342900" eaLnBrk="1" hangingPunct="1">
-              <a:buFont typeface="Wingdings" panose="05000000000000000000" pitchFamily="2" charset="2"/>
-              <a:buChar char="q"/>
-              <a:defRPr/>
-            </a:pPr>
-            <a:endParaRPr lang="en-US" altLang="en-US" sz="2400" dirty="0">
-              <a:latin typeface="Verdana" panose="020B0604030504040204" pitchFamily="34" charset="0"/>
-              <a:ea typeface="Verdana" panose="020B0604030504040204" pitchFamily="34" charset="0"/>
-              <a:cs typeface="Verdana" panose="020B0604030504040204" pitchFamily="34" charset="0"/>
-            </a:endParaRPr>
-          </a:p>
-          <a:p>
-            <a:pPr marL="342900" indent="-342900" eaLnBrk="1" hangingPunct="1">
-              <a:buFont typeface="Wingdings" panose="05000000000000000000" pitchFamily="2" charset="2"/>
-              <a:buChar char="q"/>
-              <a:defRPr/>
-            </a:pPr>
-            <a:r>
-              <a:rPr lang="en-US" altLang="en-US" sz="2400" dirty="0">
-                <a:latin typeface="Verdana" panose="020B0604030504040204" pitchFamily="34" charset="0"/>
-                <a:ea typeface="Verdana" panose="020B0604030504040204" pitchFamily="34" charset="0"/>
-                <a:cs typeface="Verdana" panose="020B0604030504040204" pitchFamily="34" charset="0"/>
-              </a:rPr>
-              <a:t> </a:t>
-            </a:r>
-          </a:p>
-          <a:p>
-            <a:pPr marL="342900" indent="-342900" eaLnBrk="1" hangingPunct="1">
-              <a:buFont typeface="Wingdings" panose="05000000000000000000" pitchFamily="2" charset="2"/>
-              <a:buChar char="q"/>
-              <a:defRPr/>
-            </a:pPr>
-            <a:endParaRPr lang="en-US" altLang="en-US" sz="2400" dirty="0">
-              <a:latin typeface="Verdana" panose="020B0604030504040204" pitchFamily="34" charset="0"/>
-              <a:ea typeface="Verdana" panose="020B0604030504040204" pitchFamily="34" charset="0"/>
-              <a:cs typeface="Verdana" panose="020B0604030504040204" pitchFamily="34" charset="0"/>
-            </a:endParaRPr>
-          </a:p>
-          <a:p>
-            <a:pPr marL="342900" indent="-342900" eaLnBrk="1" hangingPunct="1">
-              <a:buFont typeface="Wingdings" panose="05000000000000000000" pitchFamily="2" charset="2"/>
-              <a:buChar char="q"/>
-              <a:defRPr/>
-            </a:pPr>
-            <a:r>
-              <a:rPr lang="en-US" altLang="en-US" sz="2400" dirty="0">
-                <a:latin typeface="Verdana" panose="020B0604030504040204" pitchFamily="34" charset="0"/>
-                <a:ea typeface="Verdana" panose="020B0604030504040204" pitchFamily="34" charset="0"/>
-                <a:cs typeface="Verdana" panose="020B0604030504040204" pitchFamily="34" charset="0"/>
-              </a:rPr>
-              <a:t> </a:t>
-            </a:r>
-          </a:p>
-          <a:p>
-            <a:pPr marL="342900" indent="-342900" eaLnBrk="1" hangingPunct="1">
-              <a:buFont typeface="Wingdings" panose="05000000000000000000" pitchFamily="2" charset="2"/>
-              <a:buChar char="q"/>
-              <a:defRPr/>
-            </a:pPr>
-            <a:endParaRPr lang="en-US" altLang="en-US" sz="2400" dirty="0">
-              <a:latin typeface="Verdana" panose="020B0604030504040204" pitchFamily="34" charset="0"/>
-              <a:ea typeface="Verdana" panose="020B0604030504040204" pitchFamily="34" charset="0"/>
-              <a:cs typeface="Verdana" panose="020B0604030504040204" pitchFamily="34" charset="0"/>
-            </a:endParaRPr>
-          </a:p>
-          <a:p>
-            <a:pPr marL="342900" indent="-342900" eaLnBrk="1" hangingPunct="1">
-              <a:buFont typeface="Wingdings" panose="05000000000000000000" pitchFamily="2" charset="2"/>
-              <a:buChar char="q"/>
-              <a:defRPr/>
-            </a:pPr>
-            <a:r>
-              <a:rPr lang="en-US" altLang="en-US" sz="2400" dirty="0">
-                <a:latin typeface="Verdana" panose="020B0604030504040204" pitchFamily="34" charset="0"/>
-                <a:ea typeface="Verdana" panose="020B0604030504040204" pitchFamily="34" charset="0"/>
-                <a:cs typeface="Verdana" panose="020B0604030504040204" pitchFamily="34" charset="0"/>
-              </a:rPr>
-              <a:t> </a:t>
-            </a:r>
-          </a:p>
-          <a:p>
-            <a:pPr marL="342900" indent="-342900" eaLnBrk="1" hangingPunct="1">
-              <a:buFont typeface="Wingdings" panose="05000000000000000000" pitchFamily="2" charset="2"/>
-              <a:buChar char="q"/>
-              <a:defRPr/>
-            </a:pPr>
-            <a:endParaRPr lang="en-US" altLang="en-US" sz="2400" dirty="0">
-              <a:latin typeface="Verdana" panose="020B0604030504040204" pitchFamily="34" charset="0"/>
-              <a:ea typeface="Verdana" panose="020B0604030504040204" pitchFamily="34" charset="0"/>
-              <a:cs typeface="Verdana" panose="020B0604030504040204" pitchFamily="34" charset="0"/>
-            </a:endParaRPr>
-          </a:p>
-          <a:p>
-            <a:pPr marL="342900" indent="-342900" eaLnBrk="1" hangingPunct="1">
-              <a:buFont typeface="Wingdings" panose="05000000000000000000" pitchFamily="2" charset="2"/>
-              <a:buChar char="q"/>
-              <a:defRPr/>
-            </a:pPr>
-            <a:endParaRPr lang="en-US" altLang="en-US" sz="2400" dirty="0">
-              <a:latin typeface="Verdana" panose="020B0604030504040204" pitchFamily="34" charset="0"/>
-              <a:ea typeface="Verdana" panose="020B0604030504040204" pitchFamily="34" charset="0"/>
-              <a:cs typeface="Verdana" panose="020B0604030504040204" pitchFamily="34" charset="0"/>
-            </a:endParaRPr>
-          </a:p>
-        </p:txBody>
-      </p:sp>
-      <p:sp>
-        <p:nvSpPr>
           <p:cNvPr id="4106" name="TextBox 24"/>
           <p:cNvSpPr txBox="1">
             <a:spLocks noChangeArrowheads="1"/>
@@ -5179,8 +4759,8 @@
         </p:nvSpPr>
         <p:spPr bwMode="auto">
           <a:xfrm>
-            <a:off x="1213701" y="1257546"/>
-            <a:ext cx="2263953" cy="461665"/>
+            <a:off x="1019778" y="1091458"/>
+            <a:ext cx="1400961" cy="307777"/>
           </a:xfrm>
           <a:prstGeom prst="rect">
             <a:avLst/>
@@ -5363,7 +4943,7 @@
               <a:buNone/>
             </a:pPr>
             <a:r>
-              <a:rPr lang="en-US" altLang="en-US" sz="2400" dirty="0">
+              <a:rPr lang="en-US" altLang="en-US" sz="1400" dirty="0">
                 <a:latin typeface="+mn-lt"/>
                 <a:ea typeface="Verdana" panose="020B0604030504040204" pitchFamily="34" charset="0"/>
                 <a:cs typeface="Verdana" panose="020B0604030504040204" pitchFamily="34" charset="0"/>
@@ -5383,8 +4963,8 @@
         </p:nvSpPr>
         <p:spPr bwMode="auto">
           <a:xfrm>
-            <a:off x="1207141" y="1985584"/>
-            <a:ext cx="2263953" cy="461665"/>
+            <a:off x="1027475" y="1919746"/>
+            <a:ext cx="1400961" cy="307777"/>
           </a:xfrm>
           <a:prstGeom prst="rect">
             <a:avLst/>
@@ -5567,7 +5147,7 @@
               <a:buNone/>
             </a:pPr>
             <a:r>
-              <a:rPr lang="en-US" altLang="en-US" sz="2400" dirty="0">
+              <a:rPr lang="en-US" altLang="en-US" sz="1400" dirty="0">
                 <a:latin typeface="+mn-lt"/>
                 <a:ea typeface="Verdana" panose="020B0604030504040204" pitchFamily="34" charset="0"/>
                 <a:cs typeface="Verdana" panose="020B0604030504040204" pitchFamily="34" charset="0"/>
@@ -5587,8 +5167,8 @@
         </p:nvSpPr>
         <p:spPr bwMode="auto">
           <a:xfrm>
-            <a:off x="1213701" y="2738981"/>
-            <a:ext cx="2263953" cy="461665"/>
+            <a:off x="1027475" y="2739312"/>
+            <a:ext cx="1400961" cy="307777"/>
           </a:xfrm>
           <a:prstGeom prst="rect">
             <a:avLst/>
@@ -5771,7 +5351,7 @@
               <a:buNone/>
             </a:pPr>
             <a:r>
-              <a:rPr lang="en-US" altLang="en-US" sz="2400" dirty="0">
+              <a:rPr lang="en-US" altLang="en-US" sz="1400" dirty="0">
                 <a:latin typeface="+mn-lt"/>
                 <a:ea typeface="Verdana" panose="020B0604030504040204" pitchFamily="34" charset="0"/>
                 <a:cs typeface="Verdana" panose="020B0604030504040204" pitchFamily="34" charset="0"/>
@@ -5791,8 +5371,8 @@
         </p:nvSpPr>
         <p:spPr bwMode="auto">
           <a:xfrm>
-            <a:off x="1256583" y="3431478"/>
-            <a:ext cx="2263953" cy="461665"/>
+            <a:off x="1027475" y="3613809"/>
+            <a:ext cx="1400961" cy="307777"/>
           </a:xfrm>
           <a:prstGeom prst="rect">
             <a:avLst/>
@@ -5975,7 +5555,7 @@
               <a:buNone/>
             </a:pPr>
             <a:r>
-              <a:rPr lang="en-US" altLang="en-US" sz="2400" dirty="0">
+              <a:rPr lang="en-US" altLang="en-US" sz="1400" dirty="0">
                 <a:latin typeface="+mn-lt"/>
                 <a:ea typeface="Verdana" panose="020B0604030504040204" pitchFamily="34" charset="0"/>
                 <a:cs typeface="Verdana" panose="020B0604030504040204" pitchFamily="34" charset="0"/>
@@ -5995,8 +5575,8 @@
         </p:nvSpPr>
         <p:spPr bwMode="auto">
           <a:xfrm>
-            <a:off x="1207141" y="4160086"/>
-            <a:ext cx="2263953" cy="461665"/>
+            <a:off x="1027475" y="4427008"/>
+            <a:ext cx="1400961" cy="307777"/>
           </a:xfrm>
           <a:prstGeom prst="rect">
             <a:avLst/>
@@ -6179,7 +5759,7 @@
               <a:buNone/>
             </a:pPr>
             <a:r>
-              <a:rPr lang="en-US" altLang="en-US" sz="2400" dirty="0">
+              <a:rPr lang="en-US" altLang="en-US" sz="1400" dirty="0">
                 <a:latin typeface="+mn-lt"/>
                 <a:ea typeface="Verdana" panose="020B0604030504040204" pitchFamily="34" charset="0"/>
                 <a:cs typeface="Verdana" panose="020B0604030504040204" pitchFamily="34" charset="0"/>
@@ -6191,7 +5771,363 @@
       </p:sp>
       <p:sp>
         <p:nvSpPr>
-          <p:cNvPr id="19" name="TextBox 1"/>
+          <p:cNvPr id="2" name="Rectangle 1">
+            <a:extLst>
+              <a:ext uri="{FF2B5EF4-FFF2-40B4-BE49-F238E27FC236}">
+                <a16:creationId xmlns:a16="http://schemas.microsoft.com/office/drawing/2014/main" id="{A7351898-37F4-7FF0-9ED8-E9CD15414E61}"/>
+              </a:ext>
+            </a:extLst>
+          </p:cNvPr>
+          <p:cNvSpPr/>
+          <p:nvPr/>
+        </p:nvSpPr>
+        <p:spPr>
+          <a:xfrm>
+            <a:off x="787401" y="1159001"/>
+            <a:ext cx="137160" cy="137160"/>
+          </a:xfrm>
+          <a:prstGeom prst="rect">
+            <a:avLst/>
+          </a:prstGeom>
+          <a:noFill/>
+          <a:ln>
+            <a:solidFill>
+              <a:schemeClr val="tx1"/>
+            </a:solidFill>
+          </a:ln>
+          <a:effectLst>
+            <a:outerShdw blurRad="44450" dist="27940" dir="5400000" algn="ctr">
+              <a:srgbClr val="000000">
+                <a:alpha val="32000"/>
+              </a:srgbClr>
+            </a:outerShdw>
+          </a:effectLst>
+          <a:scene3d>
+            <a:camera prst="orthographicFront">
+              <a:rot lat="0" lon="0" rev="0"/>
+            </a:camera>
+            <a:lightRig rig="balanced" dir="t">
+              <a:rot lat="0" lon="0" rev="8700000"/>
+            </a:lightRig>
+          </a:scene3d>
+          <a:sp3d>
+            <a:bevelT w="190500" h="38100"/>
+          </a:sp3d>
+        </p:spPr>
+        <p:style>
+          <a:lnRef idx="2">
+            <a:schemeClr val="accent1">
+              <a:shade val="15000"/>
+            </a:schemeClr>
+          </a:lnRef>
+          <a:fillRef idx="1">
+            <a:schemeClr val="accent1"/>
+          </a:fillRef>
+          <a:effectRef idx="0">
+            <a:schemeClr val="accent1"/>
+          </a:effectRef>
+          <a:fontRef idx="minor">
+            <a:schemeClr val="lt1"/>
+          </a:fontRef>
+        </p:style>
+        <p:txBody>
+          <a:bodyPr rtlCol="0" anchor="ctr"/>
+          <a:lstStyle/>
+          <a:p>
+            <a:pPr algn="ctr"/>
+            <a:endParaRPr lang="en-US" sz="1400"/>
+          </a:p>
+        </p:txBody>
+      </p:sp>
+      <p:sp>
+        <p:nvSpPr>
+          <p:cNvPr id="3" name="Rectangle 2">
+            <a:extLst>
+              <a:ext uri="{FF2B5EF4-FFF2-40B4-BE49-F238E27FC236}">
+                <a16:creationId xmlns:a16="http://schemas.microsoft.com/office/drawing/2014/main" id="{9AE44089-D6DE-628B-9609-3A34E46D8C87}"/>
+              </a:ext>
+            </a:extLst>
+          </p:cNvPr>
+          <p:cNvSpPr/>
+          <p:nvPr/>
+        </p:nvSpPr>
+        <p:spPr>
+          <a:xfrm>
+            <a:off x="787401" y="1994195"/>
+            <a:ext cx="137160" cy="137160"/>
+          </a:xfrm>
+          <a:prstGeom prst="rect">
+            <a:avLst/>
+          </a:prstGeom>
+          <a:noFill/>
+          <a:ln>
+            <a:solidFill>
+              <a:schemeClr val="tx1"/>
+            </a:solidFill>
+          </a:ln>
+          <a:effectLst>
+            <a:outerShdw blurRad="44450" dist="27940" dir="5400000" algn="ctr">
+              <a:srgbClr val="000000">
+                <a:alpha val="32000"/>
+              </a:srgbClr>
+            </a:outerShdw>
+          </a:effectLst>
+          <a:scene3d>
+            <a:camera prst="orthographicFront">
+              <a:rot lat="0" lon="0" rev="0"/>
+            </a:camera>
+            <a:lightRig rig="balanced" dir="t">
+              <a:rot lat="0" lon="0" rev="8700000"/>
+            </a:lightRig>
+          </a:scene3d>
+          <a:sp3d>
+            <a:bevelT w="190500" h="38100"/>
+          </a:sp3d>
+        </p:spPr>
+        <p:style>
+          <a:lnRef idx="2">
+            <a:schemeClr val="accent1">
+              <a:shade val="15000"/>
+            </a:schemeClr>
+          </a:lnRef>
+          <a:fillRef idx="1">
+            <a:schemeClr val="accent1"/>
+          </a:fillRef>
+          <a:effectRef idx="0">
+            <a:schemeClr val="accent1"/>
+          </a:effectRef>
+          <a:fontRef idx="minor">
+            <a:schemeClr val="lt1"/>
+          </a:fontRef>
+        </p:style>
+        <p:txBody>
+          <a:bodyPr rtlCol="0" anchor="ctr"/>
+          <a:lstStyle/>
+          <a:p>
+            <a:pPr algn="ctr"/>
+            <a:endParaRPr lang="en-US" sz="1400"/>
+          </a:p>
+        </p:txBody>
+      </p:sp>
+      <p:sp>
+        <p:nvSpPr>
+          <p:cNvPr id="4" name="Rectangle 3">
+            <a:extLst>
+              <a:ext uri="{FF2B5EF4-FFF2-40B4-BE49-F238E27FC236}">
+                <a16:creationId xmlns:a16="http://schemas.microsoft.com/office/drawing/2014/main" id="{7A2D85E0-3037-04EB-BA12-55ACFF860B16}"/>
+              </a:ext>
+            </a:extLst>
+          </p:cNvPr>
+          <p:cNvSpPr/>
+          <p:nvPr/>
+        </p:nvSpPr>
+        <p:spPr>
+          <a:xfrm>
+            <a:off x="792588" y="2810249"/>
+            <a:ext cx="137160" cy="137160"/>
+          </a:xfrm>
+          <a:prstGeom prst="rect">
+            <a:avLst/>
+          </a:prstGeom>
+          <a:noFill/>
+          <a:ln>
+            <a:solidFill>
+              <a:schemeClr val="tx1"/>
+            </a:solidFill>
+          </a:ln>
+          <a:effectLst>
+            <a:outerShdw blurRad="44450" dist="27940" dir="5400000" algn="ctr">
+              <a:srgbClr val="000000">
+                <a:alpha val="32000"/>
+              </a:srgbClr>
+            </a:outerShdw>
+          </a:effectLst>
+          <a:scene3d>
+            <a:camera prst="orthographicFront">
+              <a:rot lat="0" lon="0" rev="0"/>
+            </a:camera>
+            <a:lightRig rig="balanced" dir="t">
+              <a:rot lat="0" lon="0" rev="8700000"/>
+            </a:lightRig>
+          </a:scene3d>
+          <a:sp3d>
+            <a:bevelT w="190500" h="38100"/>
+          </a:sp3d>
+        </p:spPr>
+        <p:style>
+          <a:lnRef idx="2">
+            <a:schemeClr val="accent1">
+              <a:shade val="15000"/>
+            </a:schemeClr>
+          </a:lnRef>
+          <a:fillRef idx="1">
+            <a:schemeClr val="accent1"/>
+          </a:fillRef>
+          <a:effectRef idx="0">
+            <a:schemeClr val="accent1"/>
+          </a:effectRef>
+          <a:fontRef idx="minor">
+            <a:schemeClr val="lt1"/>
+          </a:fontRef>
+        </p:style>
+        <p:txBody>
+          <a:bodyPr rtlCol="0" anchor="ctr"/>
+          <a:lstStyle/>
+          <a:p>
+            <a:pPr algn="ctr"/>
+            <a:endParaRPr lang="en-US" sz="1400"/>
+          </a:p>
+        </p:txBody>
+      </p:sp>
+      <p:sp>
+        <p:nvSpPr>
+          <p:cNvPr id="5" name="Rectangle 4">
+            <a:extLst>
+              <a:ext uri="{FF2B5EF4-FFF2-40B4-BE49-F238E27FC236}">
+                <a16:creationId xmlns:a16="http://schemas.microsoft.com/office/drawing/2014/main" id="{783BB7CD-E92D-9CDC-E1D5-51486CB7C82B}"/>
+              </a:ext>
+            </a:extLst>
+          </p:cNvPr>
+          <p:cNvSpPr/>
+          <p:nvPr/>
+        </p:nvSpPr>
+        <p:spPr>
+          <a:xfrm>
+            <a:off x="796075" y="3661848"/>
+            <a:ext cx="137160" cy="137160"/>
+          </a:xfrm>
+          <a:prstGeom prst="rect">
+            <a:avLst/>
+          </a:prstGeom>
+          <a:noFill/>
+          <a:ln>
+            <a:solidFill>
+              <a:schemeClr val="tx1"/>
+            </a:solidFill>
+          </a:ln>
+          <a:effectLst>
+            <a:outerShdw blurRad="44450" dist="27940" dir="5400000" algn="ctr">
+              <a:srgbClr val="000000">
+                <a:alpha val="32000"/>
+              </a:srgbClr>
+            </a:outerShdw>
+          </a:effectLst>
+          <a:scene3d>
+            <a:camera prst="orthographicFront">
+              <a:rot lat="0" lon="0" rev="0"/>
+            </a:camera>
+            <a:lightRig rig="balanced" dir="t">
+              <a:rot lat="0" lon="0" rev="8700000"/>
+            </a:lightRig>
+          </a:scene3d>
+          <a:sp3d>
+            <a:bevelT w="190500" h="38100"/>
+          </a:sp3d>
+        </p:spPr>
+        <p:style>
+          <a:lnRef idx="2">
+            <a:schemeClr val="accent1">
+              <a:shade val="15000"/>
+            </a:schemeClr>
+          </a:lnRef>
+          <a:fillRef idx="1">
+            <a:schemeClr val="accent1"/>
+          </a:fillRef>
+          <a:effectRef idx="0">
+            <a:schemeClr val="accent1"/>
+          </a:effectRef>
+          <a:fontRef idx="minor">
+            <a:schemeClr val="lt1"/>
+          </a:fontRef>
+        </p:style>
+        <p:txBody>
+          <a:bodyPr rtlCol="0" anchor="ctr"/>
+          <a:lstStyle/>
+          <a:p>
+            <a:pPr algn="ctr"/>
+            <a:endParaRPr lang="en-US" sz="1400"/>
+          </a:p>
+        </p:txBody>
+      </p:sp>
+      <p:sp>
+        <p:nvSpPr>
+          <p:cNvPr id="6" name="Rectangle 5">
+            <a:extLst>
+              <a:ext uri="{FF2B5EF4-FFF2-40B4-BE49-F238E27FC236}">
+                <a16:creationId xmlns:a16="http://schemas.microsoft.com/office/drawing/2014/main" id="{9BEF9C03-D0B9-CDA0-65BC-E998720BBB88}"/>
+              </a:ext>
+            </a:extLst>
+          </p:cNvPr>
+          <p:cNvSpPr/>
+          <p:nvPr/>
+        </p:nvSpPr>
+        <p:spPr>
+          <a:xfrm>
+            <a:off x="796075" y="4496928"/>
+            <a:ext cx="137160" cy="137160"/>
+          </a:xfrm>
+          <a:prstGeom prst="rect">
+            <a:avLst/>
+          </a:prstGeom>
+          <a:noFill/>
+          <a:ln>
+            <a:solidFill>
+              <a:schemeClr val="tx1"/>
+            </a:solidFill>
+          </a:ln>
+          <a:effectLst>
+            <a:outerShdw blurRad="44450" dist="27940" dir="5400000" algn="ctr">
+              <a:srgbClr val="000000">
+                <a:alpha val="32000"/>
+              </a:srgbClr>
+            </a:outerShdw>
+          </a:effectLst>
+          <a:scene3d>
+            <a:camera prst="orthographicFront">
+              <a:rot lat="0" lon="0" rev="0"/>
+            </a:camera>
+            <a:lightRig rig="balanced" dir="t">
+              <a:rot lat="0" lon="0" rev="8700000"/>
+            </a:lightRig>
+          </a:scene3d>
+          <a:sp3d>
+            <a:bevelT w="190500" h="38100"/>
+          </a:sp3d>
+        </p:spPr>
+        <p:style>
+          <a:lnRef idx="2">
+            <a:schemeClr val="accent1">
+              <a:shade val="15000"/>
+            </a:schemeClr>
+          </a:lnRef>
+          <a:fillRef idx="1">
+            <a:schemeClr val="accent1"/>
+          </a:fillRef>
+          <a:effectRef idx="0">
+            <a:schemeClr val="accent1"/>
+          </a:effectRef>
+          <a:fontRef idx="minor">
+            <a:schemeClr val="lt1"/>
+          </a:fontRef>
+        </p:style>
+        <p:txBody>
+          <a:bodyPr rtlCol="0" anchor="ctr"/>
+          <a:lstStyle/>
+          <a:p>
+            <a:pPr algn="ctr"/>
+            <a:endParaRPr lang="en-US" sz="1400"/>
+          </a:p>
+        </p:txBody>
+      </p:sp>
+      <p:sp>
+        <p:nvSpPr>
+          <p:cNvPr id="14" name="TextBox 1">
+            <a:extLst>
+              <a:ext uri="{FF2B5EF4-FFF2-40B4-BE49-F238E27FC236}">
+                <a16:creationId xmlns:a16="http://schemas.microsoft.com/office/drawing/2014/main" id="{851BBCB0-00F0-CDEB-9099-96A7DCD221DC}"/>
+              </a:ext>
+            </a:extLst>
+          </p:cNvPr>
           <p:cNvSpPr txBox="1">
             <a:spLocks noChangeArrowheads="1"/>
           </p:cNvSpPr>
@@ -6199,8 +6135,8 @@
         </p:nvSpPr>
         <p:spPr bwMode="auto">
           <a:xfrm>
-            <a:off x="5345754" y="1257546"/>
-            <a:ext cx="2263953" cy="461665"/>
+            <a:off x="1019778" y="1503323"/>
+            <a:ext cx="1400961" cy="307777"/>
           </a:xfrm>
           <a:prstGeom prst="rect">
             <a:avLst/>
@@ -6383,7 +6319,7 @@
               <a:buNone/>
             </a:pPr>
             <a:r>
-              <a:rPr lang="en-US" altLang="en-US" sz="2400" dirty="0">
+              <a:rPr lang="en-US" altLang="en-US" sz="1400" dirty="0">
                 <a:latin typeface="+mn-lt"/>
                 <a:ea typeface="Verdana" panose="020B0604030504040204" pitchFamily="34" charset="0"/>
                 <a:cs typeface="Verdana" panose="020B0604030504040204" pitchFamily="34" charset="0"/>
@@ -6395,7 +6331,13 @@
       </p:sp>
       <p:sp>
         <p:nvSpPr>
-          <p:cNvPr id="20" name="TextBox 1"/>
+          <p:cNvPr id="24" name="TextBox 1">
+            <a:extLst>
+              <a:ext uri="{FF2B5EF4-FFF2-40B4-BE49-F238E27FC236}">
+                <a16:creationId xmlns:a16="http://schemas.microsoft.com/office/drawing/2014/main" id="{048756FD-BA8A-E102-DA10-53E4710E78FF}"/>
+              </a:ext>
+            </a:extLst>
+          </p:cNvPr>
           <p:cNvSpPr txBox="1">
             <a:spLocks noChangeArrowheads="1"/>
           </p:cNvSpPr>
@@ -6403,8 +6345,8 @@
         </p:nvSpPr>
         <p:spPr bwMode="auto">
           <a:xfrm>
-            <a:off x="5345754" y="1985583"/>
-            <a:ext cx="2263953" cy="461665"/>
+            <a:off x="1019778" y="2346783"/>
+            <a:ext cx="1400961" cy="307777"/>
           </a:xfrm>
           <a:prstGeom prst="rect">
             <a:avLst/>
@@ -6587,7 +6529,7 @@
               <a:buNone/>
             </a:pPr>
             <a:r>
-              <a:rPr lang="en-US" altLang="en-US" sz="2400" dirty="0">
+              <a:rPr lang="en-US" altLang="en-US" sz="1400" dirty="0">
                 <a:latin typeface="+mn-lt"/>
                 <a:ea typeface="Verdana" panose="020B0604030504040204" pitchFamily="34" charset="0"/>
                 <a:cs typeface="Verdana" panose="020B0604030504040204" pitchFamily="34" charset="0"/>
@@ -6599,7 +6541,13 @@
       </p:sp>
       <p:sp>
         <p:nvSpPr>
-          <p:cNvPr id="21" name="TextBox 1"/>
+          <p:cNvPr id="26" name="TextBox 1">
+            <a:extLst>
+              <a:ext uri="{FF2B5EF4-FFF2-40B4-BE49-F238E27FC236}">
+                <a16:creationId xmlns:a16="http://schemas.microsoft.com/office/drawing/2014/main" id="{601568C5-CBCD-616A-B58E-B7A527FBE844}"/>
+              </a:ext>
+            </a:extLst>
+          </p:cNvPr>
           <p:cNvSpPr txBox="1">
             <a:spLocks noChangeArrowheads="1"/>
           </p:cNvSpPr>
@@ -6607,8 +6555,8 @@
         </p:nvSpPr>
         <p:spPr bwMode="auto">
           <a:xfrm>
-            <a:off x="5369477" y="2684669"/>
-            <a:ext cx="2263953" cy="461665"/>
+            <a:off x="1027475" y="3173249"/>
+            <a:ext cx="1400961" cy="307777"/>
           </a:xfrm>
           <a:prstGeom prst="rect">
             <a:avLst/>
@@ -6791,7 +6739,7 @@
               <a:buNone/>
             </a:pPr>
             <a:r>
-              <a:rPr lang="en-US" altLang="en-US" sz="2400" dirty="0">
+              <a:rPr lang="en-US" altLang="en-US" sz="1400" dirty="0">
                 <a:latin typeface="+mn-lt"/>
                 <a:ea typeface="Verdana" panose="020B0604030504040204" pitchFamily="34" charset="0"/>
                 <a:cs typeface="Verdana" panose="020B0604030504040204" pitchFamily="34" charset="0"/>
@@ -6803,7 +6751,13 @@
       </p:sp>
       <p:sp>
         <p:nvSpPr>
-          <p:cNvPr id="22" name="TextBox 1"/>
+          <p:cNvPr id="27" name="TextBox 1">
+            <a:extLst>
+              <a:ext uri="{FF2B5EF4-FFF2-40B4-BE49-F238E27FC236}">
+                <a16:creationId xmlns:a16="http://schemas.microsoft.com/office/drawing/2014/main" id="{39B606A1-6B48-45C4-DEB0-69DB28D9F1A0}"/>
+              </a:ext>
+            </a:extLst>
+          </p:cNvPr>
           <p:cNvSpPr txBox="1">
             <a:spLocks noChangeArrowheads="1"/>
           </p:cNvSpPr>
@@ -6811,8 +6765,8 @@
         </p:nvSpPr>
         <p:spPr bwMode="auto">
           <a:xfrm>
-            <a:off x="5369477" y="3383755"/>
-            <a:ext cx="2263953" cy="461665"/>
+            <a:off x="1027475" y="3998606"/>
+            <a:ext cx="1400961" cy="307777"/>
           </a:xfrm>
           <a:prstGeom prst="rect">
             <a:avLst/>
@@ -6995,7 +6949,7 @@
               <a:buNone/>
             </a:pPr>
             <a:r>
-              <a:rPr lang="en-US" altLang="en-US" sz="2400" dirty="0">
+              <a:rPr lang="en-US" altLang="en-US" sz="1400" dirty="0">
                 <a:latin typeface="+mn-lt"/>
                 <a:ea typeface="Verdana" panose="020B0604030504040204" pitchFamily="34" charset="0"/>
                 <a:cs typeface="Verdana" panose="020B0604030504040204" pitchFamily="34" charset="0"/>
@@ -7007,7 +6961,293 @@
       </p:sp>
       <p:sp>
         <p:nvSpPr>
-          <p:cNvPr id="25" name="TextBox 1"/>
+          <p:cNvPr id="28" name="Rectangle 27">
+            <a:extLst>
+              <a:ext uri="{FF2B5EF4-FFF2-40B4-BE49-F238E27FC236}">
+                <a16:creationId xmlns:a16="http://schemas.microsoft.com/office/drawing/2014/main" id="{927CDB8B-2F49-B678-3A55-1510D8FCBE40}"/>
+              </a:ext>
+            </a:extLst>
+          </p:cNvPr>
+          <p:cNvSpPr/>
+          <p:nvPr/>
+        </p:nvSpPr>
+        <p:spPr>
+          <a:xfrm>
+            <a:off x="787401" y="1576598"/>
+            <a:ext cx="137160" cy="137160"/>
+          </a:xfrm>
+          <a:prstGeom prst="rect">
+            <a:avLst/>
+          </a:prstGeom>
+          <a:noFill/>
+          <a:ln>
+            <a:solidFill>
+              <a:schemeClr val="tx1"/>
+            </a:solidFill>
+          </a:ln>
+          <a:effectLst>
+            <a:outerShdw blurRad="44450" dist="27940" dir="5400000" algn="ctr">
+              <a:srgbClr val="000000">
+                <a:alpha val="32000"/>
+              </a:srgbClr>
+            </a:outerShdw>
+          </a:effectLst>
+          <a:scene3d>
+            <a:camera prst="orthographicFront">
+              <a:rot lat="0" lon="0" rev="0"/>
+            </a:camera>
+            <a:lightRig rig="balanced" dir="t">
+              <a:rot lat="0" lon="0" rev="8700000"/>
+            </a:lightRig>
+          </a:scene3d>
+          <a:sp3d>
+            <a:bevelT w="190500" h="38100"/>
+          </a:sp3d>
+        </p:spPr>
+        <p:style>
+          <a:lnRef idx="2">
+            <a:schemeClr val="accent1">
+              <a:shade val="15000"/>
+            </a:schemeClr>
+          </a:lnRef>
+          <a:fillRef idx="1">
+            <a:schemeClr val="accent1"/>
+          </a:fillRef>
+          <a:effectRef idx="0">
+            <a:schemeClr val="accent1"/>
+          </a:effectRef>
+          <a:fontRef idx="minor">
+            <a:schemeClr val="lt1"/>
+          </a:fontRef>
+        </p:style>
+        <p:txBody>
+          <a:bodyPr rtlCol="0" anchor="ctr"/>
+          <a:lstStyle/>
+          <a:p>
+            <a:pPr algn="ctr"/>
+            <a:endParaRPr lang="en-US" sz="1400"/>
+          </a:p>
+        </p:txBody>
+      </p:sp>
+      <p:sp>
+        <p:nvSpPr>
+          <p:cNvPr id="29" name="Rectangle 28">
+            <a:extLst>
+              <a:ext uri="{FF2B5EF4-FFF2-40B4-BE49-F238E27FC236}">
+                <a16:creationId xmlns:a16="http://schemas.microsoft.com/office/drawing/2014/main" id="{448E1326-3DDD-9FD1-2815-70A04F654377}"/>
+              </a:ext>
+            </a:extLst>
+          </p:cNvPr>
+          <p:cNvSpPr/>
+          <p:nvPr/>
+        </p:nvSpPr>
+        <p:spPr>
+          <a:xfrm>
+            <a:off x="796075" y="2421580"/>
+            <a:ext cx="137160" cy="137160"/>
+          </a:xfrm>
+          <a:prstGeom prst="rect">
+            <a:avLst/>
+          </a:prstGeom>
+          <a:noFill/>
+          <a:ln>
+            <a:solidFill>
+              <a:schemeClr val="tx1"/>
+            </a:solidFill>
+          </a:ln>
+          <a:effectLst>
+            <a:outerShdw blurRad="44450" dist="27940" dir="5400000" algn="ctr">
+              <a:srgbClr val="000000">
+                <a:alpha val="32000"/>
+              </a:srgbClr>
+            </a:outerShdw>
+          </a:effectLst>
+          <a:scene3d>
+            <a:camera prst="orthographicFront">
+              <a:rot lat="0" lon="0" rev="0"/>
+            </a:camera>
+            <a:lightRig rig="balanced" dir="t">
+              <a:rot lat="0" lon="0" rev="8700000"/>
+            </a:lightRig>
+          </a:scene3d>
+          <a:sp3d>
+            <a:bevelT w="190500" h="38100"/>
+          </a:sp3d>
+        </p:spPr>
+        <p:style>
+          <a:lnRef idx="2">
+            <a:schemeClr val="accent1">
+              <a:shade val="15000"/>
+            </a:schemeClr>
+          </a:lnRef>
+          <a:fillRef idx="1">
+            <a:schemeClr val="accent1"/>
+          </a:fillRef>
+          <a:effectRef idx="0">
+            <a:schemeClr val="accent1"/>
+          </a:effectRef>
+          <a:fontRef idx="minor">
+            <a:schemeClr val="lt1"/>
+          </a:fontRef>
+        </p:style>
+        <p:txBody>
+          <a:bodyPr rtlCol="0" anchor="ctr"/>
+          <a:lstStyle/>
+          <a:p>
+            <a:pPr algn="ctr"/>
+            <a:endParaRPr lang="en-US" sz="1400"/>
+          </a:p>
+        </p:txBody>
+      </p:sp>
+      <p:sp>
+        <p:nvSpPr>
+          <p:cNvPr id="30" name="Rectangle 29">
+            <a:extLst>
+              <a:ext uri="{FF2B5EF4-FFF2-40B4-BE49-F238E27FC236}">
+                <a16:creationId xmlns:a16="http://schemas.microsoft.com/office/drawing/2014/main" id="{832CC619-1800-8D12-EBC4-8963BEA990DB}"/>
+              </a:ext>
+            </a:extLst>
+          </p:cNvPr>
+          <p:cNvSpPr/>
+          <p:nvPr/>
+        </p:nvSpPr>
+        <p:spPr>
+          <a:xfrm>
+            <a:off x="796075" y="3237634"/>
+            <a:ext cx="137160" cy="137160"/>
+          </a:xfrm>
+          <a:prstGeom prst="rect">
+            <a:avLst/>
+          </a:prstGeom>
+          <a:noFill/>
+          <a:ln>
+            <a:solidFill>
+              <a:schemeClr val="tx1"/>
+            </a:solidFill>
+          </a:ln>
+          <a:effectLst>
+            <a:outerShdw blurRad="44450" dist="27940" dir="5400000" algn="ctr">
+              <a:srgbClr val="000000">
+                <a:alpha val="32000"/>
+              </a:srgbClr>
+            </a:outerShdw>
+          </a:effectLst>
+          <a:scene3d>
+            <a:camera prst="orthographicFront">
+              <a:rot lat="0" lon="0" rev="0"/>
+            </a:camera>
+            <a:lightRig rig="balanced" dir="t">
+              <a:rot lat="0" lon="0" rev="8700000"/>
+            </a:lightRig>
+          </a:scene3d>
+          <a:sp3d>
+            <a:bevelT w="190500" h="38100"/>
+          </a:sp3d>
+        </p:spPr>
+        <p:style>
+          <a:lnRef idx="2">
+            <a:schemeClr val="accent1">
+              <a:shade val="15000"/>
+            </a:schemeClr>
+          </a:lnRef>
+          <a:fillRef idx="1">
+            <a:schemeClr val="accent1"/>
+          </a:fillRef>
+          <a:effectRef idx="0">
+            <a:schemeClr val="accent1"/>
+          </a:effectRef>
+          <a:fontRef idx="minor">
+            <a:schemeClr val="lt1"/>
+          </a:fontRef>
+        </p:style>
+        <p:txBody>
+          <a:bodyPr rtlCol="0" anchor="ctr"/>
+          <a:lstStyle/>
+          <a:p>
+            <a:pPr algn="ctr"/>
+            <a:endParaRPr lang="en-US" sz="1400"/>
+          </a:p>
+        </p:txBody>
+      </p:sp>
+      <p:sp>
+        <p:nvSpPr>
+          <p:cNvPr id="31" name="Rectangle 30">
+            <a:extLst>
+              <a:ext uri="{FF2B5EF4-FFF2-40B4-BE49-F238E27FC236}">
+                <a16:creationId xmlns:a16="http://schemas.microsoft.com/office/drawing/2014/main" id="{D54BEFA7-DCD0-B45B-759A-82714B5A60A3}"/>
+              </a:ext>
+            </a:extLst>
+          </p:cNvPr>
+          <p:cNvSpPr/>
+          <p:nvPr/>
+        </p:nvSpPr>
+        <p:spPr>
+          <a:xfrm>
+            <a:off x="792588" y="4071934"/>
+            <a:ext cx="137160" cy="137160"/>
+          </a:xfrm>
+          <a:prstGeom prst="rect">
+            <a:avLst/>
+          </a:prstGeom>
+          <a:noFill/>
+          <a:ln>
+            <a:solidFill>
+              <a:schemeClr val="tx1"/>
+            </a:solidFill>
+          </a:ln>
+          <a:effectLst>
+            <a:outerShdw blurRad="44450" dist="27940" dir="5400000" algn="ctr">
+              <a:srgbClr val="000000">
+                <a:alpha val="32000"/>
+              </a:srgbClr>
+            </a:outerShdw>
+          </a:effectLst>
+          <a:scene3d>
+            <a:camera prst="orthographicFront">
+              <a:rot lat="0" lon="0" rev="0"/>
+            </a:camera>
+            <a:lightRig rig="balanced" dir="t">
+              <a:rot lat="0" lon="0" rev="8700000"/>
+            </a:lightRig>
+          </a:scene3d>
+          <a:sp3d>
+            <a:bevelT w="190500" h="38100"/>
+          </a:sp3d>
+        </p:spPr>
+        <p:style>
+          <a:lnRef idx="2">
+            <a:schemeClr val="accent1">
+              <a:shade val="15000"/>
+            </a:schemeClr>
+          </a:lnRef>
+          <a:fillRef idx="1">
+            <a:schemeClr val="accent1"/>
+          </a:fillRef>
+          <a:effectRef idx="0">
+            <a:schemeClr val="accent1"/>
+          </a:effectRef>
+          <a:fontRef idx="minor">
+            <a:schemeClr val="lt1"/>
+          </a:fontRef>
+        </p:style>
+        <p:txBody>
+          <a:bodyPr rtlCol="0" anchor="ctr"/>
+          <a:lstStyle/>
+          <a:p>
+            <a:pPr algn="ctr"/>
+            <a:endParaRPr lang="en-US" sz="1400"/>
+          </a:p>
+        </p:txBody>
+      </p:sp>
+      <p:sp>
+        <p:nvSpPr>
+          <p:cNvPr id="32" name="TextBox 1">
+            <a:extLst>
+              <a:ext uri="{FF2B5EF4-FFF2-40B4-BE49-F238E27FC236}">
+                <a16:creationId xmlns:a16="http://schemas.microsoft.com/office/drawing/2014/main" id="{CE668C05-55DD-F689-165F-964343110041}"/>
+              </a:ext>
+            </a:extLst>
+          </p:cNvPr>
           <p:cNvSpPr txBox="1">
             <a:spLocks noChangeArrowheads="1"/>
           </p:cNvSpPr>
@@ -7015,8 +7255,8 @@
         </p:nvSpPr>
         <p:spPr bwMode="auto">
           <a:xfrm>
-            <a:off x="5377146" y="4186535"/>
-            <a:ext cx="2263953" cy="461665"/>
+            <a:off x="3716627" y="1089678"/>
+            <a:ext cx="1400961" cy="307777"/>
           </a:xfrm>
           <a:prstGeom prst="rect">
             <a:avLst/>
@@ -7199,13 +7439,4843 @@
               <a:buNone/>
             </a:pPr>
             <a:r>
-              <a:rPr lang="en-US" altLang="en-US" sz="2400" dirty="0">
+              <a:rPr lang="en-US" altLang="en-US" sz="1400" dirty="0">
                 <a:latin typeface="+mn-lt"/>
                 <a:ea typeface="Verdana" panose="020B0604030504040204" pitchFamily="34" charset="0"/>
                 <a:cs typeface="Verdana" panose="020B0604030504040204" pitchFamily="34" charset="0"/>
               </a:rPr>
               <a:t>Name Candidate</a:t>
             </a:r>
+          </a:p>
+        </p:txBody>
+      </p:sp>
+      <p:sp>
+        <p:nvSpPr>
+          <p:cNvPr id="33" name="TextBox 1">
+            <a:extLst>
+              <a:ext uri="{FF2B5EF4-FFF2-40B4-BE49-F238E27FC236}">
+                <a16:creationId xmlns:a16="http://schemas.microsoft.com/office/drawing/2014/main" id="{0711F892-8CCA-BCC0-2DE5-2C0AF3085DE0}"/>
+              </a:ext>
+            </a:extLst>
+          </p:cNvPr>
+          <p:cNvSpPr txBox="1">
+            <a:spLocks noChangeArrowheads="1"/>
+          </p:cNvSpPr>
+          <p:nvPr/>
+        </p:nvSpPr>
+        <p:spPr bwMode="auto">
+          <a:xfrm>
+            <a:off x="3724324" y="1917966"/>
+            <a:ext cx="1400961" cy="307777"/>
+          </a:xfrm>
+          <a:prstGeom prst="rect">
+            <a:avLst/>
+          </a:prstGeom>
+          <a:noFill/>
+          <a:ln>
+            <a:noFill/>
+          </a:ln>
+          <a:extLst>
+            <a:ext uri="{909E8E84-426E-40DD-AFC4-6F175D3DCCD1}">
+              <a14:hiddenFill xmlns:a14="http://schemas.microsoft.com/office/drawing/2010/main">
+                <a:solidFill>
+                  <a:srgbClr val="FFFFFF"/>
+                </a:solidFill>
+              </a14:hiddenFill>
+            </a:ext>
+            <a:ext uri="{91240B29-F687-4F45-9708-019B960494DF}">
+              <a14:hiddenLine xmlns:a14="http://schemas.microsoft.com/office/drawing/2010/main" w="9525">
+                <a:solidFill>
+                  <a:srgbClr val="000000"/>
+                </a:solidFill>
+                <a:miter lim="800000"/>
+                <a:headEnd/>
+                <a:tailEnd/>
+              </a14:hiddenLine>
+            </a:ext>
+          </a:extLst>
+        </p:spPr>
+        <p:txBody>
+          <a:bodyPr wrap="none">
+            <a:spAutoFit/>
+          </a:bodyPr>
+          <a:lstStyle>
+            <a:lvl1pPr algn="just">
+              <a:buClr>
+                <a:srgbClr val="1E3D7D"/>
+              </a:buClr>
+              <a:buFont typeface="Wingdings" panose="05000000000000000000" pitchFamily="2" charset="2"/>
+              <a:buChar char="§"/>
+              <a:defRPr>
+                <a:solidFill>
+                  <a:schemeClr val="tx1"/>
+                </a:solidFill>
+                <a:latin typeface="Calibri" panose="020F0502020204030204" pitchFamily="34" charset="0"/>
+              </a:defRPr>
+            </a:lvl1pPr>
+            <a:lvl2pPr marL="742950" indent="-285750" algn="just">
+              <a:buClr>
+                <a:srgbClr val="1E3D7D"/>
+              </a:buClr>
+              <a:buFont typeface="Courier New" panose="02070309020205020404" pitchFamily="49" charset="0"/>
+              <a:buChar char="o"/>
+              <a:defRPr>
+                <a:solidFill>
+                  <a:schemeClr val="tx1"/>
+                </a:solidFill>
+                <a:latin typeface="Calibri" panose="020F0502020204030204" pitchFamily="34" charset="0"/>
+              </a:defRPr>
+            </a:lvl2pPr>
+            <a:lvl3pPr marL="1143000" indent="-228600" algn="just">
+              <a:buClr>
+                <a:srgbClr val="1E3D7D"/>
+              </a:buClr>
+              <a:buFont typeface="Arial" panose="020B0604020202020204" pitchFamily="34" charset="0"/>
+              <a:buChar char="•"/>
+              <a:defRPr>
+                <a:solidFill>
+                  <a:schemeClr val="tx1"/>
+                </a:solidFill>
+                <a:latin typeface="Calibri" panose="020F0502020204030204" pitchFamily="34" charset="0"/>
+              </a:defRPr>
+            </a:lvl3pPr>
+            <a:lvl4pPr marL="1600200" indent="-228600" algn="just">
+              <a:buClr>
+                <a:srgbClr val="1E3D7D"/>
+              </a:buClr>
+              <a:buFont typeface="Arial" panose="020B0604020202020204" pitchFamily="34" charset="0"/>
+              <a:buChar char="•"/>
+              <a:defRPr>
+                <a:solidFill>
+                  <a:schemeClr val="tx1"/>
+                </a:solidFill>
+                <a:latin typeface="Calibri" panose="020F0502020204030204" pitchFamily="34" charset="0"/>
+              </a:defRPr>
+            </a:lvl4pPr>
+            <a:lvl5pPr marL="2057400" indent="-228600" algn="just">
+              <a:buClr>
+                <a:srgbClr val="1E3D7D"/>
+              </a:buClr>
+              <a:buFont typeface="Arial" panose="020B0604020202020204" pitchFamily="34" charset="0"/>
+              <a:buChar char="•"/>
+              <a:defRPr>
+                <a:solidFill>
+                  <a:schemeClr val="tx1"/>
+                </a:solidFill>
+                <a:latin typeface="Calibri" panose="020F0502020204030204" pitchFamily="34" charset="0"/>
+              </a:defRPr>
+            </a:lvl5pPr>
+            <a:lvl6pPr marL="2514600" indent="-228600" algn="just" eaLnBrk="0" fontAlgn="base" hangingPunct="0">
+              <a:spcBef>
+                <a:spcPct val="0"/>
+              </a:spcBef>
+              <a:spcAft>
+                <a:spcPct val="0"/>
+              </a:spcAft>
+              <a:buClr>
+                <a:srgbClr val="1E3D7D"/>
+              </a:buClr>
+              <a:buFont typeface="Arial" panose="020B0604020202020204" pitchFamily="34" charset="0"/>
+              <a:buChar char="•"/>
+              <a:defRPr>
+                <a:solidFill>
+                  <a:schemeClr val="tx1"/>
+                </a:solidFill>
+                <a:latin typeface="Calibri" panose="020F0502020204030204" pitchFamily="34" charset="0"/>
+              </a:defRPr>
+            </a:lvl6pPr>
+            <a:lvl7pPr marL="2971800" indent="-228600" algn="just" eaLnBrk="0" fontAlgn="base" hangingPunct="0">
+              <a:spcBef>
+                <a:spcPct val="0"/>
+              </a:spcBef>
+              <a:spcAft>
+                <a:spcPct val="0"/>
+              </a:spcAft>
+              <a:buClr>
+                <a:srgbClr val="1E3D7D"/>
+              </a:buClr>
+              <a:buFont typeface="Arial" panose="020B0604020202020204" pitchFamily="34" charset="0"/>
+              <a:buChar char="•"/>
+              <a:defRPr>
+                <a:solidFill>
+                  <a:schemeClr val="tx1"/>
+                </a:solidFill>
+                <a:latin typeface="Calibri" panose="020F0502020204030204" pitchFamily="34" charset="0"/>
+              </a:defRPr>
+            </a:lvl7pPr>
+            <a:lvl8pPr marL="3429000" indent="-228600" algn="just" eaLnBrk="0" fontAlgn="base" hangingPunct="0">
+              <a:spcBef>
+                <a:spcPct val="0"/>
+              </a:spcBef>
+              <a:spcAft>
+                <a:spcPct val="0"/>
+              </a:spcAft>
+              <a:buClr>
+                <a:srgbClr val="1E3D7D"/>
+              </a:buClr>
+              <a:buFont typeface="Arial" panose="020B0604020202020204" pitchFamily="34" charset="0"/>
+              <a:buChar char="•"/>
+              <a:defRPr>
+                <a:solidFill>
+                  <a:schemeClr val="tx1"/>
+                </a:solidFill>
+                <a:latin typeface="Calibri" panose="020F0502020204030204" pitchFamily="34" charset="0"/>
+              </a:defRPr>
+            </a:lvl8pPr>
+            <a:lvl9pPr marL="3886200" indent="-228600" algn="just" eaLnBrk="0" fontAlgn="base" hangingPunct="0">
+              <a:spcBef>
+                <a:spcPct val="0"/>
+              </a:spcBef>
+              <a:spcAft>
+                <a:spcPct val="0"/>
+              </a:spcAft>
+              <a:buClr>
+                <a:srgbClr val="1E3D7D"/>
+              </a:buClr>
+              <a:buFont typeface="Arial" panose="020B0604020202020204" pitchFamily="34" charset="0"/>
+              <a:buChar char="•"/>
+              <a:defRPr>
+                <a:solidFill>
+                  <a:schemeClr val="tx1"/>
+                </a:solidFill>
+                <a:latin typeface="Calibri" panose="020F0502020204030204" pitchFamily="34" charset="0"/>
+              </a:defRPr>
+            </a:lvl9pPr>
+          </a:lstStyle>
+          <a:p>
+            <a:pPr algn="ctr" eaLnBrk="1" hangingPunct="1">
+              <a:buClrTx/>
+              <a:buFontTx/>
+              <a:buNone/>
+            </a:pPr>
+            <a:r>
+              <a:rPr lang="en-US" altLang="en-US" sz="1400" dirty="0">
+                <a:latin typeface="+mn-lt"/>
+                <a:ea typeface="Verdana" panose="020B0604030504040204" pitchFamily="34" charset="0"/>
+                <a:cs typeface="Verdana" panose="020B0604030504040204" pitchFamily="34" charset="0"/>
+              </a:rPr>
+              <a:t>Name Candidate</a:t>
+            </a:r>
+          </a:p>
+        </p:txBody>
+      </p:sp>
+      <p:sp>
+        <p:nvSpPr>
+          <p:cNvPr id="34" name="TextBox 1">
+            <a:extLst>
+              <a:ext uri="{FF2B5EF4-FFF2-40B4-BE49-F238E27FC236}">
+                <a16:creationId xmlns:a16="http://schemas.microsoft.com/office/drawing/2014/main" id="{FDBA3D6E-A3EE-6973-1D00-8F54E29723C2}"/>
+              </a:ext>
+            </a:extLst>
+          </p:cNvPr>
+          <p:cNvSpPr txBox="1">
+            <a:spLocks noChangeArrowheads="1"/>
+          </p:cNvSpPr>
+          <p:nvPr/>
+        </p:nvSpPr>
+        <p:spPr bwMode="auto">
+          <a:xfrm>
+            <a:off x="3724324" y="2737532"/>
+            <a:ext cx="1400961" cy="307777"/>
+          </a:xfrm>
+          <a:prstGeom prst="rect">
+            <a:avLst/>
+          </a:prstGeom>
+          <a:noFill/>
+          <a:ln>
+            <a:noFill/>
+          </a:ln>
+          <a:extLst>
+            <a:ext uri="{909E8E84-426E-40DD-AFC4-6F175D3DCCD1}">
+              <a14:hiddenFill xmlns:a14="http://schemas.microsoft.com/office/drawing/2010/main">
+                <a:solidFill>
+                  <a:srgbClr val="FFFFFF"/>
+                </a:solidFill>
+              </a14:hiddenFill>
+            </a:ext>
+            <a:ext uri="{91240B29-F687-4F45-9708-019B960494DF}">
+              <a14:hiddenLine xmlns:a14="http://schemas.microsoft.com/office/drawing/2010/main" w="9525">
+                <a:solidFill>
+                  <a:srgbClr val="000000"/>
+                </a:solidFill>
+                <a:miter lim="800000"/>
+                <a:headEnd/>
+                <a:tailEnd/>
+              </a14:hiddenLine>
+            </a:ext>
+          </a:extLst>
+        </p:spPr>
+        <p:txBody>
+          <a:bodyPr wrap="none">
+            <a:spAutoFit/>
+          </a:bodyPr>
+          <a:lstStyle>
+            <a:lvl1pPr algn="just">
+              <a:buClr>
+                <a:srgbClr val="1E3D7D"/>
+              </a:buClr>
+              <a:buFont typeface="Wingdings" panose="05000000000000000000" pitchFamily="2" charset="2"/>
+              <a:buChar char="§"/>
+              <a:defRPr>
+                <a:solidFill>
+                  <a:schemeClr val="tx1"/>
+                </a:solidFill>
+                <a:latin typeface="Calibri" panose="020F0502020204030204" pitchFamily="34" charset="0"/>
+              </a:defRPr>
+            </a:lvl1pPr>
+            <a:lvl2pPr marL="742950" indent="-285750" algn="just">
+              <a:buClr>
+                <a:srgbClr val="1E3D7D"/>
+              </a:buClr>
+              <a:buFont typeface="Courier New" panose="02070309020205020404" pitchFamily="49" charset="0"/>
+              <a:buChar char="o"/>
+              <a:defRPr>
+                <a:solidFill>
+                  <a:schemeClr val="tx1"/>
+                </a:solidFill>
+                <a:latin typeface="Calibri" panose="020F0502020204030204" pitchFamily="34" charset="0"/>
+              </a:defRPr>
+            </a:lvl2pPr>
+            <a:lvl3pPr marL="1143000" indent="-228600" algn="just">
+              <a:buClr>
+                <a:srgbClr val="1E3D7D"/>
+              </a:buClr>
+              <a:buFont typeface="Arial" panose="020B0604020202020204" pitchFamily="34" charset="0"/>
+              <a:buChar char="•"/>
+              <a:defRPr>
+                <a:solidFill>
+                  <a:schemeClr val="tx1"/>
+                </a:solidFill>
+                <a:latin typeface="Calibri" panose="020F0502020204030204" pitchFamily="34" charset="0"/>
+              </a:defRPr>
+            </a:lvl3pPr>
+            <a:lvl4pPr marL="1600200" indent="-228600" algn="just">
+              <a:buClr>
+                <a:srgbClr val="1E3D7D"/>
+              </a:buClr>
+              <a:buFont typeface="Arial" panose="020B0604020202020204" pitchFamily="34" charset="0"/>
+              <a:buChar char="•"/>
+              <a:defRPr>
+                <a:solidFill>
+                  <a:schemeClr val="tx1"/>
+                </a:solidFill>
+                <a:latin typeface="Calibri" panose="020F0502020204030204" pitchFamily="34" charset="0"/>
+              </a:defRPr>
+            </a:lvl4pPr>
+            <a:lvl5pPr marL="2057400" indent="-228600" algn="just">
+              <a:buClr>
+                <a:srgbClr val="1E3D7D"/>
+              </a:buClr>
+              <a:buFont typeface="Arial" panose="020B0604020202020204" pitchFamily="34" charset="0"/>
+              <a:buChar char="•"/>
+              <a:defRPr>
+                <a:solidFill>
+                  <a:schemeClr val="tx1"/>
+                </a:solidFill>
+                <a:latin typeface="Calibri" panose="020F0502020204030204" pitchFamily="34" charset="0"/>
+              </a:defRPr>
+            </a:lvl5pPr>
+            <a:lvl6pPr marL="2514600" indent="-228600" algn="just" eaLnBrk="0" fontAlgn="base" hangingPunct="0">
+              <a:spcBef>
+                <a:spcPct val="0"/>
+              </a:spcBef>
+              <a:spcAft>
+                <a:spcPct val="0"/>
+              </a:spcAft>
+              <a:buClr>
+                <a:srgbClr val="1E3D7D"/>
+              </a:buClr>
+              <a:buFont typeface="Arial" panose="020B0604020202020204" pitchFamily="34" charset="0"/>
+              <a:buChar char="•"/>
+              <a:defRPr>
+                <a:solidFill>
+                  <a:schemeClr val="tx1"/>
+                </a:solidFill>
+                <a:latin typeface="Calibri" panose="020F0502020204030204" pitchFamily="34" charset="0"/>
+              </a:defRPr>
+            </a:lvl6pPr>
+            <a:lvl7pPr marL="2971800" indent="-228600" algn="just" eaLnBrk="0" fontAlgn="base" hangingPunct="0">
+              <a:spcBef>
+                <a:spcPct val="0"/>
+              </a:spcBef>
+              <a:spcAft>
+                <a:spcPct val="0"/>
+              </a:spcAft>
+              <a:buClr>
+                <a:srgbClr val="1E3D7D"/>
+              </a:buClr>
+              <a:buFont typeface="Arial" panose="020B0604020202020204" pitchFamily="34" charset="0"/>
+              <a:buChar char="•"/>
+              <a:defRPr>
+                <a:solidFill>
+                  <a:schemeClr val="tx1"/>
+                </a:solidFill>
+                <a:latin typeface="Calibri" panose="020F0502020204030204" pitchFamily="34" charset="0"/>
+              </a:defRPr>
+            </a:lvl7pPr>
+            <a:lvl8pPr marL="3429000" indent="-228600" algn="just" eaLnBrk="0" fontAlgn="base" hangingPunct="0">
+              <a:spcBef>
+                <a:spcPct val="0"/>
+              </a:spcBef>
+              <a:spcAft>
+                <a:spcPct val="0"/>
+              </a:spcAft>
+              <a:buClr>
+                <a:srgbClr val="1E3D7D"/>
+              </a:buClr>
+              <a:buFont typeface="Arial" panose="020B0604020202020204" pitchFamily="34" charset="0"/>
+              <a:buChar char="•"/>
+              <a:defRPr>
+                <a:solidFill>
+                  <a:schemeClr val="tx1"/>
+                </a:solidFill>
+                <a:latin typeface="Calibri" panose="020F0502020204030204" pitchFamily="34" charset="0"/>
+              </a:defRPr>
+            </a:lvl8pPr>
+            <a:lvl9pPr marL="3886200" indent="-228600" algn="just" eaLnBrk="0" fontAlgn="base" hangingPunct="0">
+              <a:spcBef>
+                <a:spcPct val="0"/>
+              </a:spcBef>
+              <a:spcAft>
+                <a:spcPct val="0"/>
+              </a:spcAft>
+              <a:buClr>
+                <a:srgbClr val="1E3D7D"/>
+              </a:buClr>
+              <a:buFont typeface="Arial" panose="020B0604020202020204" pitchFamily="34" charset="0"/>
+              <a:buChar char="•"/>
+              <a:defRPr>
+                <a:solidFill>
+                  <a:schemeClr val="tx1"/>
+                </a:solidFill>
+                <a:latin typeface="Calibri" panose="020F0502020204030204" pitchFamily="34" charset="0"/>
+              </a:defRPr>
+            </a:lvl9pPr>
+          </a:lstStyle>
+          <a:p>
+            <a:pPr algn="ctr" eaLnBrk="1" hangingPunct="1">
+              <a:buClrTx/>
+              <a:buFontTx/>
+              <a:buNone/>
+            </a:pPr>
+            <a:r>
+              <a:rPr lang="en-US" altLang="en-US" sz="1400" dirty="0">
+                <a:latin typeface="+mn-lt"/>
+                <a:ea typeface="Verdana" panose="020B0604030504040204" pitchFamily="34" charset="0"/>
+                <a:cs typeface="Verdana" panose="020B0604030504040204" pitchFamily="34" charset="0"/>
+              </a:rPr>
+              <a:t>Name Candidate</a:t>
+            </a:r>
+          </a:p>
+        </p:txBody>
+      </p:sp>
+      <p:sp>
+        <p:nvSpPr>
+          <p:cNvPr id="35" name="TextBox 1">
+            <a:extLst>
+              <a:ext uri="{FF2B5EF4-FFF2-40B4-BE49-F238E27FC236}">
+                <a16:creationId xmlns:a16="http://schemas.microsoft.com/office/drawing/2014/main" id="{802B4A20-0371-040F-48AE-32D0BAA9A253}"/>
+              </a:ext>
+            </a:extLst>
+          </p:cNvPr>
+          <p:cNvSpPr txBox="1">
+            <a:spLocks noChangeArrowheads="1"/>
+          </p:cNvSpPr>
+          <p:nvPr/>
+        </p:nvSpPr>
+        <p:spPr bwMode="auto">
+          <a:xfrm>
+            <a:off x="3724324" y="3612029"/>
+            <a:ext cx="1400961" cy="307777"/>
+          </a:xfrm>
+          <a:prstGeom prst="rect">
+            <a:avLst/>
+          </a:prstGeom>
+          <a:noFill/>
+          <a:ln>
+            <a:noFill/>
+          </a:ln>
+          <a:extLst>
+            <a:ext uri="{909E8E84-426E-40DD-AFC4-6F175D3DCCD1}">
+              <a14:hiddenFill xmlns:a14="http://schemas.microsoft.com/office/drawing/2010/main">
+                <a:solidFill>
+                  <a:srgbClr val="FFFFFF"/>
+                </a:solidFill>
+              </a14:hiddenFill>
+            </a:ext>
+            <a:ext uri="{91240B29-F687-4F45-9708-019B960494DF}">
+              <a14:hiddenLine xmlns:a14="http://schemas.microsoft.com/office/drawing/2010/main" w="9525">
+                <a:solidFill>
+                  <a:srgbClr val="000000"/>
+                </a:solidFill>
+                <a:miter lim="800000"/>
+                <a:headEnd/>
+                <a:tailEnd/>
+              </a14:hiddenLine>
+            </a:ext>
+          </a:extLst>
+        </p:spPr>
+        <p:txBody>
+          <a:bodyPr wrap="none">
+            <a:spAutoFit/>
+          </a:bodyPr>
+          <a:lstStyle>
+            <a:lvl1pPr algn="just">
+              <a:buClr>
+                <a:srgbClr val="1E3D7D"/>
+              </a:buClr>
+              <a:buFont typeface="Wingdings" panose="05000000000000000000" pitchFamily="2" charset="2"/>
+              <a:buChar char="§"/>
+              <a:defRPr>
+                <a:solidFill>
+                  <a:schemeClr val="tx1"/>
+                </a:solidFill>
+                <a:latin typeface="Calibri" panose="020F0502020204030204" pitchFamily="34" charset="0"/>
+              </a:defRPr>
+            </a:lvl1pPr>
+            <a:lvl2pPr marL="742950" indent="-285750" algn="just">
+              <a:buClr>
+                <a:srgbClr val="1E3D7D"/>
+              </a:buClr>
+              <a:buFont typeface="Courier New" panose="02070309020205020404" pitchFamily="49" charset="0"/>
+              <a:buChar char="o"/>
+              <a:defRPr>
+                <a:solidFill>
+                  <a:schemeClr val="tx1"/>
+                </a:solidFill>
+                <a:latin typeface="Calibri" panose="020F0502020204030204" pitchFamily="34" charset="0"/>
+              </a:defRPr>
+            </a:lvl2pPr>
+            <a:lvl3pPr marL="1143000" indent="-228600" algn="just">
+              <a:buClr>
+                <a:srgbClr val="1E3D7D"/>
+              </a:buClr>
+              <a:buFont typeface="Arial" panose="020B0604020202020204" pitchFamily="34" charset="0"/>
+              <a:buChar char="•"/>
+              <a:defRPr>
+                <a:solidFill>
+                  <a:schemeClr val="tx1"/>
+                </a:solidFill>
+                <a:latin typeface="Calibri" panose="020F0502020204030204" pitchFamily="34" charset="0"/>
+              </a:defRPr>
+            </a:lvl3pPr>
+            <a:lvl4pPr marL="1600200" indent="-228600" algn="just">
+              <a:buClr>
+                <a:srgbClr val="1E3D7D"/>
+              </a:buClr>
+              <a:buFont typeface="Arial" panose="020B0604020202020204" pitchFamily="34" charset="0"/>
+              <a:buChar char="•"/>
+              <a:defRPr>
+                <a:solidFill>
+                  <a:schemeClr val="tx1"/>
+                </a:solidFill>
+                <a:latin typeface="Calibri" panose="020F0502020204030204" pitchFamily="34" charset="0"/>
+              </a:defRPr>
+            </a:lvl4pPr>
+            <a:lvl5pPr marL="2057400" indent="-228600" algn="just">
+              <a:buClr>
+                <a:srgbClr val="1E3D7D"/>
+              </a:buClr>
+              <a:buFont typeface="Arial" panose="020B0604020202020204" pitchFamily="34" charset="0"/>
+              <a:buChar char="•"/>
+              <a:defRPr>
+                <a:solidFill>
+                  <a:schemeClr val="tx1"/>
+                </a:solidFill>
+                <a:latin typeface="Calibri" panose="020F0502020204030204" pitchFamily="34" charset="0"/>
+              </a:defRPr>
+            </a:lvl5pPr>
+            <a:lvl6pPr marL="2514600" indent="-228600" algn="just" eaLnBrk="0" fontAlgn="base" hangingPunct="0">
+              <a:spcBef>
+                <a:spcPct val="0"/>
+              </a:spcBef>
+              <a:spcAft>
+                <a:spcPct val="0"/>
+              </a:spcAft>
+              <a:buClr>
+                <a:srgbClr val="1E3D7D"/>
+              </a:buClr>
+              <a:buFont typeface="Arial" panose="020B0604020202020204" pitchFamily="34" charset="0"/>
+              <a:buChar char="•"/>
+              <a:defRPr>
+                <a:solidFill>
+                  <a:schemeClr val="tx1"/>
+                </a:solidFill>
+                <a:latin typeface="Calibri" panose="020F0502020204030204" pitchFamily="34" charset="0"/>
+              </a:defRPr>
+            </a:lvl6pPr>
+            <a:lvl7pPr marL="2971800" indent="-228600" algn="just" eaLnBrk="0" fontAlgn="base" hangingPunct="0">
+              <a:spcBef>
+                <a:spcPct val="0"/>
+              </a:spcBef>
+              <a:spcAft>
+                <a:spcPct val="0"/>
+              </a:spcAft>
+              <a:buClr>
+                <a:srgbClr val="1E3D7D"/>
+              </a:buClr>
+              <a:buFont typeface="Arial" panose="020B0604020202020204" pitchFamily="34" charset="0"/>
+              <a:buChar char="•"/>
+              <a:defRPr>
+                <a:solidFill>
+                  <a:schemeClr val="tx1"/>
+                </a:solidFill>
+                <a:latin typeface="Calibri" panose="020F0502020204030204" pitchFamily="34" charset="0"/>
+              </a:defRPr>
+            </a:lvl7pPr>
+            <a:lvl8pPr marL="3429000" indent="-228600" algn="just" eaLnBrk="0" fontAlgn="base" hangingPunct="0">
+              <a:spcBef>
+                <a:spcPct val="0"/>
+              </a:spcBef>
+              <a:spcAft>
+                <a:spcPct val="0"/>
+              </a:spcAft>
+              <a:buClr>
+                <a:srgbClr val="1E3D7D"/>
+              </a:buClr>
+              <a:buFont typeface="Arial" panose="020B0604020202020204" pitchFamily="34" charset="0"/>
+              <a:buChar char="•"/>
+              <a:defRPr>
+                <a:solidFill>
+                  <a:schemeClr val="tx1"/>
+                </a:solidFill>
+                <a:latin typeface="Calibri" panose="020F0502020204030204" pitchFamily="34" charset="0"/>
+              </a:defRPr>
+            </a:lvl8pPr>
+            <a:lvl9pPr marL="3886200" indent="-228600" algn="just" eaLnBrk="0" fontAlgn="base" hangingPunct="0">
+              <a:spcBef>
+                <a:spcPct val="0"/>
+              </a:spcBef>
+              <a:spcAft>
+                <a:spcPct val="0"/>
+              </a:spcAft>
+              <a:buClr>
+                <a:srgbClr val="1E3D7D"/>
+              </a:buClr>
+              <a:buFont typeface="Arial" panose="020B0604020202020204" pitchFamily="34" charset="0"/>
+              <a:buChar char="•"/>
+              <a:defRPr>
+                <a:solidFill>
+                  <a:schemeClr val="tx1"/>
+                </a:solidFill>
+                <a:latin typeface="Calibri" panose="020F0502020204030204" pitchFamily="34" charset="0"/>
+              </a:defRPr>
+            </a:lvl9pPr>
+          </a:lstStyle>
+          <a:p>
+            <a:pPr algn="ctr" eaLnBrk="1" hangingPunct="1">
+              <a:buClrTx/>
+              <a:buFontTx/>
+              <a:buNone/>
+            </a:pPr>
+            <a:r>
+              <a:rPr lang="en-US" altLang="en-US" sz="1400" dirty="0">
+                <a:latin typeface="+mn-lt"/>
+                <a:ea typeface="Verdana" panose="020B0604030504040204" pitchFamily="34" charset="0"/>
+                <a:cs typeface="Verdana" panose="020B0604030504040204" pitchFamily="34" charset="0"/>
+              </a:rPr>
+              <a:t>Name Candidate</a:t>
+            </a:r>
+          </a:p>
+        </p:txBody>
+      </p:sp>
+      <p:sp>
+        <p:nvSpPr>
+          <p:cNvPr id="36" name="TextBox 1">
+            <a:extLst>
+              <a:ext uri="{FF2B5EF4-FFF2-40B4-BE49-F238E27FC236}">
+                <a16:creationId xmlns:a16="http://schemas.microsoft.com/office/drawing/2014/main" id="{989EE3CF-51CB-DF71-4664-D75998760A14}"/>
+              </a:ext>
+            </a:extLst>
+          </p:cNvPr>
+          <p:cNvSpPr txBox="1">
+            <a:spLocks noChangeArrowheads="1"/>
+          </p:cNvSpPr>
+          <p:nvPr/>
+        </p:nvSpPr>
+        <p:spPr bwMode="auto">
+          <a:xfrm>
+            <a:off x="3724324" y="4425228"/>
+            <a:ext cx="1400961" cy="307777"/>
+          </a:xfrm>
+          <a:prstGeom prst="rect">
+            <a:avLst/>
+          </a:prstGeom>
+          <a:noFill/>
+          <a:ln>
+            <a:noFill/>
+          </a:ln>
+          <a:extLst>
+            <a:ext uri="{909E8E84-426E-40DD-AFC4-6F175D3DCCD1}">
+              <a14:hiddenFill xmlns:a14="http://schemas.microsoft.com/office/drawing/2010/main">
+                <a:solidFill>
+                  <a:srgbClr val="FFFFFF"/>
+                </a:solidFill>
+              </a14:hiddenFill>
+            </a:ext>
+            <a:ext uri="{91240B29-F687-4F45-9708-019B960494DF}">
+              <a14:hiddenLine xmlns:a14="http://schemas.microsoft.com/office/drawing/2010/main" w="9525">
+                <a:solidFill>
+                  <a:srgbClr val="000000"/>
+                </a:solidFill>
+                <a:miter lim="800000"/>
+                <a:headEnd/>
+                <a:tailEnd/>
+              </a14:hiddenLine>
+            </a:ext>
+          </a:extLst>
+        </p:spPr>
+        <p:txBody>
+          <a:bodyPr wrap="none">
+            <a:spAutoFit/>
+          </a:bodyPr>
+          <a:lstStyle>
+            <a:lvl1pPr algn="just">
+              <a:buClr>
+                <a:srgbClr val="1E3D7D"/>
+              </a:buClr>
+              <a:buFont typeface="Wingdings" panose="05000000000000000000" pitchFamily="2" charset="2"/>
+              <a:buChar char="§"/>
+              <a:defRPr>
+                <a:solidFill>
+                  <a:schemeClr val="tx1"/>
+                </a:solidFill>
+                <a:latin typeface="Calibri" panose="020F0502020204030204" pitchFamily="34" charset="0"/>
+              </a:defRPr>
+            </a:lvl1pPr>
+            <a:lvl2pPr marL="742950" indent="-285750" algn="just">
+              <a:buClr>
+                <a:srgbClr val="1E3D7D"/>
+              </a:buClr>
+              <a:buFont typeface="Courier New" panose="02070309020205020404" pitchFamily="49" charset="0"/>
+              <a:buChar char="o"/>
+              <a:defRPr>
+                <a:solidFill>
+                  <a:schemeClr val="tx1"/>
+                </a:solidFill>
+                <a:latin typeface="Calibri" panose="020F0502020204030204" pitchFamily="34" charset="0"/>
+              </a:defRPr>
+            </a:lvl2pPr>
+            <a:lvl3pPr marL="1143000" indent="-228600" algn="just">
+              <a:buClr>
+                <a:srgbClr val="1E3D7D"/>
+              </a:buClr>
+              <a:buFont typeface="Arial" panose="020B0604020202020204" pitchFamily="34" charset="0"/>
+              <a:buChar char="•"/>
+              <a:defRPr>
+                <a:solidFill>
+                  <a:schemeClr val="tx1"/>
+                </a:solidFill>
+                <a:latin typeface="Calibri" panose="020F0502020204030204" pitchFamily="34" charset="0"/>
+              </a:defRPr>
+            </a:lvl3pPr>
+            <a:lvl4pPr marL="1600200" indent="-228600" algn="just">
+              <a:buClr>
+                <a:srgbClr val="1E3D7D"/>
+              </a:buClr>
+              <a:buFont typeface="Arial" panose="020B0604020202020204" pitchFamily="34" charset="0"/>
+              <a:buChar char="•"/>
+              <a:defRPr>
+                <a:solidFill>
+                  <a:schemeClr val="tx1"/>
+                </a:solidFill>
+                <a:latin typeface="Calibri" panose="020F0502020204030204" pitchFamily="34" charset="0"/>
+              </a:defRPr>
+            </a:lvl4pPr>
+            <a:lvl5pPr marL="2057400" indent="-228600" algn="just">
+              <a:buClr>
+                <a:srgbClr val="1E3D7D"/>
+              </a:buClr>
+              <a:buFont typeface="Arial" panose="020B0604020202020204" pitchFamily="34" charset="0"/>
+              <a:buChar char="•"/>
+              <a:defRPr>
+                <a:solidFill>
+                  <a:schemeClr val="tx1"/>
+                </a:solidFill>
+                <a:latin typeface="Calibri" panose="020F0502020204030204" pitchFamily="34" charset="0"/>
+              </a:defRPr>
+            </a:lvl5pPr>
+            <a:lvl6pPr marL="2514600" indent="-228600" algn="just" eaLnBrk="0" fontAlgn="base" hangingPunct="0">
+              <a:spcBef>
+                <a:spcPct val="0"/>
+              </a:spcBef>
+              <a:spcAft>
+                <a:spcPct val="0"/>
+              </a:spcAft>
+              <a:buClr>
+                <a:srgbClr val="1E3D7D"/>
+              </a:buClr>
+              <a:buFont typeface="Arial" panose="020B0604020202020204" pitchFamily="34" charset="0"/>
+              <a:buChar char="•"/>
+              <a:defRPr>
+                <a:solidFill>
+                  <a:schemeClr val="tx1"/>
+                </a:solidFill>
+                <a:latin typeface="Calibri" panose="020F0502020204030204" pitchFamily="34" charset="0"/>
+              </a:defRPr>
+            </a:lvl6pPr>
+            <a:lvl7pPr marL="2971800" indent="-228600" algn="just" eaLnBrk="0" fontAlgn="base" hangingPunct="0">
+              <a:spcBef>
+                <a:spcPct val="0"/>
+              </a:spcBef>
+              <a:spcAft>
+                <a:spcPct val="0"/>
+              </a:spcAft>
+              <a:buClr>
+                <a:srgbClr val="1E3D7D"/>
+              </a:buClr>
+              <a:buFont typeface="Arial" panose="020B0604020202020204" pitchFamily="34" charset="0"/>
+              <a:buChar char="•"/>
+              <a:defRPr>
+                <a:solidFill>
+                  <a:schemeClr val="tx1"/>
+                </a:solidFill>
+                <a:latin typeface="Calibri" panose="020F0502020204030204" pitchFamily="34" charset="0"/>
+              </a:defRPr>
+            </a:lvl7pPr>
+            <a:lvl8pPr marL="3429000" indent="-228600" algn="just" eaLnBrk="0" fontAlgn="base" hangingPunct="0">
+              <a:spcBef>
+                <a:spcPct val="0"/>
+              </a:spcBef>
+              <a:spcAft>
+                <a:spcPct val="0"/>
+              </a:spcAft>
+              <a:buClr>
+                <a:srgbClr val="1E3D7D"/>
+              </a:buClr>
+              <a:buFont typeface="Arial" panose="020B0604020202020204" pitchFamily="34" charset="0"/>
+              <a:buChar char="•"/>
+              <a:defRPr>
+                <a:solidFill>
+                  <a:schemeClr val="tx1"/>
+                </a:solidFill>
+                <a:latin typeface="Calibri" panose="020F0502020204030204" pitchFamily="34" charset="0"/>
+              </a:defRPr>
+            </a:lvl8pPr>
+            <a:lvl9pPr marL="3886200" indent="-228600" algn="just" eaLnBrk="0" fontAlgn="base" hangingPunct="0">
+              <a:spcBef>
+                <a:spcPct val="0"/>
+              </a:spcBef>
+              <a:spcAft>
+                <a:spcPct val="0"/>
+              </a:spcAft>
+              <a:buClr>
+                <a:srgbClr val="1E3D7D"/>
+              </a:buClr>
+              <a:buFont typeface="Arial" panose="020B0604020202020204" pitchFamily="34" charset="0"/>
+              <a:buChar char="•"/>
+              <a:defRPr>
+                <a:solidFill>
+                  <a:schemeClr val="tx1"/>
+                </a:solidFill>
+                <a:latin typeface="Calibri" panose="020F0502020204030204" pitchFamily="34" charset="0"/>
+              </a:defRPr>
+            </a:lvl9pPr>
+          </a:lstStyle>
+          <a:p>
+            <a:pPr algn="ctr" eaLnBrk="1" hangingPunct="1">
+              <a:buClrTx/>
+              <a:buFontTx/>
+              <a:buNone/>
+            </a:pPr>
+            <a:r>
+              <a:rPr lang="en-US" altLang="en-US" sz="1400" dirty="0">
+                <a:latin typeface="+mn-lt"/>
+                <a:ea typeface="Verdana" panose="020B0604030504040204" pitchFamily="34" charset="0"/>
+                <a:cs typeface="Verdana" panose="020B0604030504040204" pitchFamily="34" charset="0"/>
+              </a:rPr>
+              <a:t>Name Candidate</a:t>
+            </a:r>
+          </a:p>
+        </p:txBody>
+      </p:sp>
+      <p:sp>
+        <p:nvSpPr>
+          <p:cNvPr id="37" name="Rectangle 36">
+            <a:extLst>
+              <a:ext uri="{FF2B5EF4-FFF2-40B4-BE49-F238E27FC236}">
+                <a16:creationId xmlns:a16="http://schemas.microsoft.com/office/drawing/2014/main" id="{88A8CF7E-AE12-A47D-525A-0D3A9AB54758}"/>
+              </a:ext>
+            </a:extLst>
+          </p:cNvPr>
+          <p:cNvSpPr/>
+          <p:nvPr/>
+        </p:nvSpPr>
+        <p:spPr>
+          <a:xfrm>
+            <a:off x="3484250" y="1157221"/>
+            <a:ext cx="137160" cy="137160"/>
+          </a:xfrm>
+          <a:prstGeom prst="rect">
+            <a:avLst/>
+          </a:prstGeom>
+          <a:noFill/>
+          <a:ln>
+            <a:solidFill>
+              <a:schemeClr val="tx1"/>
+            </a:solidFill>
+          </a:ln>
+          <a:effectLst>
+            <a:outerShdw blurRad="44450" dist="27940" dir="5400000" algn="ctr">
+              <a:srgbClr val="000000">
+                <a:alpha val="32000"/>
+              </a:srgbClr>
+            </a:outerShdw>
+          </a:effectLst>
+          <a:scene3d>
+            <a:camera prst="orthographicFront">
+              <a:rot lat="0" lon="0" rev="0"/>
+            </a:camera>
+            <a:lightRig rig="balanced" dir="t">
+              <a:rot lat="0" lon="0" rev="8700000"/>
+            </a:lightRig>
+          </a:scene3d>
+          <a:sp3d>
+            <a:bevelT w="190500" h="38100"/>
+          </a:sp3d>
+        </p:spPr>
+        <p:style>
+          <a:lnRef idx="2">
+            <a:schemeClr val="accent1">
+              <a:shade val="15000"/>
+            </a:schemeClr>
+          </a:lnRef>
+          <a:fillRef idx="1">
+            <a:schemeClr val="accent1"/>
+          </a:fillRef>
+          <a:effectRef idx="0">
+            <a:schemeClr val="accent1"/>
+          </a:effectRef>
+          <a:fontRef idx="minor">
+            <a:schemeClr val="lt1"/>
+          </a:fontRef>
+        </p:style>
+        <p:txBody>
+          <a:bodyPr rtlCol="0" anchor="ctr"/>
+          <a:lstStyle/>
+          <a:p>
+            <a:pPr algn="ctr"/>
+            <a:endParaRPr lang="en-US" sz="1400"/>
+          </a:p>
+        </p:txBody>
+      </p:sp>
+      <p:sp>
+        <p:nvSpPr>
+          <p:cNvPr id="38" name="Rectangle 37">
+            <a:extLst>
+              <a:ext uri="{FF2B5EF4-FFF2-40B4-BE49-F238E27FC236}">
+                <a16:creationId xmlns:a16="http://schemas.microsoft.com/office/drawing/2014/main" id="{B818B686-C526-D4D4-FF04-ED073AADE8E0}"/>
+              </a:ext>
+            </a:extLst>
+          </p:cNvPr>
+          <p:cNvSpPr/>
+          <p:nvPr/>
+        </p:nvSpPr>
+        <p:spPr>
+          <a:xfrm>
+            <a:off x="3484250" y="1992415"/>
+            <a:ext cx="137160" cy="137160"/>
+          </a:xfrm>
+          <a:prstGeom prst="rect">
+            <a:avLst/>
+          </a:prstGeom>
+          <a:noFill/>
+          <a:ln>
+            <a:solidFill>
+              <a:schemeClr val="tx1"/>
+            </a:solidFill>
+          </a:ln>
+          <a:effectLst>
+            <a:outerShdw blurRad="44450" dist="27940" dir="5400000" algn="ctr">
+              <a:srgbClr val="000000">
+                <a:alpha val="32000"/>
+              </a:srgbClr>
+            </a:outerShdw>
+          </a:effectLst>
+          <a:scene3d>
+            <a:camera prst="orthographicFront">
+              <a:rot lat="0" lon="0" rev="0"/>
+            </a:camera>
+            <a:lightRig rig="balanced" dir="t">
+              <a:rot lat="0" lon="0" rev="8700000"/>
+            </a:lightRig>
+          </a:scene3d>
+          <a:sp3d>
+            <a:bevelT w="190500" h="38100"/>
+          </a:sp3d>
+        </p:spPr>
+        <p:style>
+          <a:lnRef idx="2">
+            <a:schemeClr val="accent1">
+              <a:shade val="15000"/>
+            </a:schemeClr>
+          </a:lnRef>
+          <a:fillRef idx="1">
+            <a:schemeClr val="accent1"/>
+          </a:fillRef>
+          <a:effectRef idx="0">
+            <a:schemeClr val="accent1"/>
+          </a:effectRef>
+          <a:fontRef idx="minor">
+            <a:schemeClr val="lt1"/>
+          </a:fontRef>
+        </p:style>
+        <p:txBody>
+          <a:bodyPr rtlCol="0" anchor="ctr"/>
+          <a:lstStyle/>
+          <a:p>
+            <a:pPr algn="ctr"/>
+            <a:endParaRPr lang="en-US" sz="1400"/>
+          </a:p>
+        </p:txBody>
+      </p:sp>
+      <p:sp>
+        <p:nvSpPr>
+          <p:cNvPr id="39" name="Rectangle 38">
+            <a:extLst>
+              <a:ext uri="{FF2B5EF4-FFF2-40B4-BE49-F238E27FC236}">
+                <a16:creationId xmlns:a16="http://schemas.microsoft.com/office/drawing/2014/main" id="{DA823EC7-CC4A-531F-CCA8-459AA55E5DB3}"/>
+              </a:ext>
+            </a:extLst>
+          </p:cNvPr>
+          <p:cNvSpPr/>
+          <p:nvPr/>
+        </p:nvSpPr>
+        <p:spPr>
+          <a:xfrm>
+            <a:off x="3489437" y="2808469"/>
+            <a:ext cx="137160" cy="137160"/>
+          </a:xfrm>
+          <a:prstGeom prst="rect">
+            <a:avLst/>
+          </a:prstGeom>
+          <a:noFill/>
+          <a:ln>
+            <a:solidFill>
+              <a:schemeClr val="tx1"/>
+            </a:solidFill>
+          </a:ln>
+          <a:effectLst>
+            <a:outerShdw blurRad="44450" dist="27940" dir="5400000" algn="ctr">
+              <a:srgbClr val="000000">
+                <a:alpha val="32000"/>
+              </a:srgbClr>
+            </a:outerShdw>
+          </a:effectLst>
+          <a:scene3d>
+            <a:camera prst="orthographicFront">
+              <a:rot lat="0" lon="0" rev="0"/>
+            </a:camera>
+            <a:lightRig rig="balanced" dir="t">
+              <a:rot lat="0" lon="0" rev="8700000"/>
+            </a:lightRig>
+          </a:scene3d>
+          <a:sp3d>
+            <a:bevelT w="190500" h="38100"/>
+          </a:sp3d>
+        </p:spPr>
+        <p:style>
+          <a:lnRef idx="2">
+            <a:schemeClr val="accent1">
+              <a:shade val="15000"/>
+            </a:schemeClr>
+          </a:lnRef>
+          <a:fillRef idx="1">
+            <a:schemeClr val="accent1"/>
+          </a:fillRef>
+          <a:effectRef idx="0">
+            <a:schemeClr val="accent1"/>
+          </a:effectRef>
+          <a:fontRef idx="minor">
+            <a:schemeClr val="lt1"/>
+          </a:fontRef>
+        </p:style>
+        <p:txBody>
+          <a:bodyPr rtlCol="0" anchor="ctr"/>
+          <a:lstStyle/>
+          <a:p>
+            <a:pPr algn="ctr"/>
+            <a:endParaRPr lang="en-US" sz="1400"/>
+          </a:p>
+        </p:txBody>
+      </p:sp>
+      <p:sp>
+        <p:nvSpPr>
+          <p:cNvPr id="40" name="Rectangle 39">
+            <a:extLst>
+              <a:ext uri="{FF2B5EF4-FFF2-40B4-BE49-F238E27FC236}">
+                <a16:creationId xmlns:a16="http://schemas.microsoft.com/office/drawing/2014/main" id="{642878E2-926B-F821-B960-FAABC21FC94E}"/>
+              </a:ext>
+            </a:extLst>
+          </p:cNvPr>
+          <p:cNvSpPr/>
+          <p:nvPr/>
+        </p:nvSpPr>
+        <p:spPr>
+          <a:xfrm>
+            <a:off x="3492924" y="3660068"/>
+            <a:ext cx="137160" cy="137160"/>
+          </a:xfrm>
+          <a:prstGeom prst="rect">
+            <a:avLst/>
+          </a:prstGeom>
+          <a:noFill/>
+          <a:ln>
+            <a:solidFill>
+              <a:schemeClr val="tx1"/>
+            </a:solidFill>
+          </a:ln>
+          <a:effectLst>
+            <a:outerShdw blurRad="44450" dist="27940" dir="5400000" algn="ctr">
+              <a:srgbClr val="000000">
+                <a:alpha val="32000"/>
+              </a:srgbClr>
+            </a:outerShdw>
+          </a:effectLst>
+          <a:scene3d>
+            <a:camera prst="orthographicFront">
+              <a:rot lat="0" lon="0" rev="0"/>
+            </a:camera>
+            <a:lightRig rig="balanced" dir="t">
+              <a:rot lat="0" lon="0" rev="8700000"/>
+            </a:lightRig>
+          </a:scene3d>
+          <a:sp3d>
+            <a:bevelT w="190500" h="38100"/>
+          </a:sp3d>
+        </p:spPr>
+        <p:style>
+          <a:lnRef idx="2">
+            <a:schemeClr val="accent1">
+              <a:shade val="15000"/>
+            </a:schemeClr>
+          </a:lnRef>
+          <a:fillRef idx="1">
+            <a:schemeClr val="accent1"/>
+          </a:fillRef>
+          <a:effectRef idx="0">
+            <a:schemeClr val="accent1"/>
+          </a:effectRef>
+          <a:fontRef idx="minor">
+            <a:schemeClr val="lt1"/>
+          </a:fontRef>
+        </p:style>
+        <p:txBody>
+          <a:bodyPr rtlCol="0" anchor="ctr"/>
+          <a:lstStyle/>
+          <a:p>
+            <a:pPr algn="ctr"/>
+            <a:endParaRPr lang="en-US" sz="1400"/>
+          </a:p>
+        </p:txBody>
+      </p:sp>
+      <p:sp>
+        <p:nvSpPr>
+          <p:cNvPr id="41" name="Rectangle 40">
+            <a:extLst>
+              <a:ext uri="{FF2B5EF4-FFF2-40B4-BE49-F238E27FC236}">
+                <a16:creationId xmlns:a16="http://schemas.microsoft.com/office/drawing/2014/main" id="{159E788A-8BF2-9A95-0491-07DD8EC7114D}"/>
+              </a:ext>
+            </a:extLst>
+          </p:cNvPr>
+          <p:cNvSpPr/>
+          <p:nvPr/>
+        </p:nvSpPr>
+        <p:spPr>
+          <a:xfrm>
+            <a:off x="3492924" y="4495148"/>
+            <a:ext cx="137160" cy="137160"/>
+          </a:xfrm>
+          <a:prstGeom prst="rect">
+            <a:avLst/>
+          </a:prstGeom>
+          <a:noFill/>
+          <a:ln>
+            <a:solidFill>
+              <a:schemeClr val="tx1"/>
+            </a:solidFill>
+          </a:ln>
+          <a:effectLst>
+            <a:outerShdw blurRad="44450" dist="27940" dir="5400000" algn="ctr">
+              <a:srgbClr val="000000">
+                <a:alpha val="32000"/>
+              </a:srgbClr>
+            </a:outerShdw>
+          </a:effectLst>
+          <a:scene3d>
+            <a:camera prst="orthographicFront">
+              <a:rot lat="0" lon="0" rev="0"/>
+            </a:camera>
+            <a:lightRig rig="balanced" dir="t">
+              <a:rot lat="0" lon="0" rev="8700000"/>
+            </a:lightRig>
+          </a:scene3d>
+          <a:sp3d>
+            <a:bevelT w="190500" h="38100"/>
+          </a:sp3d>
+        </p:spPr>
+        <p:style>
+          <a:lnRef idx="2">
+            <a:schemeClr val="accent1">
+              <a:shade val="15000"/>
+            </a:schemeClr>
+          </a:lnRef>
+          <a:fillRef idx="1">
+            <a:schemeClr val="accent1"/>
+          </a:fillRef>
+          <a:effectRef idx="0">
+            <a:schemeClr val="accent1"/>
+          </a:effectRef>
+          <a:fontRef idx="minor">
+            <a:schemeClr val="lt1"/>
+          </a:fontRef>
+        </p:style>
+        <p:txBody>
+          <a:bodyPr rtlCol="0" anchor="ctr"/>
+          <a:lstStyle/>
+          <a:p>
+            <a:pPr algn="ctr"/>
+            <a:endParaRPr lang="en-US" sz="1400"/>
+          </a:p>
+        </p:txBody>
+      </p:sp>
+      <p:sp>
+        <p:nvSpPr>
+          <p:cNvPr id="42" name="TextBox 1">
+            <a:extLst>
+              <a:ext uri="{FF2B5EF4-FFF2-40B4-BE49-F238E27FC236}">
+                <a16:creationId xmlns:a16="http://schemas.microsoft.com/office/drawing/2014/main" id="{7C9670DB-538D-2AD9-B4FA-EAD1B0979806}"/>
+              </a:ext>
+            </a:extLst>
+          </p:cNvPr>
+          <p:cNvSpPr txBox="1">
+            <a:spLocks noChangeArrowheads="1"/>
+          </p:cNvSpPr>
+          <p:nvPr/>
+        </p:nvSpPr>
+        <p:spPr bwMode="auto">
+          <a:xfrm>
+            <a:off x="3716627" y="1501543"/>
+            <a:ext cx="1400961" cy="307777"/>
+          </a:xfrm>
+          <a:prstGeom prst="rect">
+            <a:avLst/>
+          </a:prstGeom>
+          <a:noFill/>
+          <a:ln>
+            <a:noFill/>
+          </a:ln>
+          <a:extLst>
+            <a:ext uri="{909E8E84-426E-40DD-AFC4-6F175D3DCCD1}">
+              <a14:hiddenFill xmlns:a14="http://schemas.microsoft.com/office/drawing/2010/main">
+                <a:solidFill>
+                  <a:srgbClr val="FFFFFF"/>
+                </a:solidFill>
+              </a14:hiddenFill>
+            </a:ext>
+            <a:ext uri="{91240B29-F687-4F45-9708-019B960494DF}">
+              <a14:hiddenLine xmlns:a14="http://schemas.microsoft.com/office/drawing/2010/main" w="9525">
+                <a:solidFill>
+                  <a:srgbClr val="000000"/>
+                </a:solidFill>
+                <a:miter lim="800000"/>
+                <a:headEnd/>
+                <a:tailEnd/>
+              </a14:hiddenLine>
+            </a:ext>
+          </a:extLst>
+        </p:spPr>
+        <p:txBody>
+          <a:bodyPr wrap="none">
+            <a:spAutoFit/>
+          </a:bodyPr>
+          <a:lstStyle>
+            <a:lvl1pPr algn="just">
+              <a:buClr>
+                <a:srgbClr val="1E3D7D"/>
+              </a:buClr>
+              <a:buFont typeface="Wingdings" panose="05000000000000000000" pitchFamily="2" charset="2"/>
+              <a:buChar char="§"/>
+              <a:defRPr>
+                <a:solidFill>
+                  <a:schemeClr val="tx1"/>
+                </a:solidFill>
+                <a:latin typeface="Calibri" panose="020F0502020204030204" pitchFamily="34" charset="0"/>
+              </a:defRPr>
+            </a:lvl1pPr>
+            <a:lvl2pPr marL="742950" indent="-285750" algn="just">
+              <a:buClr>
+                <a:srgbClr val="1E3D7D"/>
+              </a:buClr>
+              <a:buFont typeface="Courier New" panose="02070309020205020404" pitchFamily="49" charset="0"/>
+              <a:buChar char="o"/>
+              <a:defRPr>
+                <a:solidFill>
+                  <a:schemeClr val="tx1"/>
+                </a:solidFill>
+                <a:latin typeface="Calibri" panose="020F0502020204030204" pitchFamily="34" charset="0"/>
+              </a:defRPr>
+            </a:lvl2pPr>
+            <a:lvl3pPr marL="1143000" indent="-228600" algn="just">
+              <a:buClr>
+                <a:srgbClr val="1E3D7D"/>
+              </a:buClr>
+              <a:buFont typeface="Arial" panose="020B0604020202020204" pitchFamily="34" charset="0"/>
+              <a:buChar char="•"/>
+              <a:defRPr>
+                <a:solidFill>
+                  <a:schemeClr val="tx1"/>
+                </a:solidFill>
+                <a:latin typeface="Calibri" panose="020F0502020204030204" pitchFamily="34" charset="0"/>
+              </a:defRPr>
+            </a:lvl3pPr>
+            <a:lvl4pPr marL="1600200" indent="-228600" algn="just">
+              <a:buClr>
+                <a:srgbClr val="1E3D7D"/>
+              </a:buClr>
+              <a:buFont typeface="Arial" panose="020B0604020202020204" pitchFamily="34" charset="0"/>
+              <a:buChar char="•"/>
+              <a:defRPr>
+                <a:solidFill>
+                  <a:schemeClr val="tx1"/>
+                </a:solidFill>
+                <a:latin typeface="Calibri" panose="020F0502020204030204" pitchFamily="34" charset="0"/>
+              </a:defRPr>
+            </a:lvl4pPr>
+            <a:lvl5pPr marL="2057400" indent="-228600" algn="just">
+              <a:buClr>
+                <a:srgbClr val="1E3D7D"/>
+              </a:buClr>
+              <a:buFont typeface="Arial" panose="020B0604020202020204" pitchFamily="34" charset="0"/>
+              <a:buChar char="•"/>
+              <a:defRPr>
+                <a:solidFill>
+                  <a:schemeClr val="tx1"/>
+                </a:solidFill>
+                <a:latin typeface="Calibri" panose="020F0502020204030204" pitchFamily="34" charset="0"/>
+              </a:defRPr>
+            </a:lvl5pPr>
+            <a:lvl6pPr marL="2514600" indent="-228600" algn="just" eaLnBrk="0" fontAlgn="base" hangingPunct="0">
+              <a:spcBef>
+                <a:spcPct val="0"/>
+              </a:spcBef>
+              <a:spcAft>
+                <a:spcPct val="0"/>
+              </a:spcAft>
+              <a:buClr>
+                <a:srgbClr val="1E3D7D"/>
+              </a:buClr>
+              <a:buFont typeface="Arial" panose="020B0604020202020204" pitchFamily="34" charset="0"/>
+              <a:buChar char="•"/>
+              <a:defRPr>
+                <a:solidFill>
+                  <a:schemeClr val="tx1"/>
+                </a:solidFill>
+                <a:latin typeface="Calibri" panose="020F0502020204030204" pitchFamily="34" charset="0"/>
+              </a:defRPr>
+            </a:lvl6pPr>
+            <a:lvl7pPr marL="2971800" indent="-228600" algn="just" eaLnBrk="0" fontAlgn="base" hangingPunct="0">
+              <a:spcBef>
+                <a:spcPct val="0"/>
+              </a:spcBef>
+              <a:spcAft>
+                <a:spcPct val="0"/>
+              </a:spcAft>
+              <a:buClr>
+                <a:srgbClr val="1E3D7D"/>
+              </a:buClr>
+              <a:buFont typeface="Arial" panose="020B0604020202020204" pitchFamily="34" charset="0"/>
+              <a:buChar char="•"/>
+              <a:defRPr>
+                <a:solidFill>
+                  <a:schemeClr val="tx1"/>
+                </a:solidFill>
+                <a:latin typeface="Calibri" panose="020F0502020204030204" pitchFamily="34" charset="0"/>
+              </a:defRPr>
+            </a:lvl7pPr>
+            <a:lvl8pPr marL="3429000" indent="-228600" algn="just" eaLnBrk="0" fontAlgn="base" hangingPunct="0">
+              <a:spcBef>
+                <a:spcPct val="0"/>
+              </a:spcBef>
+              <a:spcAft>
+                <a:spcPct val="0"/>
+              </a:spcAft>
+              <a:buClr>
+                <a:srgbClr val="1E3D7D"/>
+              </a:buClr>
+              <a:buFont typeface="Arial" panose="020B0604020202020204" pitchFamily="34" charset="0"/>
+              <a:buChar char="•"/>
+              <a:defRPr>
+                <a:solidFill>
+                  <a:schemeClr val="tx1"/>
+                </a:solidFill>
+                <a:latin typeface="Calibri" panose="020F0502020204030204" pitchFamily="34" charset="0"/>
+              </a:defRPr>
+            </a:lvl8pPr>
+            <a:lvl9pPr marL="3886200" indent="-228600" algn="just" eaLnBrk="0" fontAlgn="base" hangingPunct="0">
+              <a:spcBef>
+                <a:spcPct val="0"/>
+              </a:spcBef>
+              <a:spcAft>
+                <a:spcPct val="0"/>
+              </a:spcAft>
+              <a:buClr>
+                <a:srgbClr val="1E3D7D"/>
+              </a:buClr>
+              <a:buFont typeface="Arial" panose="020B0604020202020204" pitchFamily="34" charset="0"/>
+              <a:buChar char="•"/>
+              <a:defRPr>
+                <a:solidFill>
+                  <a:schemeClr val="tx1"/>
+                </a:solidFill>
+                <a:latin typeface="Calibri" panose="020F0502020204030204" pitchFamily="34" charset="0"/>
+              </a:defRPr>
+            </a:lvl9pPr>
+          </a:lstStyle>
+          <a:p>
+            <a:pPr algn="ctr" eaLnBrk="1" hangingPunct="1">
+              <a:buClrTx/>
+              <a:buFontTx/>
+              <a:buNone/>
+            </a:pPr>
+            <a:r>
+              <a:rPr lang="en-US" altLang="en-US" sz="1400" dirty="0">
+                <a:latin typeface="+mn-lt"/>
+                <a:ea typeface="Verdana" panose="020B0604030504040204" pitchFamily="34" charset="0"/>
+                <a:cs typeface="Verdana" panose="020B0604030504040204" pitchFamily="34" charset="0"/>
+              </a:rPr>
+              <a:t>Name Candidate</a:t>
+            </a:r>
+          </a:p>
+        </p:txBody>
+      </p:sp>
+      <p:sp>
+        <p:nvSpPr>
+          <p:cNvPr id="43" name="TextBox 1">
+            <a:extLst>
+              <a:ext uri="{FF2B5EF4-FFF2-40B4-BE49-F238E27FC236}">
+                <a16:creationId xmlns:a16="http://schemas.microsoft.com/office/drawing/2014/main" id="{CA392A98-0162-D015-A82C-583A4CA6326B}"/>
+              </a:ext>
+            </a:extLst>
+          </p:cNvPr>
+          <p:cNvSpPr txBox="1">
+            <a:spLocks noChangeArrowheads="1"/>
+          </p:cNvSpPr>
+          <p:nvPr/>
+        </p:nvSpPr>
+        <p:spPr bwMode="auto">
+          <a:xfrm>
+            <a:off x="3716627" y="2345003"/>
+            <a:ext cx="1400961" cy="307777"/>
+          </a:xfrm>
+          <a:prstGeom prst="rect">
+            <a:avLst/>
+          </a:prstGeom>
+          <a:noFill/>
+          <a:ln>
+            <a:noFill/>
+          </a:ln>
+          <a:extLst>
+            <a:ext uri="{909E8E84-426E-40DD-AFC4-6F175D3DCCD1}">
+              <a14:hiddenFill xmlns:a14="http://schemas.microsoft.com/office/drawing/2010/main">
+                <a:solidFill>
+                  <a:srgbClr val="FFFFFF"/>
+                </a:solidFill>
+              </a14:hiddenFill>
+            </a:ext>
+            <a:ext uri="{91240B29-F687-4F45-9708-019B960494DF}">
+              <a14:hiddenLine xmlns:a14="http://schemas.microsoft.com/office/drawing/2010/main" w="9525">
+                <a:solidFill>
+                  <a:srgbClr val="000000"/>
+                </a:solidFill>
+                <a:miter lim="800000"/>
+                <a:headEnd/>
+                <a:tailEnd/>
+              </a14:hiddenLine>
+            </a:ext>
+          </a:extLst>
+        </p:spPr>
+        <p:txBody>
+          <a:bodyPr wrap="none">
+            <a:spAutoFit/>
+          </a:bodyPr>
+          <a:lstStyle>
+            <a:lvl1pPr algn="just">
+              <a:buClr>
+                <a:srgbClr val="1E3D7D"/>
+              </a:buClr>
+              <a:buFont typeface="Wingdings" panose="05000000000000000000" pitchFamily="2" charset="2"/>
+              <a:buChar char="§"/>
+              <a:defRPr>
+                <a:solidFill>
+                  <a:schemeClr val="tx1"/>
+                </a:solidFill>
+                <a:latin typeface="Calibri" panose="020F0502020204030204" pitchFamily="34" charset="0"/>
+              </a:defRPr>
+            </a:lvl1pPr>
+            <a:lvl2pPr marL="742950" indent="-285750" algn="just">
+              <a:buClr>
+                <a:srgbClr val="1E3D7D"/>
+              </a:buClr>
+              <a:buFont typeface="Courier New" panose="02070309020205020404" pitchFamily="49" charset="0"/>
+              <a:buChar char="o"/>
+              <a:defRPr>
+                <a:solidFill>
+                  <a:schemeClr val="tx1"/>
+                </a:solidFill>
+                <a:latin typeface="Calibri" panose="020F0502020204030204" pitchFamily="34" charset="0"/>
+              </a:defRPr>
+            </a:lvl2pPr>
+            <a:lvl3pPr marL="1143000" indent="-228600" algn="just">
+              <a:buClr>
+                <a:srgbClr val="1E3D7D"/>
+              </a:buClr>
+              <a:buFont typeface="Arial" panose="020B0604020202020204" pitchFamily="34" charset="0"/>
+              <a:buChar char="•"/>
+              <a:defRPr>
+                <a:solidFill>
+                  <a:schemeClr val="tx1"/>
+                </a:solidFill>
+                <a:latin typeface="Calibri" panose="020F0502020204030204" pitchFamily="34" charset="0"/>
+              </a:defRPr>
+            </a:lvl3pPr>
+            <a:lvl4pPr marL="1600200" indent="-228600" algn="just">
+              <a:buClr>
+                <a:srgbClr val="1E3D7D"/>
+              </a:buClr>
+              <a:buFont typeface="Arial" panose="020B0604020202020204" pitchFamily="34" charset="0"/>
+              <a:buChar char="•"/>
+              <a:defRPr>
+                <a:solidFill>
+                  <a:schemeClr val="tx1"/>
+                </a:solidFill>
+                <a:latin typeface="Calibri" panose="020F0502020204030204" pitchFamily="34" charset="0"/>
+              </a:defRPr>
+            </a:lvl4pPr>
+            <a:lvl5pPr marL="2057400" indent="-228600" algn="just">
+              <a:buClr>
+                <a:srgbClr val="1E3D7D"/>
+              </a:buClr>
+              <a:buFont typeface="Arial" panose="020B0604020202020204" pitchFamily="34" charset="0"/>
+              <a:buChar char="•"/>
+              <a:defRPr>
+                <a:solidFill>
+                  <a:schemeClr val="tx1"/>
+                </a:solidFill>
+                <a:latin typeface="Calibri" panose="020F0502020204030204" pitchFamily="34" charset="0"/>
+              </a:defRPr>
+            </a:lvl5pPr>
+            <a:lvl6pPr marL="2514600" indent="-228600" algn="just" eaLnBrk="0" fontAlgn="base" hangingPunct="0">
+              <a:spcBef>
+                <a:spcPct val="0"/>
+              </a:spcBef>
+              <a:spcAft>
+                <a:spcPct val="0"/>
+              </a:spcAft>
+              <a:buClr>
+                <a:srgbClr val="1E3D7D"/>
+              </a:buClr>
+              <a:buFont typeface="Arial" panose="020B0604020202020204" pitchFamily="34" charset="0"/>
+              <a:buChar char="•"/>
+              <a:defRPr>
+                <a:solidFill>
+                  <a:schemeClr val="tx1"/>
+                </a:solidFill>
+                <a:latin typeface="Calibri" panose="020F0502020204030204" pitchFamily="34" charset="0"/>
+              </a:defRPr>
+            </a:lvl6pPr>
+            <a:lvl7pPr marL="2971800" indent="-228600" algn="just" eaLnBrk="0" fontAlgn="base" hangingPunct="0">
+              <a:spcBef>
+                <a:spcPct val="0"/>
+              </a:spcBef>
+              <a:spcAft>
+                <a:spcPct val="0"/>
+              </a:spcAft>
+              <a:buClr>
+                <a:srgbClr val="1E3D7D"/>
+              </a:buClr>
+              <a:buFont typeface="Arial" panose="020B0604020202020204" pitchFamily="34" charset="0"/>
+              <a:buChar char="•"/>
+              <a:defRPr>
+                <a:solidFill>
+                  <a:schemeClr val="tx1"/>
+                </a:solidFill>
+                <a:latin typeface="Calibri" panose="020F0502020204030204" pitchFamily="34" charset="0"/>
+              </a:defRPr>
+            </a:lvl7pPr>
+            <a:lvl8pPr marL="3429000" indent="-228600" algn="just" eaLnBrk="0" fontAlgn="base" hangingPunct="0">
+              <a:spcBef>
+                <a:spcPct val="0"/>
+              </a:spcBef>
+              <a:spcAft>
+                <a:spcPct val="0"/>
+              </a:spcAft>
+              <a:buClr>
+                <a:srgbClr val="1E3D7D"/>
+              </a:buClr>
+              <a:buFont typeface="Arial" panose="020B0604020202020204" pitchFamily="34" charset="0"/>
+              <a:buChar char="•"/>
+              <a:defRPr>
+                <a:solidFill>
+                  <a:schemeClr val="tx1"/>
+                </a:solidFill>
+                <a:latin typeface="Calibri" panose="020F0502020204030204" pitchFamily="34" charset="0"/>
+              </a:defRPr>
+            </a:lvl8pPr>
+            <a:lvl9pPr marL="3886200" indent="-228600" algn="just" eaLnBrk="0" fontAlgn="base" hangingPunct="0">
+              <a:spcBef>
+                <a:spcPct val="0"/>
+              </a:spcBef>
+              <a:spcAft>
+                <a:spcPct val="0"/>
+              </a:spcAft>
+              <a:buClr>
+                <a:srgbClr val="1E3D7D"/>
+              </a:buClr>
+              <a:buFont typeface="Arial" panose="020B0604020202020204" pitchFamily="34" charset="0"/>
+              <a:buChar char="•"/>
+              <a:defRPr>
+                <a:solidFill>
+                  <a:schemeClr val="tx1"/>
+                </a:solidFill>
+                <a:latin typeface="Calibri" panose="020F0502020204030204" pitchFamily="34" charset="0"/>
+              </a:defRPr>
+            </a:lvl9pPr>
+          </a:lstStyle>
+          <a:p>
+            <a:pPr algn="ctr" eaLnBrk="1" hangingPunct="1">
+              <a:buClrTx/>
+              <a:buFontTx/>
+              <a:buNone/>
+            </a:pPr>
+            <a:r>
+              <a:rPr lang="en-US" altLang="en-US" sz="1400" dirty="0">
+                <a:latin typeface="+mn-lt"/>
+                <a:ea typeface="Verdana" panose="020B0604030504040204" pitchFamily="34" charset="0"/>
+                <a:cs typeface="Verdana" panose="020B0604030504040204" pitchFamily="34" charset="0"/>
+              </a:rPr>
+              <a:t>Name Candidate</a:t>
+            </a:r>
+          </a:p>
+        </p:txBody>
+      </p:sp>
+      <p:sp>
+        <p:nvSpPr>
+          <p:cNvPr id="44" name="TextBox 1">
+            <a:extLst>
+              <a:ext uri="{FF2B5EF4-FFF2-40B4-BE49-F238E27FC236}">
+                <a16:creationId xmlns:a16="http://schemas.microsoft.com/office/drawing/2014/main" id="{13E7812A-5A0D-1125-BD02-DC576031B296}"/>
+              </a:ext>
+            </a:extLst>
+          </p:cNvPr>
+          <p:cNvSpPr txBox="1">
+            <a:spLocks noChangeArrowheads="1"/>
+          </p:cNvSpPr>
+          <p:nvPr/>
+        </p:nvSpPr>
+        <p:spPr bwMode="auto">
+          <a:xfrm>
+            <a:off x="3724324" y="3171469"/>
+            <a:ext cx="1400961" cy="307777"/>
+          </a:xfrm>
+          <a:prstGeom prst="rect">
+            <a:avLst/>
+          </a:prstGeom>
+          <a:noFill/>
+          <a:ln>
+            <a:noFill/>
+          </a:ln>
+          <a:extLst>
+            <a:ext uri="{909E8E84-426E-40DD-AFC4-6F175D3DCCD1}">
+              <a14:hiddenFill xmlns:a14="http://schemas.microsoft.com/office/drawing/2010/main">
+                <a:solidFill>
+                  <a:srgbClr val="FFFFFF"/>
+                </a:solidFill>
+              </a14:hiddenFill>
+            </a:ext>
+            <a:ext uri="{91240B29-F687-4F45-9708-019B960494DF}">
+              <a14:hiddenLine xmlns:a14="http://schemas.microsoft.com/office/drawing/2010/main" w="9525">
+                <a:solidFill>
+                  <a:srgbClr val="000000"/>
+                </a:solidFill>
+                <a:miter lim="800000"/>
+                <a:headEnd/>
+                <a:tailEnd/>
+              </a14:hiddenLine>
+            </a:ext>
+          </a:extLst>
+        </p:spPr>
+        <p:txBody>
+          <a:bodyPr wrap="none">
+            <a:spAutoFit/>
+          </a:bodyPr>
+          <a:lstStyle>
+            <a:lvl1pPr algn="just">
+              <a:buClr>
+                <a:srgbClr val="1E3D7D"/>
+              </a:buClr>
+              <a:buFont typeface="Wingdings" panose="05000000000000000000" pitchFamily="2" charset="2"/>
+              <a:buChar char="§"/>
+              <a:defRPr>
+                <a:solidFill>
+                  <a:schemeClr val="tx1"/>
+                </a:solidFill>
+                <a:latin typeface="Calibri" panose="020F0502020204030204" pitchFamily="34" charset="0"/>
+              </a:defRPr>
+            </a:lvl1pPr>
+            <a:lvl2pPr marL="742950" indent="-285750" algn="just">
+              <a:buClr>
+                <a:srgbClr val="1E3D7D"/>
+              </a:buClr>
+              <a:buFont typeface="Courier New" panose="02070309020205020404" pitchFamily="49" charset="0"/>
+              <a:buChar char="o"/>
+              <a:defRPr>
+                <a:solidFill>
+                  <a:schemeClr val="tx1"/>
+                </a:solidFill>
+                <a:latin typeface="Calibri" panose="020F0502020204030204" pitchFamily="34" charset="0"/>
+              </a:defRPr>
+            </a:lvl2pPr>
+            <a:lvl3pPr marL="1143000" indent="-228600" algn="just">
+              <a:buClr>
+                <a:srgbClr val="1E3D7D"/>
+              </a:buClr>
+              <a:buFont typeface="Arial" panose="020B0604020202020204" pitchFamily="34" charset="0"/>
+              <a:buChar char="•"/>
+              <a:defRPr>
+                <a:solidFill>
+                  <a:schemeClr val="tx1"/>
+                </a:solidFill>
+                <a:latin typeface="Calibri" panose="020F0502020204030204" pitchFamily="34" charset="0"/>
+              </a:defRPr>
+            </a:lvl3pPr>
+            <a:lvl4pPr marL="1600200" indent="-228600" algn="just">
+              <a:buClr>
+                <a:srgbClr val="1E3D7D"/>
+              </a:buClr>
+              <a:buFont typeface="Arial" panose="020B0604020202020204" pitchFamily="34" charset="0"/>
+              <a:buChar char="•"/>
+              <a:defRPr>
+                <a:solidFill>
+                  <a:schemeClr val="tx1"/>
+                </a:solidFill>
+                <a:latin typeface="Calibri" panose="020F0502020204030204" pitchFamily="34" charset="0"/>
+              </a:defRPr>
+            </a:lvl4pPr>
+            <a:lvl5pPr marL="2057400" indent="-228600" algn="just">
+              <a:buClr>
+                <a:srgbClr val="1E3D7D"/>
+              </a:buClr>
+              <a:buFont typeface="Arial" panose="020B0604020202020204" pitchFamily="34" charset="0"/>
+              <a:buChar char="•"/>
+              <a:defRPr>
+                <a:solidFill>
+                  <a:schemeClr val="tx1"/>
+                </a:solidFill>
+                <a:latin typeface="Calibri" panose="020F0502020204030204" pitchFamily="34" charset="0"/>
+              </a:defRPr>
+            </a:lvl5pPr>
+            <a:lvl6pPr marL="2514600" indent="-228600" algn="just" eaLnBrk="0" fontAlgn="base" hangingPunct="0">
+              <a:spcBef>
+                <a:spcPct val="0"/>
+              </a:spcBef>
+              <a:spcAft>
+                <a:spcPct val="0"/>
+              </a:spcAft>
+              <a:buClr>
+                <a:srgbClr val="1E3D7D"/>
+              </a:buClr>
+              <a:buFont typeface="Arial" panose="020B0604020202020204" pitchFamily="34" charset="0"/>
+              <a:buChar char="•"/>
+              <a:defRPr>
+                <a:solidFill>
+                  <a:schemeClr val="tx1"/>
+                </a:solidFill>
+                <a:latin typeface="Calibri" panose="020F0502020204030204" pitchFamily="34" charset="0"/>
+              </a:defRPr>
+            </a:lvl6pPr>
+            <a:lvl7pPr marL="2971800" indent="-228600" algn="just" eaLnBrk="0" fontAlgn="base" hangingPunct="0">
+              <a:spcBef>
+                <a:spcPct val="0"/>
+              </a:spcBef>
+              <a:spcAft>
+                <a:spcPct val="0"/>
+              </a:spcAft>
+              <a:buClr>
+                <a:srgbClr val="1E3D7D"/>
+              </a:buClr>
+              <a:buFont typeface="Arial" panose="020B0604020202020204" pitchFamily="34" charset="0"/>
+              <a:buChar char="•"/>
+              <a:defRPr>
+                <a:solidFill>
+                  <a:schemeClr val="tx1"/>
+                </a:solidFill>
+                <a:latin typeface="Calibri" panose="020F0502020204030204" pitchFamily="34" charset="0"/>
+              </a:defRPr>
+            </a:lvl7pPr>
+            <a:lvl8pPr marL="3429000" indent="-228600" algn="just" eaLnBrk="0" fontAlgn="base" hangingPunct="0">
+              <a:spcBef>
+                <a:spcPct val="0"/>
+              </a:spcBef>
+              <a:spcAft>
+                <a:spcPct val="0"/>
+              </a:spcAft>
+              <a:buClr>
+                <a:srgbClr val="1E3D7D"/>
+              </a:buClr>
+              <a:buFont typeface="Arial" panose="020B0604020202020204" pitchFamily="34" charset="0"/>
+              <a:buChar char="•"/>
+              <a:defRPr>
+                <a:solidFill>
+                  <a:schemeClr val="tx1"/>
+                </a:solidFill>
+                <a:latin typeface="Calibri" panose="020F0502020204030204" pitchFamily="34" charset="0"/>
+              </a:defRPr>
+            </a:lvl8pPr>
+            <a:lvl9pPr marL="3886200" indent="-228600" algn="just" eaLnBrk="0" fontAlgn="base" hangingPunct="0">
+              <a:spcBef>
+                <a:spcPct val="0"/>
+              </a:spcBef>
+              <a:spcAft>
+                <a:spcPct val="0"/>
+              </a:spcAft>
+              <a:buClr>
+                <a:srgbClr val="1E3D7D"/>
+              </a:buClr>
+              <a:buFont typeface="Arial" panose="020B0604020202020204" pitchFamily="34" charset="0"/>
+              <a:buChar char="•"/>
+              <a:defRPr>
+                <a:solidFill>
+                  <a:schemeClr val="tx1"/>
+                </a:solidFill>
+                <a:latin typeface="Calibri" panose="020F0502020204030204" pitchFamily="34" charset="0"/>
+              </a:defRPr>
+            </a:lvl9pPr>
+          </a:lstStyle>
+          <a:p>
+            <a:pPr algn="ctr" eaLnBrk="1" hangingPunct="1">
+              <a:buClrTx/>
+              <a:buFontTx/>
+              <a:buNone/>
+            </a:pPr>
+            <a:r>
+              <a:rPr lang="en-US" altLang="en-US" sz="1400" dirty="0">
+                <a:latin typeface="+mn-lt"/>
+                <a:ea typeface="Verdana" panose="020B0604030504040204" pitchFamily="34" charset="0"/>
+                <a:cs typeface="Verdana" panose="020B0604030504040204" pitchFamily="34" charset="0"/>
+              </a:rPr>
+              <a:t>Name Candidate</a:t>
+            </a:r>
+          </a:p>
+        </p:txBody>
+      </p:sp>
+      <p:sp>
+        <p:nvSpPr>
+          <p:cNvPr id="45" name="TextBox 1">
+            <a:extLst>
+              <a:ext uri="{FF2B5EF4-FFF2-40B4-BE49-F238E27FC236}">
+                <a16:creationId xmlns:a16="http://schemas.microsoft.com/office/drawing/2014/main" id="{FCCF6010-3085-9B97-0D1C-80C99B9637A7}"/>
+              </a:ext>
+            </a:extLst>
+          </p:cNvPr>
+          <p:cNvSpPr txBox="1">
+            <a:spLocks noChangeArrowheads="1"/>
+          </p:cNvSpPr>
+          <p:nvPr/>
+        </p:nvSpPr>
+        <p:spPr bwMode="auto">
+          <a:xfrm>
+            <a:off x="3724324" y="3996826"/>
+            <a:ext cx="1400961" cy="307777"/>
+          </a:xfrm>
+          <a:prstGeom prst="rect">
+            <a:avLst/>
+          </a:prstGeom>
+          <a:noFill/>
+          <a:ln>
+            <a:noFill/>
+          </a:ln>
+          <a:extLst>
+            <a:ext uri="{909E8E84-426E-40DD-AFC4-6F175D3DCCD1}">
+              <a14:hiddenFill xmlns:a14="http://schemas.microsoft.com/office/drawing/2010/main">
+                <a:solidFill>
+                  <a:srgbClr val="FFFFFF"/>
+                </a:solidFill>
+              </a14:hiddenFill>
+            </a:ext>
+            <a:ext uri="{91240B29-F687-4F45-9708-019B960494DF}">
+              <a14:hiddenLine xmlns:a14="http://schemas.microsoft.com/office/drawing/2010/main" w="9525">
+                <a:solidFill>
+                  <a:srgbClr val="000000"/>
+                </a:solidFill>
+                <a:miter lim="800000"/>
+                <a:headEnd/>
+                <a:tailEnd/>
+              </a14:hiddenLine>
+            </a:ext>
+          </a:extLst>
+        </p:spPr>
+        <p:txBody>
+          <a:bodyPr wrap="none">
+            <a:spAutoFit/>
+          </a:bodyPr>
+          <a:lstStyle>
+            <a:lvl1pPr algn="just">
+              <a:buClr>
+                <a:srgbClr val="1E3D7D"/>
+              </a:buClr>
+              <a:buFont typeface="Wingdings" panose="05000000000000000000" pitchFamily="2" charset="2"/>
+              <a:buChar char="§"/>
+              <a:defRPr>
+                <a:solidFill>
+                  <a:schemeClr val="tx1"/>
+                </a:solidFill>
+                <a:latin typeface="Calibri" panose="020F0502020204030204" pitchFamily="34" charset="0"/>
+              </a:defRPr>
+            </a:lvl1pPr>
+            <a:lvl2pPr marL="742950" indent="-285750" algn="just">
+              <a:buClr>
+                <a:srgbClr val="1E3D7D"/>
+              </a:buClr>
+              <a:buFont typeface="Courier New" panose="02070309020205020404" pitchFamily="49" charset="0"/>
+              <a:buChar char="o"/>
+              <a:defRPr>
+                <a:solidFill>
+                  <a:schemeClr val="tx1"/>
+                </a:solidFill>
+                <a:latin typeface="Calibri" panose="020F0502020204030204" pitchFamily="34" charset="0"/>
+              </a:defRPr>
+            </a:lvl2pPr>
+            <a:lvl3pPr marL="1143000" indent="-228600" algn="just">
+              <a:buClr>
+                <a:srgbClr val="1E3D7D"/>
+              </a:buClr>
+              <a:buFont typeface="Arial" panose="020B0604020202020204" pitchFamily="34" charset="0"/>
+              <a:buChar char="•"/>
+              <a:defRPr>
+                <a:solidFill>
+                  <a:schemeClr val="tx1"/>
+                </a:solidFill>
+                <a:latin typeface="Calibri" panose="020F0502020204030204" pitchFamily="34" charset="0"/>
+              </a:defRPr>
+            </a:lvl3pPr>
+            <a:lvl4pPr marL="1600200" indent="-228600" algn="just">
+              <a:buClr>
+                <a:srgbClr val="1E3D7D"/>
+              </a:buClr>
+              <a:buFont typeface="Arial" panose="020B0604020202020204" pitchFamily="34" charset="0"/>
+              <a:buChar char="•"/>
+              <a:defRPr>
+                <a:solidFill>
+                  <a:schemeClr val="tx1"/>
+                </a:solidFill>
+                <a:latin typeface="Calibri" panose="020F0502020204030204" pitchFamily="34" charset="0"/>
+              </a:defRPr>
+            </a:lvl4pPr>
+            <a:lvl5pPr marL="2057400" indent="-228600" algn="just">
+              <a:buClr>
+                <a:srgbClr val="1E3D7D"/>
+              </a:buClr>
+              <a:buFont typeface="Arial" panose="020B0604020202020204" pitchFamily="34" charset="0"/>
+              <a:buChar char="•"/>
+              <a:defRPr>
+                <a:solidFill>
+                  <a:schemeClr val="tx1"/>
+                </a:solidFill>
+                <a:latin typeface="Calibri" panose="020F0502020204030204" pitchFamily="34" charset="0"/>
+              </a:defRPr>
+            </a:lvl5pPr>
+            <a:lvl6pPr marL="2514600" indent="-228600" algn="just" eaLnBrk="0" fontAlgn="base" hangingPunct="0">
+              <a:spcBef>
+                <a:spcPct val="0"/>
+              </a:spcBef>
+              <a:spcAft>
+                <a:spcPct val="0"/>
+              </a:spcAft>
+              <a:buClr>
+                <a:srgbClr val="1E3D7D"/>
+              </a:buClr>
+              <a:buFont typeface="Arial" panose="020B0604020202020204" pitchFamily="34" charset="0"/>
+              <a:buChar char="•"/>
+              <a:defRPr>
+                <a:solidFill>
+                  <a:schemeClr val="tx1"/>
+                </a:solidFill>
+                <a:latin typeface="Calibri" panose="020F0502020204030204" pitchFamily="34" charset="0"/>
+              </a:defRPr>
+            </a:lvl6pPr>
+            <a:lvl7pPr marL="2971800" indent="-228600" algn="just" eaLnBrk="0" fontAlgn="base" hangingPunct="0">
+              <a:spcBef>
+                <a:spcPct val="0"/>
+              </a:spcBef>
+              <a:spcAft>
+                <a:spcPct val="0"/>
+              </a:spcAft>
+              <a:buClr>
+                <a:srgbClr val="1E3D7D"/>
+              </a:buClr>
+              <a:buFont typeface="Arial" panose="020B0604020202020204" pitchFamily="34" charset="0"/>
+              <a:buChar char="•"/>
+              <a:defRPr>
+                <a:solidFill>
+                  <a:schemeClr val="tx1"/>
+                </a:solidFill>
+                <a:latin typeface="Calibri" panose="020F0502020204030204" pitchFamily="34" charset="0"/>
+              </a:defRPr>
+            </a:lvl7pPr>
+            <a:lvl8pPr marL="3429000" indent="-228600" algn="just" eaLnBrk="0" fontAlgn="base" hangingPunct="0">
+              <a:spcBef>
+                <a:spcPct val="0"/>
+              </a:spcBef>
+              <a:spcAft>
+                <a:spcPct val="0"/>
+              </a:spcAft>
+              <a:buClr>
+                <a:srgbClr val="1E3D7D"/>
+              </a:buClr>
+              <a:buFont typeface="Arial" panose="020B0604020202020204" pitchFamily="34" charset="0"/>
+              <a:buChar char="•"/>
+              <a:defRPr>
+                <a:solidFill>
+                  <a:schemeClr val="tx1"/>
+                </a:solidFill>
+                <a:latin typeface="Calibri" panose="020F0502020204030204" pitchFamily="34" charset="0"/>
+              </a:defRPr>
+            </a:lvl8pPr>
+            <a:lvl9pPr marL="3886200" indent="-228600" algn="just" eaLnBrk="0" fontAlgn="base" hangingPunct="0">
+              <a:spcBef>
+                <a:spcPct val="0"/>
+              </a:spcBef>
+              <a:spcAft>
+                <a:spcPct val="0"/>
+              </a:spcAft>
+              <a:buClr>
+                <a:srgbClr val="1E3D7D"/>
+              </a:buClr>
+              <a:buFont typeface="Arial" panose="020B0604020202020204" pitchFamily="34" charset="0"/>
+              <a:buChar char="•"/>
+              <a:defRPr>
+                <a:solidFill>
+                  <a:schemeClr val="tx1"/>
+                </a:solidFill>
+                <a:latin typeface="Calibri" panose="020F0502020204030204" pitchFamily="34" charset="0"/>
+              </a:defRPr>
+            </a:lvl9pPr>
+          </a:lstStyle>
+          <a:p>
+            <a:pPr algn="ctr" eaLnBrk="1" hangingPunct="1">
+              <a:buClrTx/>
+              <a:buFontTx/>
+              <a:buNone/>
+            </a:pPr>
+            <a:r>
+              <a:rPr lang="en-US" altLang="en-US" sz="1400" dirty="0">
+                <a:latin typeface="+mn-lt"/>
+                <a:ea typeface="Verdana" panose="020B0604030504040204" pitchFamily="34" charset="0"/>
+                <a:cs typeface="Verdana" panose="020B0604030504040204" pitchFamily="34" charset="0"/>
+              </a:rPr>
+              <a:t>Name Candidate</a:t>
+            </a:r>
+          </a:p>
+        </p:txBody>
+      </p:sp>
+      <p:sp>
+        <p:nvSpPr>
+          <p:cNvPr id="46" name="Rectangle 45">
+            <a:extLst>
+              <a:ext uri="{FF2B5EF4-FFF2-40B4-BE49-F238E27FC236}">
+                <a16:creationId xmlns:a16="http://schemas.microsoft.com/office/drawing/2014/main" id="{A8725FD1-7E70-2CE1-D2AE-EB0F9D4A2CAA}"/>
+              </a:ext>
+            </a:extLst>
+          </p:cNvPr>
+          <p:cNvSpPr/>
+          <p:nvPr/>
+        </p:nvSpPr>
+        <p:spPr>
+          <a:xfrm>
+            <a:off x="3484250" y="1574818"/>
+            <a:ext cx="137160" cy="137160"/>
+          </a:xfrm>
+          <a:prstGeom prst="rect">
+            <a:avLst/>
+          </a:prstGeom>
+          <a:noFill/>
+          <a:ln>
+            <a:solidFill>
+              <a:schemeClr val="tx1"/>
+            </a:solidFill>
+          </a:ln>
+          <a:effectLst>
+            <a:outerShdw blurRad="44450" dist="27940" dir="5400000" algn="ctr">
+              <a:srgbClr val="000000">
+                <a:alpha val="32000"/>
+              </a:srgbClr>
+            </a:outerShdw>
+          </a:effectLst>
+          <a:scene3d>
+            <a:camera prst="orthographicFront">
+              <a:rot lat="0" lon="0" rev="0"/>
+            </a:camera>
+            <a:lightRig rig="balanced" dir="t">
+              <a:rot lat="0" lon="0" rev="8700000"/>
+            </a:lightRig>
+          </a:scene3d>
+          <a:sp3d>
+            <a:bevelT w="190500" h="38100"/>
+          </a:sp3d>
+        </p:spPr>
+        <p:style>
+          <a:lnRef idx="2">
+            <a:schemeClr val="accent1">
+              <a:shade val="15000"/>
+            </a:schemeClr>
+          </a:lnRef>
+          <a:fillRef idx="1">
+            <a:schemeClr val="accent1"/>
+          </a:fillRef>
+          <a:effectRef idx="0">
+            <a:schemeClr val="accent1"/>
+          </a:effectRef>
+          <a:fontRef idx="minor">
+            <a:schemeClr val="lt1"/>
+          </a:fontRef>
+        </p:style>
+        <p:txBody>
+          <a:bodyPr rtlCol="0" anchor="ctr"/>
+          <a:lstStyle/>
+          <a:p>
+            <a:pPr algn="ctr"/>
+            <a:endParaRPr lang="en-US" sz="1400"/>
+          </a:p>
+        </p:txBody>
+      </p:sp>
+      <p:sp>
+        <p:nvSpPr>
+          <p:cNvPr id="47" name="Rectangle 46">
+            <a:extLst>
+              <a:ext uri="{FF2B5EF4-FFF2-40B4-BE49-F238E27FC236}">
+                <a16:creationId xmlns:a16="http://schemas.microsoft.com/office/drawing/2014/main" id="{0B4D9EBE-C79D-44BD-B18C-6CA0067F1502}"/>
+              </a:ext>
+            </a:extLst>
+          </p:cNvPr>
+          <p:cNvSpPr/>
+          <p:nvPr/>
+        </p:nvSpPr>
+        <p:spPr>
+          <a:xfrm>
+            <a:off x="3492924" y="2419800"/>
+            <a:ext cx="137160" cy="137160"/>
+          </a:xfrm>
+          <a:prstGeom prst="rect">
+            <a:avLst/>
+          </a:prstGeom>
+          <a:noFill/>
+          <a:ln>
+            <a:solidFill>
+              <a:schemeClr val="tx1"/>
+            </a:solidFill>
+          </a:ln>
+          <a:effectLst>
+            <a:outerShdw blurRad="44450" dist="27940" dir="5400000" algn="ctr">
+              <a:srgbClr val="000000">
+                <a:alpha val="32000"/>
+              </a:srgbClr>
+            </a:outerShdw>
+          </a:effectLst>
+          <a:scene3d>
+            <a:camera prst="orthographicFront">
+              <a:rot lat="0" lon="0" rev="0"/>
+            </a:camera>
+            <a:lightRig rig="balanced" dir="t">
+              <a:rot lat="0" lon="0" rev="8700000"/>
+            </a:lightRig>
+          </a:scene3d>
+          <a:sp3d>
+            <a:bevelT w="190500" h="38100"/>
+          </a:sp3d>
+        </p:spPr>
+        <p:style>
+          <a:lnRef idx="2">
+            <a:schemeClr val="accent1">
+              <a:shade val="15000"/>
+            </a:schemeClr>
+          </a:lnRef>
+          <a:fillRef idx="1">
+            <a:schemeClr val="accent1"/>
+          </a:fillRef>
+          <a:effectRef idx="0">
+            <a:schemeClr val="accent1"/>
+          </a:effectRef>
+          <a:fontRef idx="minor">
+            <a:schemeClr val="lt1"/>
+          </a:fontRef>
+        </p:style>
+        <p:txBody>
+          <a:bodyPr rtlCol="0" anchor="ctr"/>
+          <a:lstStyle/>
+          <a:p>
+            <a:pPr algn="ctr"/>
+            <a:endParaRPr lang="en-US" sz="1400"/>
+          </a:p>
+        </p:txBody>
+      </p:sp>
+      <p:sp>
+        <p:nvSpPr>
+          <p:cNvPr id="48" name="Rectangle 47">
+            <a:extLst>
+              <a:ext uri="{FF2B5EF4-FFF2-40B4-BE49-F238E27FC236}">
+                <a16:creationId xmlns:a16="http://schemas.microsoft.com/office/drawing/2014/main" id="{47D9C1E9-578E-B4E3-EB95-619D5C1D1205}"/>
+              </a:ext>
+            </a:extLst>
+          </p:cNvPr>
+          <p:cNvSpPr/>
+          <p:nvPr/>
+        </p:nvSpPr>
+        <p:spPr>
+          <a:xfrm>
+            <a:off x="3492924" y="3235854"/>
+            <a:ext cx="137160" cy="137160"/>
+          </a:xfrm>
+          <a:prstGeom prst="rect">
+            <a:avLst/>
+          </a:prstGeom>
+          <a:noFill/>
+          <a:ln>
+            <a:solidFill>
+              <a:schemeClr val="tx1"/>
+            </a:solidFill>
+          </a:ln>
+          <a:effectLst>
+            <a:outerShdw blurRad="44450" dist="27940" dir="5400000" algn="ctr">
+              <a:srgbClr val="000000">
+                <a:alpha val="32000"/>
+              </a:srgbClr>
+            </a:outerShdw>
+          </a:effectLst>
+          <a:scene3d>
+            <a:camera prst="orthographicFront">
+              <a:rot lat="0" lon="0" rev="0"/>
+            </a:camera>
+            <a:lightRig rig="balanced" dir="t">
+              <a:rot lat="0" lon="0" rev="8700000"/>
+            </a:lightRig>
+          </a:scene3d>
+          <a:sp3d>
+            <a:bevelT w="190500" h="38100"/>
+          </a:sp3d>
+        </p:spPr>
+        <p:style>
+          <a:lnRef idx="2">
+            <a:schemeClr val="accent1">
+              <a:shade val="15000"/>
+            </a:schemeClr>
+          </a:lnRef>
+          <a:fillRef idx="1">
+            <a:schemeClr val="accent1"/>
+          </a:fillRef>
+          <a:effectRef idx="0">
+            <a:schemeClr val="accent1"/>
+          </a:effectRef>
+          <a:fontRef idx="minor">
+            <a:schemeClr val="lt1"/>
+          </a:fontRef>
+        </p:style>
+        <p:txBody>
+          <a:bodyPr rtlCol="0" anchor="ctr"/>
+          <a:lstStyle/>
+          <a:p>
+            <a:pPr algn="ctr"/>
+            <a:endParaRPr lang="en-US" sz="1400"/>
+          </a:p>
+        </p:txBody>
+      </p:sp>
+      <p:sp>
+        <p:nvSpPr>
+          <p:cNvPr id="49" name="Rectangle 48">
+            <a:extLst>
+              <a:ext uri="{FF2B5EF4-FFF2-40B4-BE49-F238E27FC236}">
+                <a16:creationId xmlns:a16="http://schemas.microsoft.com/office/drawing/2014/main" id="{75B3D024-FCEA-F344-57C9-A41E21CC9AD1}"/>
+              </a:ext>
+            </a:extLst>
+          </p:cNvPr>
+          <p:cNvSpPr/>
+          <p:nvPr/>
+        </p:nvSpPr>
+        <p:spPr>
+          <a:xfrm>
+            <a:off x="3489437" y="4070154"/>
+            <a:ext cx="137160" cy="137160"/>
+          </a:xfrm>
+          <a:prstGeom prst="rect">
+            <a:avLst/>
+          </a:prstGeom>
+          <a:noFill/>
+          <a:ln>
+            <a:solidFill>
+              <a:schemeClr val="tx1"/>
+            </a:solidFill>
+          </a:ln>
+          <a:effectLst>
+            <a:outerShdw blurRad="44450" dist="27940" dir="5400000" algn="ctr">
+              <a:srgbClr val="000000">
+                <a:alpha val="32000"/>
+              </a:srgbClr>
+            </a:outerShdw>
+          </a:effectLst>
+          <a:scene3d>
+            <a:camera prst="orthographicFront">
+              <a:rot lat="0" lon="0" rev="0"/>
+            </a:camera>
+            <a:lightRig rig="balanced" dir="t">
+              <a:rot lat="0" lon="0" rev="8700000"/>
+            </a:lightRig>
+          </a:scene3d>
+          <a:sp3d>
+            <a:bevelT w="190500" h="38100"/>
+          </a:sp3d>
+        </p:spPr>
+        <p:style>
+          <a:lnRef idx="2">
+            <a:schemeClr val="accent1">
+              <a:shade val="15000"/>
+            </a:schemeClr>
+          </a:lnRef>
+          <a:fillRef idx="1">
+            <a:schemeClr val="accent1"/>
+          </a:fillRef>
+          <a:effectRef idx="0">
+            <a:schemeClr val="accent1"/>
+          </a:effectRef>
+          <a:fontRef idx="minor">
+            <a:schemeClr val="lt1"/>
+          </a:fontRef>
+        </p:style>
+        <p:txBody>
+          <a:bodyPr rtlCol="0" anchor="ctr"/>
+          <a:lstStyle/>
+          <a:p>
+            <a:pPr algn="ctr"/>
+            <a:endParaRPr lang="en-US" sz="1400"/>
+          </a:p>
+        </p:txBody>
+      </p:sp>
+      <p:sp>
+        <p:nvSpPr>
+          <p:cNvPr id="50" name="TextBox 1">
+            <a:extLst>
+              <a:ext uri="{FF2B5EF4-FFF2-40B4-BE49-F238E27FC236}">
+                <a16:creationId xmlns:a16="http://schemas.microsoft.com/office/drawing/2014/main" id="{027F9358-5E74-0BEF-079C-69EA159275EB}"/>
+              </a:ext>
+            </a:extLst>
+          </p:cNvPr>
+          <p:cNvSpPr txBox="1">
+            <a:spLocks noChangeArrowheads="1"/>
+          </p:cNvSpPr>
+          <p:nvPr/>
+        </p:nvSpPr>
+        <p:spPr bwMode="auto">
+          <a:xfrm>
+            <a:off x="6428692" y="1088627"/>
+            <a:ext cx="1400961" cy="307777"/>
+          </a:xfrm>
+          <a:prstGeom prst="rect">
+            <a:avLst/>
+          </a:prstGeom>
+          <a:noFill/>
+          <a:ln>
+            <a:noFill/>
+          </a:ln>
+          <a:extLst>
+            <a:ext uri="{909E8E84-426E-40DD-AFC4-6F175D3DCCD1}">
+              <a14:hiddenFill xmlns:a14="http://schemas.microsoft.com/office/drawing/2010/main">
+                <a:solidFill>
+                  <a:srgbClr val="FFFFFF"/>
+                </a:solidFill>
+              </a14:hiddenFill>
+            </a:ext>
+            <a:ext uri="{91240B29-F687-4F45-9708-019B960494DF}">
+              <a14:hiddenLine xmlns:a14="http://schemas.microsoft.com/office/drawing/2010/main" w="9525">
+                <a:solidFill>
+                  <a:srgbClr val="000000"/>
+                </a:solidFill>
+                <a:miter lim="800000"/>
+                <a:headEnd/>
+                <a:tailEnd/>
+              </a14:hiddenLine>
+            </a:ext>
+          </a:extLst>
+        </p:spPr>
+        <p:txBody>
+          <a:bodyPr wrap="none">
+            <a:spAutoFit/>
+          </a:bodyPr>
+          <a:lstStyle>
+            <a:lvl1pPr algn="just">
+              <a:buClr>
+                <a:srgbClr val="1E3D7D"/>
+              </a:buClr>
+              <a:buFont typeface="Wingdings" panose="05000000000000000000" pitchFamily="2" charset="2"/>
+              <a:buChar char="§"/>
+              <a:defRPr>
+                <a:solidFill>
+                  <a:schemeClr val="tx1"/>
+                </a:solidFill>
+                <a:latin typeface="Calibri" panose="020F0502020204030204" pitchFamily="34" charset="0"/>
+              </a:defRPr>
+            </a:lvl1pPr>
+            <a:lvl2pPr marL="742950" indent="-285750" algn="just">
+              <a:buClr>
+                <a:srgbClr val="1E3D7D"/>
+              </a:buClr>
+              <a:buFont typeface="Courier New" panose="02070309020205020404" pitchFamily="49" charset="0"/>
+              <a:buChar char="o"/>
+              <a:defRPr>
+                <a:solidFill>
+                  <a:schemeClr val="tx1"/>
+                </a:solidFill>
+                <a:latin typeface="Calibri" panose="020F0502020204030204" pitchFamily="34" charset="0"/>
+              </a:defRPr>
+            </a:lvl2pPr>
+            <a:lvl3pPr marL="1143000" indent="-228600" algn="just">
+              <a:buClr>
+                <a:srgbClr val="1E3D7D"/>
+              </a:buClr>
+              <a:buFont typeface="Arial" panose="020B0604020202020204" pitchFamily="34" charset="0"/>
+              <a:buChar char="•"/>
+              <a:defRPr>
+                <a:solidFill>
+                  <a:schemeClr val="tx1"/>
+                </a:solidFill>
+                <a:latin typeface="Calibri" panose="020F0502020204030204" pitchFamily="34" charset="0"/>
+              </a:defRPr>
+            </a:lvl3pPr>
+            <a:lvl4pPr marL="1600200" indent="-228600" algn="just">
+              <a:buClr>
+                <a:srgbClr val="1E3D7D"/>
+              </a:buClr>
+              <a:buFont typeface="Arial" panose="020B0604020202020204" pitchFamily="34" charset="0"/>
+              <a:buChar char="•"/>
+              <a:defRPr>
+                <a:solidFill>
+                  <a:schemeClr val="tx1"/>
+                </a:solidFill>
+                <a:latin typeface="Calibri" panose="020F0502020204030204" pitchFamily="34" charset="0"/>
+              </a:defRPr>
+            </a:lvl4pPr>
+            <a:lvl5pPr marL="2057400" indent="-228600" algn="just">
+              <a:buClr>
+                <a:srgbClr val="1E3D7D"/>
+              </a:buClr>
+              <a:buFont typeface="Arial" panose="020B0604020202020204" pitchFamily="34" charset="0"/>
+              <a:buChar char="•"/>
+              <a:defRPr>
+                <a:solidFill>
+                  <a:schemeClr val="tx1"/>
+                </a:solidFill>
+                <a:latin typeface="Calibri" panose="020F0502020204030204" pitchFamily="34" charset="0"/>
+              </a:defRPr>
+            </a:lvl5pPr>
+            <a:lvl6pPr marL="2514600" indent="-228600" algn="just" eaLnBrk="0" fontAlgn="base" hangingPunct="0">
+              <a:spcBef>
+                <a:spcPct val="0"/>
+              </a:spcBef>
+              <a:spcAft>
+                <a:spcPct val="0"/>
+              </a:spcAft>
+              <a:buClr>
+                <a:srgbClr val="1E3D7D"/>
+              </a:buClr>
+              <a:buFont typeface="Arial" panose="020B0604020202020204" pitchFamily="34" charset="0"/>
+              <a:buChar char="•"/>
+              <a:defRPr>
+                <a:solidFill>
+                  <a:schemeClr val="tx1"/>
+                </a:solidFill>
+                <a:latin typeface="Calibri" panose="020F0502020204030204" pitchFamily="34" charset="0"/>
+              </a:defRPr>
+            </a:lvl6pPr>
+            <a:lvl7pPr marL="2971800" indent="-228600" algn="just" eaLnBrk="0" fontAlgn="base" hangingPunct="0">
+              <a:spcBef>
+                <a:spcPct val="0"/>
+              </a:spcBef>
+              <a:spcAft>
+                <a:spcPct val="0"/>
+              </a:spcAft>
+              <a:buClr>
+                <a:srgbClr val="1E3D7D"/>
+              </a:buClr>
+              <a:buFont typeface="Arial" panose="020B0604020202020204" pitchFamily="34" charset="0"/>
+              <a:buChar char="•"/>
+              <a:defRPr>
+                <a:solidFill>
+                  <a:schemeClr val="tx1"/>
+                </a:solidFill>
+                <a:latin typeface="Calibri" panose="020F0502020204030204" pitchFamily="34" charset="0"/>
+              </a:defRPr>
+            </a:lvl7pPr>
+            <a:lvl8pPr marL="3429000" indent="-228600" algn="just" eaLnBrk="0" fontAlgn="base" hangingPunct="0">
+              <a:spcBef>
+                <a:spcPct val="0"/>
+              </a:spcBef>
+              <a:spcAft>
+                <a:spcPct val="0"/>
+              </a:spcAft>
+              <a:buClr>
+                <a:srgbClr val="1E3D7D"/>
+              </a:buClr>
+              <a:buFont typeface="Arial" panose="020B0604020202020204" pitchFamily="34" charset="0"/>
+              <a:buChar char="•"/>
+              <a:defRPr>
+                <a:solidFill>
+                  <a:schemeClr val="tx1"/>
+                </a:solidFill>
+                <a:latin typeface="Calibri" panose="020F0502020204030204" pitchFamily="34" charset="0"/>
+              </a:defRPr>
+            </a:lvl8pPr>
+            <a:lvl9pPr marL="3886200" indent="-228600" algn="just" eaLnBrk="0" fontAlgn="base" hangingPunct="0">
+              <a:spcBef>
+                <a:spcPct val="0"/>
+              </a:spcBef>
+              <a:spcAft>
+                <a:spcPct val="0"/>
+              </a:spcAft>
+              <a:buClr>
+                <a:srgbClr val="1E3D7D"/>
+              </a:buClr>
+              <a:buFont typeface="Arial" panose="020B0604020202020204" pitchFamily="34" charset="0"/>
+              <a:buChar char="•"/>
+              <a:defRPr>
+                <a:solidFill>
+                  <a:schemeClr val="tx1"/>
+                </a:solidFill>
+                <a:latin typeface="Calibri" panose="020F0502020204030204" pitchFamily="34" charset="0"/>
+              </a:defRPr>
+            </a:lvl9pPr>
+          </a:lstStyle>
+          <a:p>
+            <a:pPr algn="ctr" eaLnBrk="1" hangingPunct="1">
+              <a:buClrTx/>
+              <a:buFontTx/>
+              <a:buNone/>
+            </a:pPr>
+            <a:r>
+              <a:rPr lang="en-US" altLang="en-US" sz="1400" dirty="0">
+                <a:latin typeface="+mn-lt"/>
+                <a:ea typeface="Verdana" panose="020B0604030504040204" pitchFamily="34" charset="0"/>
+                <a:cs typeface="Verdana" panose="020B0604030504040204" pitchFamily="34" charset="0"/>
+              </a:rPr>
+              <a:t>Name Candidate</a:t>
+            </a:r>
+          </a:p>
+        </p:txBody>
+      </p:sp>
+      <p:sp>
+        <p:nvSpPr>
+          <p:cNvPr id="51" name="TextBox 1">
+            <a:extLst>
+              <a:ext uri="{FF2B5EF4-FFF2-40B4-BE49-F238E27FC236}">
+                <a16:creationId xmlns:a16="http://schemas.microsoft.com/office/drawing/2014/main" id="{7642816B-3565-178A-6FF7-0EB662BE1D5E}"/>
+              </a:ext>
+            </a:extLst>
+          </p:cNvPr>
+          <p:cNvSpPr txBox="1">
+            <a:spLocks noChangeArrowheads="1"/>
+          </p:cNvSpPr>
+          <p:nvPr/>
+        </p:nvSpPr>
+        <p:spPr bwMode="auto">
+          <a:xfrm>
+            <a:off x="6436389" y="1916915"/>
+            <a:ext cx="1400961" cy="307777"/>
+          </a:xfrm>
+          <a:prstGeom prst="rect">
+            <a:avLst/>
+          </a:prstGeom>
+          <a:noFill/>
+          <a:ln>
+            <a:noFill/>
+          </a:ln>
+          <a:extLst>
+            <a:ext uri="{909E8E84-426E-40DD-AFC4-6F175D3DCCD1}">
+              <a14:hiddenFill xmlns:a14="http://schemas.microsoft.com/office/drawing/2010/main">
+                <a:solidFill>
+                  <a:srgbClr val="FFFFFF"/>
+                </a:solidFill>
+              </a14:hiddenFill>
+            </a:ext>
+            <a:ext uri="{91240B29-F687-4F45-9708-019B960494DF}">
+              <a14:hiddenLine xmlns:a14="http://schemas.microsoft.com/office/drawing/2010/main" w="9525">
+                <a:solidFill>
+                  <a:srgbClr val="000000"/>
+                </a:solidFill>
+                <a:miter lim="800000"/>
+                <a:headEnd/>
+                <a:tailEnd/>
+              </a14:hiddenLine>
+            </a:ext>
+          </a:extLst>
+        </p:spPr>
+        <p:txBody>
+          <a:bodyPr wrap="none">
+            <a:spAutoFit/>
+          </a:bodyPr>
+          <a:lstStyle>
+            <a:lvl1pPr algn="just">
+              <a:buClr>
+                <a:srgbClr val="1E3D7D"/>
+              </a:buClr>
+              <a:buFont typeface="Wingdings" panose="05000000000000000000" pitchFamily="2" charset="2"/>
+              <a:buChar char="§"/>
+              <a:defRPr>
+                <a:solidFill>
+                  <a:schemeClr val="tx1"/>
+                </a:solidFill>
+                <a:latin typeface="Calibri" panose="020F0502020204030204" pitchFamily="34" charset="0"/>
+              </a:defRPr>
+            </a:lvl1pPr>
+            <a:lvl2pPr marL="742950" indent="-285750" algn="just">
+              <a:buClr>
+                <a:srgbClr val="1E3D7D"/>
+              </a:buClr>
+              <a:buFont typeface="Courier New" panose="02070309020205020404" pitchFamily="49" charset="0"/>
+              <a:buChar char="o"/>
+              <a:defRPr>
+                <a:solidFill>
+                  <a:schemeClr val="tx1"/>
+                </a:solidFill>
+                <a:latin typeface="Calibri" panose="020F0502020204030204" pitchFamily="34" charset="0"/>
+              </a:defRPr>
+            </a:lvl2pPr>
+            <a:lvl3pPr marL="1143000" indent="-228600" algn="just">
+              <a:buClr>
+                <a:srgbClr val="1E3D7D"/>
+              </a:buClr>
+              <a:buFont typeface="Arial" panose="020B0604020202020204" pitchFamily="34" charset="0"/>
+              <a:buChar char="•"/>
+              <a:defRPr>
+                <a:solidFill>
+                  <a:schemeClr val="tx1"/>
+                </a:solidFill>
+                <a:latin typeface="Calibri" panose="020F0502020204030204" pitchFamily="34" charset="0"/>
+              </a:defRPr>
+            </a:lvl3pPr>
+            <a:lvl4pPr marL="1600200" indent="-228600" algn="just">
+              <a:buClr>
+                <a:srgbClr val="1E3D7D"/>
+              </a:buClr>
+              <a:buFont typeface="Arial" panose="020B0604020202020204" pitchFamily="34" charset="0"/>
+              <a:buChar char="•"/>
+              <a:defRPr>
+                <a:solidFill>
+                  <a:schemeClr val="tx1"/>
+                </a:solidFill>
+                <a:latin typeface="Calibri" panose="020F0502020204030204" pitchFamily="34" charset="0"/>
+              </a:defRPr>
+            </a:lvl4pPr>
+            <a:lvl5pPr marL="2057400" indent="-228600" algn="just">
+              <a:buClr>
+                <a:srgbClr val="1E3D7D"/>
+              </a:buClr>
+              <a:buFont typeface="Arial" panose="020B0604020202020204" pitchFamily="34" charset="0"/>
+              <a:buChar char="•"/>
+              <a:defRPr>
+                <a:solidFill>
+                  <a:schemeClr val="tx1"/>
+                </a:solidFill>
+                <a:latin typeface="Calibri" panose="020F0502020204030204" pitchFamily="34" charset="0"/>
+              </a:defRPr>
+            </a:lvl5pPr>
+            <a:lvl6pPr marL="2514600" indent="-228600" algn="just" eaLnBrk="0" fontAlgn="base" hangingPunct="0">
+              <a:spcBef>
+                <a:spcPct val="0"/>
+              </a:spcBef>
+              <a:spcAft>
+                <a:spcPct val="0"/>
+              </a:spcAft>
+              <a:buClr>
+                <a:srgbClr val="1E3D7D"/>
+              </a:buClr>
+              <a:buFont typeface="Arial" panose="020B0604020202020204" pitchFamily="34" charset="0"/>
+              <a:buChar char="•"/>
+              <a:defRPr>
+                <a:solidFill>
+                  <a:schemeClr val="tx1"/>
+                </a:solidFill>
+                <a:latin typeface="Calibri" panose="020F0502020204030204" pitchFamily="34" charset="0"/>
+              </a:defRPr>
+            </a:lvl6pPr>
+            <a:lvl7pPr marL="2971800" indent="-228600" algn="just" eaLnBrk="0" fontAlgn="base" hangingPunct="0">
+              <a:spcBef>
+                <a:spcPct val="0"/>
+              </a:spcBef>
+              <a:spcAft>
+                <a:spcPct val="0"/>
+              </a:spcAft>
+              <a:buClr>
+                <a:srgbClr val="1E3D7D"/>
+              </a:buClr>
+              <a:buFont typeface="Arial" panose="020B0604020202020204" pitchFamily="34" charset="0"/>
+              <a:buChar char="•"/>
+              <a:defRPr>
+                <a:solidFill>
+                  <a:schemeClr val="tx1"/>
+                </a:solidFill>
+                <a:latin typeface="Calibri" panose="020F0502020204030204" pitchFamily="34" charset="0"/>
+              </a:defRPr>
+            </a:lvl7pPr>
+            <a:lvl8pPr marL="3429000" indent="-228600" algn="just" eaLnBrk="0" fontAlgn="base" hangingPunct="0">
+              <a:spcBef>
+                <a:spcPct val="0"/>
+              </a:spcBef>
+              <a:spcAft>
+                <a:spcPct val="0"/>
+              </a:spcAft>
+              <a:buClr>
+                <a:srgbClr val="1E3D7D"/>
+              </a:buClr>
+              <a:buFont typeface="Arial" panose="020B0604020202020204" pitchFamily="34" charset="0"/>
+              <a:buChar char="•"/>
+              <a:defRPr>
+                <a:solidFill>
+                  <a:schemeClr val="tx1"/>
+                </a:solidFill>
+                <a:latin typeface="Calibri" panose="020F0502020204030204" pitchFamily="34" charset="0"/>
+              </a:defRPr>
+            </a:lvl8pPr>
+            <a:lvl9pPr marL="3886200" indent="-228600" algn="just" eaLnBrk="0" fontAlgn="base" hangingPunct="0">
+              <a:spcBef>
+                <a:spcPct val="0"/>
+              </a:spcBef>
+              <a:spcAft>
+                <a:spcPct val="0"/>
+              </a:spcAft>
+              <a:buClr>
+                <a:srgbClr val="1E3D7D"/>
+              </a:buClr>
+              <a:buFont typeface="Arial" panose="020B0604020202020204" pitchFamily="34" charset="0"/>
+              <a:buChar char="•"/>
+              <a:defRPr>
+                <a:solidFill>
+                  <a:schemeClr val="tx1"/>
+                </a:solidFill>
+                <a:latin typeface="Calibri" panose="020F0502020204030204" pitchFamily="34" charset="0"/>
+              </a:defRPr>
+            </a:lvl9pPr>
+          </a:lstStyle>
+          <a:p>
+            <a:pPr algn="ctr" eaLnBrk="1" hangingPunct="1">
+              <a:buClrTx/>
+              <a:buFontTx/>
+              <a:buNone/>
+            </a:pPr>
+            <a:r>
+              <a:rPr lang="en-US" altLang="en-US" sz="1400" dirty="0">
+                <a:latin typeface="+mn-lt"/>
+                <a:ea typeface="Verdana" panose="020B0604030504040204" pitchFamily="34" charset="0"/>
+                <a:cs typeface="Verdana" panose="020B0604030504040204" pitchFamily="34" charset="0"/>
+              </a:rPr>
+              <a:t>Name Candidate</a:t>
+            </a:r>
+          </a:p>
+        </p:txBody>
+      </p:sp>
+      <p:sp>
+        <p:nvSpPr>
+          <p:cNvPr id="52" name="TextBox 1">
+            <a:extLst>
+              <a:ext uri="{FF2B5EF4-FFF2-40B4-BE49-F238E27FC236}">
+                <a16:creationId xmlns:a16="http://schemas.microsoft.com/office/drawing/2014/main" id="{67CF37B4-7A50-B490-57E9-88733E55DBB9}"/>
+              </a:ext>
+            </a:extLst>
+          </p:cNvPr>
+          <p:cNvSpPr txBox="1">
+            <a:spLocks noChangeArrowheads="1"/>
+          </p:cNvSpPr>
+          <p:nvPr/>
+        </p:nvSpPr>
+        <p:spPr bwMode="auto">
+          <a:xfrm>
+            <a:off x="6436389" y="2736481"/>
+            <a:ext cx="1400961" cy="307777"/>
+          </a:xfrm>
+          <a:prstGeom prst="rect">
+            <a:avLst/>
+          </a:prstGeom>
+          <a:noFill/>
+          <a:ln>
+            <a:noFill/>
+          </a:ln>
+          <a:extLst>
+            <a:ext uri="{909E8E84-426E-40DD-AFC4-6F175D3DCCD1}">
+              <a14:hiddenFill xmlns:a14="http://schemas.microsoft.com/office/drawing/2010/main">
+                <a:solidFill>
+                  <a:srgbClr val="FFFFFF"/>
+                </a:solidFill>
+              </a14:hiddenFill>
+            </a:ext>
+            <a:ext uri="{91240B29-F687-4F45-9708-019B960494DF}">
+              <a14:hiddenLine xmlns:a14="http://schemas.microsoft.com/office/drawing/2010/main" w="9525">
+                <a:solidFill>
+                  <a:srgbClr val="000000"/>
+                </a:solidFill>
+                <a:miter lim="800000"/>
+                <a:headEnd/>
+                <a:tailEnd/>
+              </a14:hiddenLine>
+            </a:ext>
+          </a:extLst>
+        </p:spPr>
+        <p:txBody>
+          <a:bodyPr wrap="none">
+            <a:spAutoFit/>
+          </a:bodyPr>
+          <a:lstStyle>
+            <a:lvl1pPr algn="just">
+              <a:buClr>
+                <a:srgbClr val="1E3D7D"/>
+              </a:buClr>
+              <a:buFont typeface="Wingdings" panose="05000000000000000000" pitchFamily="2" charset="2"/>
+              <a:buChar char="§"/>
+              <a:defRPr>
+                <a:solidFill>
+                  <a:schemeClr val="tx1"/>
+                </a:solidFill>
+                <a:latin typeface="Calibri" panose="020F0502020204030204" pitchFamily="34" charset="0"/>
+              </a:defRPr>
+            </a:lvl1pPr>
+            <a:lvl2pPr marL="742950" indent="-285750" algn="just">
+              <a:buClr>
+                <a:srgbClr val="1E3D7D"/>
+              </a:buClr>
+              <a:buFont typeface="Courier New" panose="02070309020205020404" pitchFamily="49" charset="0"/>
+              <a:buChar char="o"/>
+              <a:defRPr>
+                <a:solidFill>
+                  <a:schemeClr val="tx1"/>
+                </a:solidFill>
+                <a:latin typeface="Calibri" panose="020F0502020204030204" pitchFamily="34" charset="0"/>
+              </a:defRPr>
+            </a:lvl2pPr>
+            <a:lvl3pPr marL="1143000" indent="-228600" algn="just">
+              <a:buClr>
+                <a:srgbClr val="1E3D7D"/>
+              </a:buClr>
+              <a:buFont typeface="Arial" panose="020B0604020202020204" pitchFamily="34" charset="0"/>
+              <a:buChar char="•"/>
+              <a:defRPr>
+                <a:solidFill>
+                  <a:schemeClr val="tx1"/>
+                </a:solidFill>
+                <a:latin typeface="Calibri" panose="020F0502020204030204" pitchFamily="34" charset="0"/>
+              </a:defRPr>
+            </a:lvl3pPr>
+            <a:lvl4pPr marL="1600200" indent="-228600" algn="just">
+              <a:buClr>
+                <a:srgbClr val="1E3D7D"/>
+              </a:buClr>
+              <a:buFont typeface="Arial" panose="020B0604020202020204" pitchFamily="34" charset="0"/>
+              <a:buChar char="•"/>
+              <a:defRPr>
+                <a:solidFill>
+                  <a:schemeClr val="tx1"/>
+                </a:solidFill>
+                <a:latin typeface="Calibri" panose="020F0502020204030204" pitchFamily="34" charset="0"/>
+              </a:defRPr>
+            </a:lvl4pPr>
+            <a:lvl5pPr marL="2057400" indent="-228600" algn="just">
+              <a:buClr>
+                <a:srgbClr val="1E3D7D"/>
+              </a:buClr>
+              <a:buFont typeface="Arial" panose="020B0604020202020204" pitchFamily="34" charset="0"/>
+              <a:buChar char="•"/>
+              <a:defRPr>
+                <a:solidFill>
+                  <a:schemeClr val="tx1"/>
+                </a:solidFill>
+                <a:latin typeface="Calibri" panose="020F0502020204030204" pitchFamily="34" charset="0"/>
+              </a:defRPr>
+            </a:lvl5pPr>
+            <a:lvl6pPr marL="2514600" indent="-228600" algn="just" eaLnBrk="0" fontAlgn="base" hangingPunct="0">
+              <a:spcBef>
+                <a:spcPct val="0"/>
+              </a:spcBef>
+              <a:spcAft>
+                <a:spcPct val="0"/>
+              </a:spcAft>
+              <a:buClr>
+                <a:srgbClr val="1E3D7D"/>
+              </a:buClr>
+              <a:buFont typeface="Arial" panose="020B0604020202020204" pitchFamily="34" charset="0"/>
+              <a:buChar char="•"/>
+              <a:defRPr>
+                <a:solidFill>
+                  <a:schemeClr val="tx1"/>
+                </a:solidFill>
+                <a:latin typeface="Calibri" panose="020F0502020204030204" pitchFamily="34" charset="0"/>
+              </a:defRPr>
+            </a:lvl6pPr>
+            <a:lvl7pPr marL="2971800" indent="-228600" algn="just" eaLnBrk="0" fontAlgn="base" hangingPunct="0">
+              <a:spcBef>
+                <a:spcPct val="0"/>
+              </a:spcBef>
+              <a:spcAft>
+                <a:spcPct val="0"/>
+              </a:spcAft>
+              <a:buClr>
+                <a:srgbClr val="1E3D7D"/>
+              </a:buClr>
+              <a:buFont typeface="Arial" panose="020B0604020202020204" pitchFamily="34" charset="0"/>
+              <a:buChar char="•"/>
+              <a:defRPr>
+                <a:solidFill>
+                  <a:schemeClr val="tx1"/>
+                </a:solidFill>
+                <a:latin typeface="Calibri" panose="020F0502020204030204" pitchFamily="34" charset="0"/>
+              </a:defRPr>
+            </a:lvl7pPr>
+            <a:lvl8pPr marL="3429000" indent="-228600" algn="just" eaLnBrk="0" fontAlgn="base" hangingPunct="0">
+              <a:spcBef>
+                <a:spcPct val="0"/>
+              </a:spcBef>
+              <a:spcAft>
+                <a:spcPct val="0"/>
+              </a:spcAft>
+              <a:buClr>
+                <a:srgbClr val="1E3D7D"/>
+              </a:buClr>
+              <a:buFont typeface="Arial" panose="020B0604020202020204" pitchFamily="34" charset="0"/>
+              <a:buChar char="•"/>
+              <a:defRPr>
+                <a:solidFill>
+                  <a:schemeClr val="tx1"/>
+                </a:solidFill>
+                <a:latin typeface="Calibri" panose="020F0502020204030204" pitchFamily="34" charset="0"/>
+              </a:defRPr>
+            </a:lvl8pPr>
+            <a:lvl9pPr marL="3886200" indent="-228600" algn="just" eaLnBrk="0" fontAlgn="base" hangingPunct="0">
+              <a:spcBef>
+                <a:spcPct val="0"/>
+              </a:spcBef>
+              <a:spcAft>
+                <a:spcPct val="0"/>
+              </a:spcAft>
+              <a:buClr>
+                <a:srgbClr val="1E3D7D"/>
+              </a:buClr>
+              <a:buFont typeface="Arial" panose="020B0604020202020204" pitchFamily="34" charset="0"/>
+              <a:buChar char="•"/>
+              <a:defRPr>
+                <a:solidFill>
+                  <a:schemeClr val="tx1"/>
+                </a:solidFill>
+                <a:latin typeface="Calibri" panose="020F0502020204030204" pitchFamily="34" charset="0"/>
+              </a:defRPr>
+            </a:lvl9pPr>
+          </a:lstStyle>
+          <a:p>
+            <a:pPr algn="ctr" eaLnBrk="1" hangingPunct="1">
+              <a:buClrTx/>
+              <a:buFontTx/>
+              <a:buNone/>
+            </a:pPr>
+            <a:r>
+              <a:rPr lang="en-US" altLang="en-US" sz="1400" dirty="0">
+                <a:latin typeface="+mn-lt"/>
+                <a:ea typeface="Verdana" panose="020B0604030504040204" pitchFamily="34" charset="0"/>
+                <a:cs typeface="Verdana" panose="020B0604030504040204" pitchFamily="34" charset="0"/>
+              </a:rPr>
+              <a:t>Name Candidate</a:t>
+            </a:r>
+          </a:p>
+        </p:txBody>
+      </p:sp>
+      <p:sp>
+        <p:nvSpPr>
+          <p:cNvPr id="53" name="TextBox 1">
+            <a:extLst>
+              <a:ext uri="{FF2B5EF4-FFF2-40B4-BE49-F238E27FC236}">
+                <a16:creationId xmlns:a16="http://schemas.microsoft.com/office/drawing/2014/main" id="{7C16B492-8D3E-CCC5-EBED-7DD0E12E3DDD}"/>
+              </a:ext>
+            </a:extLst>
+          </p:cNvPr>
+          <p:cNvSpPr txBox="1">
+            <a:spLocks noChangeArrowheads="1"/>
+          </p:cNvSpPr>
+          <p:nvPr/>
+        </p:nvSpPr>
+        <p:spPr bwMode="auto">
+          <a:xfrm>
+            <a:off x="6436389" y="3610978"/>
+            <a:ext cx="1400961" cy="307777"/>
+          </a:xfrm>
+          <a:prstGeom prst="rect">
+            <a:avLst/>
+          </a:prstGeom>
+          <a:noFill/>
+          <a:ln>
+            <a:noFill/>
+          </a:ln>
+          <a:extLst>
+            <a:ext uri="{909E8E84-426E-40DD-AFC4-6F175D3DCCD1}">
+              <a14:hiddenFill xmlns:a14="http://schemas.microsoft.com/office/drawing/2010/main">
+                <a:solidFill>
+                  <a:srgbClr val="FFFFFF"/>
+                </a:solidFill>
+              </a14:hiddenFill>
+            </a:ext>
+            <a:ext uri="{91240B29-F687-4F45-9708-019B960494DF}">
+              <a14:hiddenLine xmlns:a14="http://schemas.microsoft.com/office/drawing/2010/main" w="9525">
+                <a:solidFill>
+                  <a:srgbClr val="000000"/>
+                </a:solidFill>
+                <a:miter lim="800000"/>
+                <a:headEnd/>
+                <a:tailEnd/>
+              </a14:hiddenLine>
+            </a:ext>
+          </a:extLst>
+        </p:spPr>
+        <p:txBody>
+          <a:bodyPr wrap="none">
+            <a:spAutoFit/>
+          </a:bodyPr>
+          <a:lstStyle>
+            <a:lvl1pPr algn="just">
+              <a:buClr>
+                <a:srgbClr val="1E3D7D"/>
+              </a:buClr>
+              <a:buFont typeface="Wingdings" panose="05000000000000000000" pitchFamily="2" charset="2"/>
+              <a:buChar char="§"/>
+              <a:defRPr>
+                <a:solidFill>
+                  <a:schemeClr val="tx1"/>
+                </a:solidFill>
+                <a:latin typeface="Calibri" panose="020F0502020204030204" pitchFamily="34" charset="0"/>
+              </a:defRPr>
+            </a:lvl1pPr>
+            <a:lvl2pPr marL="742950" indent="-285750" algn="just">
+              <a:buClr>
+                <a:srgbClr val="1E3D7D"/>
+              </a:buClr>
+              <a:buFont typeface="Courier New" panose="02070309020205020404" pitchFamily="49" charset="0"/>
+              <a:buChar char="o"/>
+              <a:defRPr>
+                <a:solidFill>
+                  <a:schemeClr val="tx1"/>
+                </a:solidFill>
+                <a:latin typeface="Calibri" panose="020F0502020204030204" pitchFamily="34" charset="0"/>
+              </a:defRPr>
+            </a:lvl2pPr>
+            <a:lvl3pPr marL="1143000" indent="-228600" algn="just">
+              <a:buClr>
+                <a:srgbClr val="1E3D7D"/>
+              </a:buClr>
+              <a:buFont typeface="Arial" panose="020B0604020202020204" pitchFamily="34" charset="0"/>
+              <a:buChar char="•"/>
+              <a:defRPr>
+                <a:solidFill>
+                  <a:schemeClr val="tx1"/>
+                </a:solidFill>
+                <a:latin typeface="Calibri" panose="020F0502020204030204" pitchFamily="34" charset="0"/>
+              </a:defRPr>
+            </a:lvl3pPr>
+            <a:lvl4pPr marL="1600200" indent="-228600" algn="just">
+              <a:buClr>
+                <a:srgbClr val="1E3D7D"/>
+              </a:buClr>
+              <a:buFont typeface="Arial" panose="020B0604020202020204" pitchFamily="34" charset="0"/>
+              <a:buChar char="•"/>
+              <a:defRPr>
+                <a:solidFill>
+                  <a:schemeClr val="tx1"/>
+                </a:solidFill>
+                <a:latin typeface="Calibri" panose="020F0502020204030204" pitchFamily="34" charset="0"/>
+              </a:defRPr>
+            </a:lvl4pPr>
+            <a:lvl5pPr marL="2057400" indent="-228600" algn="just">
+              <a:buClr>
+                <a:srgbClr val="1E3D7D"/>
+              </a:buClr>
+              <a:buFont typeface="Arial" panose="020B0604020202020204" pitchFamily="34" charset="0"/>
+              <a:buChar char="•"/>
+              <a:defRPr>
+                <a:solidFill>
+                  <a:schemeClr val="tx1"/>
+                </a:solidFill>
+                <a:latin typeface="Calibri" panose="020F0502020204030204" pitchFamily="34" charset="0"/>
+              </a:defRPr>
+            </a:lvl5pPr>
+            <a:lvl6pPr marL="2514600" indent="-228600" algn="just" eaLnBrk="0" fontAlgn="base" hangingPunct="0">
+              <a:spcBef>
+                <a:spcPct val="0"/>
+              </a:spcBef>
+              <a:spcAft>
+                <a:spcPct val="0"/>
+              </a:spcAft>
+              <a:buClr>
+                <a:srgbClr val="1E3D7D"/>
+              </a:buClr>
+              <a:buFont typeface="Arial" panose="020B0604020202020204" pitchFamily="34" charset="0"/>
+              <a:buChar char="•"/>
+              <a:defRPr>
+                <a:solidFill>
+                  <a:schemeClr val="tx1"/>
+                </a:solidFill>
+                <a:latin typeface="Calibri" panose="020F0502020204030204" pitchFamily="34" charset="0"/>
+              </a:defRPr>
+            </a:lvl6pPr>
+            <a:lvl7pPr marL="2971800" indent="-228600" algn="just" eaLnBrk="0" fontAlgn="base" hangingPunct="0">
+              <a:spcBef>
+                <a:spcPct val="0"/>
+              </a:spcBef>
+              <a:spcAft>
+                <a:spcPct val="0"/>
+              </a:spcAft>
+              <a:buClr>
+                <a:srgbClr val="1E3D7D"/>
+              </a:buClr>
+              <a:buFont typeface="Arial" panose="020B0604020202020204" pitchFamily="34" charset="0"/>
+              <a:buChar char="•"/>
+              <a:defRPr>
+                <a:solidFill>
+                  <a:schemeClr val="tx1"/>
+                </a:solidFill>
+                <a:latin typeface="Calibri" panose="020F0502020204030204" pitchFamily="34" charset="0"/>
+              </a:defRPr>
+            </a:lvl7pPr>
+            <a:lvl8pPr marL="3429000" indent="-228600" algn="just" eaLnBrk="0" fontAlgn="base" hangingPunct="0">
+              <a:spcBef>
+                <a:spcPct val="0"/>
+              </a:spcBef>
+              <a:spcAft>
+                <a:spcPct val="0"/>
+              </a:spcAft>
+              <a:buClr>
+                <a:srgbClr val="1E3D7D"/>
+              </a:buClr>
+              <a:buFont typeface="Arial" panose="020B0604020202020204" pitchFamily="34" charset="0"/>
+              <a:buChar char="•"/>
+              <a:defRPr>
+                <a:solidFill>
+                  <a:schemeClr val="tx1"/>
+                </a:solidFill>
+                <a:latin typeface="Calibri" panose="020F0502020204030204" pitchFamily="34" charset="0"/>
+              </a:defRPr>
+            </a:lvl8pPr>
+            <a:lvl9pPr marL="3886200" indent="-228600" algn="just" eaLnBrk="0" fontAlgn="base" hangingPunct="0">
+              <a:spcBef>
+                <a:spcPct val="0"/>
+              </a:spcBef>
+              <a:spcAft>
+                <a:spcPct val="0"/>
+              </a:spcAft>
+              <a:buClr>
+                <a:srgbClr val="1E3D7D"/>
+              </a:buClr>
+              <a:buFont typeface="Arial" panose="020B0604020202020204" pitchFamily="34" charset="0"/>
+              <a:buChar char="•"/>
+              <a:defRPr>
+                <a:solidFill>
+                  <a:schemeClr val="tx1"/>
+                </a:solidFill>
+                <a:latin typeface="Calibri" panose="020F0502020204030204" pitchFamily="34" charset="0"/>
+              </a:defRPr>
+            </a:lvl9pPr>
+          </a:lstStyle>
+          <a:p>
+            <a:pPr algn="ctr" eaLnBrk="1" hangingPunct="1">
+              <a:buClrTx/>
+              <a:buFontTx/>
+              <a:buNone/>
+            </a:pPr>
+            <a:r>
+              <a:rPr lang="en-US" altLang="en-US" sz="1400" dirty="0">
+                <a:latin typeface="+mn-lt"/>
+                <a:ea typeface="Verdana" panose="020B0604030504040204" pitchFamily="34" charset="0"/>
+                <a:cs typeface="Verdana" panose="020B0604030504040204" pitchFamily="34" charset="0"/>
+              </a:rPr>
+              <a:t>Name Candidate</a:t>
+            </a:r>
+          </a:p>
+        </p:txBody>
+      </p:sp>
+      <p:sp>
+        <p:nvSpPr>
+          <p:cNvPr id="54" name="TextBox 1">
+            <a:extLst>
+              <a:ext uri="{FF2B5EF4-FFF2-40B4-BE49-F238E27FC236}">
+                <a16:creationId xmlns:a16="http://schemas.microsoft.com/office/drawing/2014/main" id="{8E2330C6-0E4D-BC05-58BE-9857203262F5}"/>
+              </a:ext>
+            </a:extLst>
+          </p:cNvPr>
+          <p:cNvSpPr txBox="1">
+            <a:spLocks noChangeArrowheads="1"/>
+          </p:cNvSpPr>
+          <p:nvPr/>
+        </p:nvSpPr>
+        <p:spPr bwMode="auto">
+          <a:xfrm>
+            <a:off x="6436389" y="4424177"/>
+            <a:ext cx="1400961" cy="307777"/>
+          </a:xfrm>
+          <a:prstGeom prst="rect">
+            <a:avLst/>
+          </a:prstGeom>
+          <a:noFill/>
+          <a:ln>
+            <a:noFill/>
+          </a:ln>
+          <a:extLst>
+            <a:ext uri="{909E8E84-426E-40DD-AFC4-6F175D3DCCD1}">
+              <a14:hiddenFill xmlns:a14="http://schemas.microsoft.com/office/drawing/2010/main">
+                <a:solidFill>
+                  <a:srgbClr val="FFFFFF"/>
+                </a:solidFill>
+              </a14:hiddenFill>
+            </a:ext>
+            <a:ext uri="{91240B29-F687-4F45-9708-019B960494DF}">
+              <a14:hiddenLine xmlns:a14="http://schemas.microsoft.com/office/drawing/2010/main" w="9525">
+                <a:solidFill>
+                  <a:srgbClr val="000000"/>
+                </a:solidFill>
+                <a:miter lim="800000"/>
+                <a:headEnd/>
+                <a:tailEnd/>
+              </a14:hiddenLine>
+            </a:ext>
+          </a:extLst>
+        </p:spPr>
+        <p:txBody>
+          <a:bodyPr wrap="none">
+            <a:spAutoFit/>
+          </a:bodyPr>
+          <a:lstStyle>
+            <a:lvl1pPr algn="just">
+              <a:buClr>
+                <a:srgbClr val="1E3D7D"/>
+              </a:buClr>
+              <a:buFont typeface="Wingdings" panose="05000000000000000000" pitchFamily="2" charset="2"/>
+              <a:buChar char="§"/>
+              <a:defRPr>
+                <a:solidFill>
+                  <a:schemeClr val="tx1"/>
+                </a:solidFill>
+                <a:latin typeface="Calibri" panose="020F0502020204030204" pitchFamily="34" charset="0"/>
+              </a:defRPr>
+            </a:lvl1pPr>
+            <a:lvl2pPr marL="742950" indent="-285750" algn="just">
+              <a:buClr>
+                <a:srgbClr val="1E3D7D"/>
+              </a:buClr>
+              <a:buFont typeface="Courier New" panose="02070309020205020404" pitchFamily="49" charset="0"/>
+              <a:buChar char="o"/>
+              <a:defRPr>
+                <a:solidFill>
+                  <a:schemeClr val="tx1"/>
+                </a:solidFill>
+                <a:latin typeface="Calibri" panose="020F0502020204030204" pitchFamily="34" charset="0"/>
+              </a:defRPr>
+            </a:lvl2pPr>
+            <a:lvl3pPr marL="1143000" indent="-228600" algn="just">
+              <a:buClr>
+                <a:srgbClr val="1E3D7D"/>
+              </a:buClr>
+              <a:buFont typeface="Arial" panose="020B0604020202020204" pitchFamily="34" charset="0"/>
+              <a:buChar char="•"/>
+              <a:defRPr>
+                <a:solidFill>
+                  <a:schemeClr val="tx1"/>
+                </a:solidFill>
+                <a:latin typeface="Calibri" panose="020F0502020204030204" pitchFamily="34" charset="0"/>
+              </a:defRPr>
+            </a:lvl3pPr>
+            <a:lvl4pPr marL="1600200" indent="-228600" algn="just">
+              <a:buClr>
+                <a:srgbClr val="1E3D7D"/>
+              </a:buClr>
+              <a:buFont typeface="Arial" panose="020B0604020202020204" pitchFamily="34" charset="0"/>
+              <a:buChar char="•"/>
+              <a:defRPr>
+                <a:solidFill>
+                  <a:schemeClr val="tx1"/>
+                </a:solidFill>
+                <a:latin typeface="Calibri" panose="020F0502020204030204" pitchFamily="34" charset="0"/>
+              </a:defRPr>
+            </a:lvl4pPr>
+            <a:lvl5pPr marL="2057400" indent="-228600" algn="just">
+              <a:buClr>
+                <a:srgbClr val="1E3D7D"/>
+              </a:buClr>
+              <a:buFont typeface="Arial" panose="020B0604020202020204" pitchFamily="34" charset="0"/>
+              <a:buChar char="•"/>
+              <a:defRPr>
+                <a:solidFill>
+                  <a:schemeClr val="tx1"/>
+                </a:solidFill>
+                <a:latin typeface="Calibri" panose="020F0502020204030204" pitchFamily="34" charset="0"/>
+              </a:defRPr>
+            </a:lvl5pPr>
+            <a:lvl6pPr marL="2514600" indent="-228600" algn="just" eaLnBrk="0" fontAlgn="base" hangingPunct="0">
+              <a:spcBef>
+                <a:spcPct val="0"/>
+              </a:spcBef>
+              <a:spcAft>
+                <a:spcPct val="0"/>
+              </a:spcAft>
+              <a:buClr>
+                <a:srgbClr val="1E3D7D"/>
+              </a:buClr>
+              <a:buFont typeface="Arial" panose="020B0604020202020204" pitchFamily="34" charset="0"/>
+              <a:buChar char="•"/>
+              <a:defRPr>
+                <a:solidFill>
+                  <a:schemeClr val="tx1"/>
+                </a:solidFill>
+                <a:latin typeface="Calibri" panose="020F0502020204030204" pitchFamily="34" charset="0"/>
+              </a:defRPr>
+            </a:lvl6pPr>
+            <a:lvl7pPr marL="2971800" indent="-228600" algn="just" eaLnBrk="0" fontAlgn="base" hangingPunct="0">
+              <a:spcBef>
+                <a:spcPct val="0"/>
+              </a:spcBef>
+              <a:spcAft>
+                <a:spcPct val="0"/>
+              </a:spcAft>
+              <a:buClr>
+                <a:srgbClr val="1E3D7D"/>
+              </a:buClr>
+              <a:buFont typeface="Arial" panose="020B0604020202020204" pitchFamily="34" charset="0"/>
+              <a:buChar char="•"/>
+              <a:defRPr>
+                <a:solidFill>
+                  <a:schemeClr val="tx1"/>
+                </a:solidFill>
+                <a:latin typeface="Calibri" panose="020F0502020204030204" pitchFamily="34" charset="0"/>
+              </a:defRPr>
+            </a:lvl7pPr>
+            <a:lvl8pPr marL="3429000" indent="-228600" algn="just" eaLnBrk="0" fontAlgn="base" hangingPunct="0">
+              <a:spcBef>
+                <a:spcPct val="0"/>
+              </a:spcBef>
+              <a:spcAft>
+                <a:spcPct val="0"/>
+              </a:spcAft>
+              <a:buClr>
+                <a:srgbClr val="1E3D7D"/>
+              </a:buClr>
+              <a:buFont typeface="Arial" panose="020B0604020202020204" pitchFamily="34" charset="0"/>
+              <a:buChar char="•"/>
+              <a:defRPr>
+                <a:solidFill>
+                  <a:schemeClr val="tx1"/>
+                </a:solidFill>
+                <a:latin typeface="Calibri" panose="020F0502020204030204" pitchFamily="34" charset="0"/>
+              </a:defRPr>
+            </a:lvl8pPr>
+            <a:lvl9pPr marL="3886200" indent="-228600" algn="just" eaLnBrk="0" fontAlgn="base" hangingPunct="0">
+              <a:spcBef>
+                <a:spcPct val="0"/>
+              </a:spcBef>
+              <a:spcAft>
+                <a:spcPct val="0"/>
+              </a:spcAft>
+              <a:buClr>
+                <a:srgbClr val="1E3D7D"/>
+              </a:buClr>
+              <a:buFont typeface="Arial" panose="020B0604020202020204" pitchFamily="34" charset="0"/>
+              <a:buChar char="•"/>
+              <a:defRPr>
+                <a:solidFill>
+                  <a:schemeClr val="tx1"/>
+                </a:solidFill>
+                <a:latin typeface="Calibri" panose="020F0502020204030204" pitchFamily="34" charset="0"/>
+              </a:defRPr>
+            </a:lvl9pPr>
+          </a:lstStyle>
+          <a:p>
+            <a:pPr algn="ctr" eaLnBrk="1" hangingPunct="1">
+              <a:buClrTx/>
+              <a:buFontTx/>
+              <a:buNone/>
+            </a:pPr>
+            <a:r>
+              <a:rPr lang="en-US" altLang="en-US" sz="1400" dirty="0">
+                <a:latin typeface="+mn-lt"/>
+                <a:ea typeface="Verdana" panose="020B0604030504040204" pitchFamily="34" charset="0"/>
+                <a:cs typeface="Verdana" panose="020B0604030504040204" pitchFamily="34" charset="0"/>
+              </a:rPr>
+              <a:t>Name Candidate</a:t>
+            </a:r>
+          </a:p>
+        </p:txBody>
+      </p:sp>
+      <p:sp>
+        <p:nvSpPr>
+          <p:cNvPr id="55" name="Rectangle 54">
+            <a:extLst>
+              <a:ext uri="{FF2B5EF4-FFF2-40B4-BE49-F238E27FC236}">
+                <a16:creationId xmlns:a16="http://schemas.microsoft.com/office/drawing/2014/main" id="{289F1A6F-9BAD-7298-7D24-278AF23F5AF2}"/>
+              </a:ext>
+            </a:extLst>
+          </p:cNvPr>
+          <p:cNvSpPr/>
+          <p:nvPr/>
+        </p:nvSpPr>
+        <p:spPr>
+          <a:xfrm>
+            <a:off x="6196315" y="1156170"/>
+            <a:ext cx="137160" cy="137160"/>
+          </a:xfrm>
+          <a:prstGeom prst="rect">
+            <a:avLst/>
+          </a:prstGeom>
+          <a:noFill/>
+          <a:ln>
+            <a:solidFill>
+              <a:schemeClr val="tx1"/>
+            </a:solidFill>
+          </a:ln>
+          <a:effectLst>
+            <a:outerShdw blurRad="44450" dist="27940" dir="5400000" algn="ctr">
+              <a:srgbClr val="000000">
+                <a:alpha val="32000"/>
+              </a:srgbClr>
+            </a:outerShdw>
+          </a:effectLst>
+          <a:scene3d>
+            <a:camera prst="orthographicFront">
+              <a:rot lat="0" lon="0" rev="0"/>
+            </a:camera>
+            <a:lightRig rig="balanced" dir="t">
+              <a:rot lat="0" lon="0" rev="8700000"/>
+            </a:lightRig>
+          </a:scene3d>
+          <a:sp3d>
+            <a:bevelT w="190500" h="38100"/>
+          </a:sp3d>
+        </p:spPr>
+        <p:style>
+          <a:lnRef idx="2">
+            <a:schemeClr val="accent1">
+              <a:shade val="15000"/>
+            </a:schemeClr>
+          </a:lnRef>
+          <a:fillRef idx="1">
+            <a:schemeClr val="accent1"/>
+          </a:fillRef>
+          <a:effectRef idx="0">
+            <a:schemeClr val="accent1"/>
+          </a:effectRef>
+          <a:fontRef idx="minor">
+            <a:schemeClr val="lt1"/>
+          </a:fontRef>
+        </p:style>
+        <p:txBody>
+          <a:bodyPr rtlCol="0" anchor="ctr"/>
+          <a:lstStyle/>
+          <a:p>
+            <a:pPr algn="ctr"/>
+            <a:endParaRPr lang="en-US" sz="1400"/>
+          </a:p>
+        </p:txBody>
+      </p:sp>
+      <p:sp>
+        <p:nvSpPr>
+          <p:cNvPr id="56" name="Rectangle 55">
+            <a:extLst>
+              <a:ext uri="{FF2B5EF4-FFF2-40B4-BE49-F238E27FC236}">
+                <a16:creationId xmlns:a16="http://schemas.microsoft.com/office/drawing/2014/main" id="{6CFE0E46-90B3-6E5D-EF56-98FC7CE40483}"/>
+              </a:ext>
+            </a:extLst>
+          </p:cNvPr>
+          <p:cNvSpPr/>
+          <p:nvPr/>
+        </p:nvSpPr>
+        <p:spPr>
+          <a:xfrm>
+            <a:off x="6196315" y="1991364"/>
+            <a:ext cx="137160" cy="137160"/>
+          </a:xfrm>
+          <a:prstGeom prst="rect">
+            <a:avLst/>
+          </a:prstGeom>
+          <a:noFill/>
+          <a:ln>
+            <a:solidFill>
+              <a:schemeClr val="tx1"/>
+            </a:solidFill>
+          </a:ln>
+          <a:effectLst>
+            <a:outerShdw blurRad="44450" dist="27940" dir="5400000" algn="ctr">
+              <a:srgbClr val="000000">
+                <a:alpha val="32000"/>
+              </a:srgbClr>
+            </a:outerShdw>
+          </a:effectLst>
+          <a:scene3d>
+            <a:camera prst="orthographicFront">
+              <a:rot lat="0" lon="0" rev="0"/>
+            </a:camera>
+            <a:lightRig rig="balanced" dir="t">
+              <a:rot lat="0" lon="0" rev="8700000"/>
+            </a:lightRig>
+          </a:scene3d>
+          <a:sp3d>
+            <a:bevelT w="190500" h="38100"/>
+          </a:sp3d>
+        </p:spPr>
+        <p:style>
+          <a:lnRef idx="2">
+            <a:schemeClr val="accent1">
+              <a:shade val="15000"/>
+            </a:schemeClr>
+          </a:lnRef>
+          <a:fillRef idx="1">
+            <a:schemeClr val="accent1"/>
+          </a:fillRef>
+          <a:effectRef idx="0">
+            <a:schemeClr val="accent1"/>
+          </a:effectRef>
+          <a:fontRef idx="minor">
+            <a:schemeClr val="lt1"/>
+          </a:fontRef>
+        </p:style>
+        <p:txBody>
+          <a:bodyPr rtlCol="0" anchor="ctr"/>
+          <a:lstStyle/>
+          <a:p>
+            <a:pPr algn="ctr"/>
+            <a:endParaRPr lang="en-US" sz="1400"/>
+          </a:p>
+        </p:txBody>
+      </p:sp>
+      <p:sp>
+        <p:nvSpPr>
+          <p:cNvPr id="57" name="Rectangle 56">
+            <a:extLst>
+              <a:ext uri="{FF2B5EF4-FFF2-40B4-BE49-F238E27FC236}">
+                <a16:creationId xmlns:a16="http://schemas.microsoft.com/office/drawing/2014/main" id="{AC75D118-35D3-BC9D-B517-7B76375F2399}"/>
+              </a:ext>
+            </a:extLst>
+          </p:cNvPr>
+          <p:cNvSpPr/>
+          <p:nvPr/>
+        </p:nvSpPr>
+        <p:spPr>
+          <a:xfrm>
+            <a:off x="6201502" y="2807418"/>
+            <a:ext cx="137160" cy="137160"/>
+          </a:xfrm>
+          <a:prstGeom prst="rect">
+            <a:avLst/>
+          </a:prstGeom>
+          <a:noFill/>
+          <a:ln>
+            <a:solidFill>
+              <a:schemeClr val="tx1"/>
+            </a:solidFill>
+          </a:ln>
+          <a:effectLst>
+            <a:outerShdw blurRad="44450" dist="27940" dir="5400000" algn="ctr">
+              <a:srgbClr val="000000">
+                <a:alpha val="32000"/>
+              </a:srgbClr>
+            </a:outerShdw>
+          </a:effectLst>
+          <a:scene3d>
+            <a:camera prst="orthographicFront">
+              <a:rot lat="0" lon="0" rev="0"/>
+            </a:camera>
+            <a:lightRig rig="balanced" dir="t">
+              <a:rot lat="0" lon="0" rev="8700000"/>
+            </a:lightRig>
+          </a:scene3d>
+          <a:sp3d>
+            <a:bevelT w="190500" h="38100"/>
+          </a:sp3d>
+        </p:spPr>
+        <p:style>
+          <a:lnRef idx="2">
+            <a:schemeClr val="accent1">
+              <a:shade val="15000"/>
+            </a:schemeClr>
+          </a:lnRef>
+          <a:fillRef idx="1">
+            <a:schemeClr val="accent1"/>
+          </a:fillRef>
+          <a:effectRef idx="0">
+            <a:schemeClr val="accent1"/>
+          </a:effectRef>
+          <a:fontRef idx="minor">
+            <a:schemeClr val="lt1"/>
+          </a:fontRef>
+        </p:style>
+        <p:txBody>
+          <a:bodyPr rtlCol="0" anchor="ctr"/>
+          <a:lstStyle/>
+          <a:p>
+            <a:pPr algn="ctr"/>
+            <a:endParaRPr lang="en-US" sz="1400"/>
+          </a:p>
+        </p:txBody>
+      </p:sp>
+      <p:sp>
+        <p:nvSpPr>
+          <p:cNvPr id="58" name="Rectangle 57">
+            <a:extLst>
+              <a:ext uri="{FF2B5EF4-FFF2-40B4-BE49-F238E27FC236}">
+                <a16:creationId xmlns:a16="http://schemas.microsoft.com/office/drawing/2014/main" id="{2E44BA8E-0C88-C1AB-C864-5D4CB5470285}"/>
+              </a:ext>
+            </a:extLst>
+          </p:cNvPr>
+          <p:cNvSpPr/>
+          <p:nvPr/>
+        </p:nvSpPr>
+        <p:spPr>
+          <a:xfrm>
+            <a:off x="6204989" y="3659017"/>
+            <a:ext cx="137160" cy="137160"/>
+          </a:xfrm>
+          <a:prstGeom prst="rect">
+            <a:avLst/>
+          </a:prstGeom>
+          <a:noFill/>
+          <a:ln>
+            <a:solidFill>
+              <a:schemeClr val="tx1"/>
+            </a:solidFill>
+          </a:ln>
+          <a:effectLst>
+            <a:outerShdw blurRad="44450" dist="27940" dir="5400000" algn="ctr">
+              <a:srgbClr val="000000">
+                <a:alpha val="32000"/>
+              </a:srgbClr>
+            </a:outerShdw>
+          </a:effectLst>
+          <a:scene3d>
+            <a:camera prst="orthographicFront">
+              <a:rot lat="0" lon="0" rev="0"/>
+            </a:camera>
+            <a:lightRig rig="balanced" dir="t">
+              <a:rot lat="0" lon="0" rev="8700000"/>
+            </a:lightRig>
+          </a:scene3d>
+          <a:sp3d>
+            <a:bevelT w="190500" h="38100"/>
+          </a:sp3d>
+        </p:spPr>
+        <p:style>
+          <a:lnRef idx="2">
+            <a:schemeClr val="accent1">
+              <a:shade val="15000"/>
+            </a:schemeClr>
+          </a:lnRef>
+          <a:fillRef idx="1">
+            <a:schemeClr val="accent1"/>
+          </a:fillRef>
+          <a:effectRef idx="0">
+            <a:schemeClr val="accent1"/>
+          </a:effectRef>
+          <a:fontRef idx="minor">
+            <a:schemeClr val="lt1"/>
+          </a:fontRef>
+        </p:style>
+        <p:txBody>
+          <a:bodyPr rtlCol="0" anchor="ctr"/>
+          <a:lstStyle/>
+          <a:p>
+            <a:pPr algn="ctr"/>
+            <a:endParaRPr lang="en-US" sz="1400"/>
+          </a:p>
+        </p:txBody>
+      </p:sp>
+      <p:sp>
+        <p:nvSpPr>
+          <p:cNvPr id="59" name="Rectangle 58">
+            <a:extLst>
+              <a:ext uri="{FF2B5EF4-FFF2-40B4-BE49-F238E27FC236}">
+                <a16:creationId xmlns:a16="http://schemas.microsoft.com/office/drawing/2014/main" id="{2BA53148-EABE-BFB0-E543-827B444C4720}"/>
+              </a:ext>
+            </a:extLst>
+          </p:cNvPr>
+          <p:cNvSpPr/>
+          <p:nvPr/>
+        </p:nvSpPr>
+        <p:spPr>
+          <a:xfrm>
+            <a:off x="6204989" y="4494097"/>
+            <a:ext cx="137160" cy="137160"/>
+          </a:xfrm>
+          <a:prstGeom prst="rect">
+            <a:avLst/>
+          </a:prstGeom>
+          <a:noFill/>
+          <a:ln>
+            <a:solidFill>
+              <a:schemeClr val="tx1"/>
+            </a:solidFill>
+          </a:ln>
+          <a:effectLst>
+            <a:outerShdw blurRad="44450" dist="27940" dir="5400000" algn="ctr">
+              <a:srgbClr val="000000">
+                <a:alpha val="32000"/>
+              </a:srgbClr>
+            </a:outerShdw>
+          </a:effectLst>
+          <a:scene3d>
+            <a:camera prst="orthographicFront">
+              <a:rot lat="0" lon="0" rev="0"/>
+            </a:camera>
+            <a:lightRig rig="balanced" dir="t">
+              <a:rot lat="0" lon="0" rev="8700000"/>
+            </a:lightRig>
+          </a:scene3d>
+          <a:sp3d>
+            <a:bevelT w="190500" h="38100"/>
+          </a:sp3d>
+        </p:spPr>
+        <p:style>
+          <a:lnRef idx="2">
+            <a:schemeClr val="accent1">
+              <a:shade val="15000"/>
+            </a:schemeClr>
+          </a:lnRef>
+          <a:fillRef idx="1">
+            <a:schemeClr val="accent1"/>
+          </a:fillRef>
+          <a:effectRef idx="0">
+            <a:schemeClr val="accent1"/>
+          </a:effectRef>
+          <a:fontRef idx="minor">
+            <a:schemeClr val="lt1"/>
+          </a:fontRef>
+        </p:style>
+        <p:txBody>
+          <a:bodyPr rtlCol="0" anchor="ctr"/>
+          <a:lstStyle/>
+          <a:p>
+            <a:pPr algn="ctr"/>
+            <a:endParaRPr lang="en-US" sz="1400"/>
+          </a:p>
+        </p:txBody>
+      </p:sp>
+      <p:sp>
+        <p:nvSpPr>
+          <p:cNvPr id="60" name="TextBox 1">
+            <a:extLst>
+              <a:ext uri="{FF2B5EF4-FFF2-40B4-BE49-F238E27FC236}">
+                <a16:creationId xmlns:a16="http://schemas.microsoft.com/office/drawing/2014/main" id="{D72D7121-759F-E9F5-C263-C51D9B67A61D}"/>
+              </a:ext>
+            </a:extLst>
+          </p:cNvPr>
+          <p:cNvSpPr txBox="1">
+            <a:spLocks noChangeArrowheads="1"/>
+          </p:cNvSpPr>
+          <p:nvPr/>
+        </p:nvSpPr>
+        <p:spPr bwMode="auto">
+          <a:xfrm>
+            <a:off x="6428692" y="1500492"/>
+            <a:ext cx="1400961" cy="307777"/>
+          </a:xfrm>
+          <a:prstGeom prst="rect">
+            <a:avLst/>
+          </a:prstGeom>
+          <a:noFill/>
+          <a:ln>
+            <a:noFill/>
+          </a:ln>
+          <a:extLst>
+            <a:ext uri="{909E8E84-426E-40DD-AFC4-6F175D3DCCD1}">
+              <a14:hiddenFill xmlns:a14="http://schemas.microsoft.com/office/drawing/2010/main">
+                <a:solidFill>
+                  <a:srgbClr val="FFFFFF"/>
+                </a:solidFill>
+              </a14:hiddenFill>
+            </a:ext>
+            <a:ext uri="{91240B29-F687-4F45-9708-019B960494DF}">
+              <a14:hiddenLine xmlns:a14="http://schemas.microsoft.com/office/drawing/2010/main" w="9525">
+                <a:solidFill>
+                  <a:srgbClr val="000000"/>
+                </a:solidFill>
+                <a:miter lim="800000"/>
+                <a:headEnd/>
+                <a:tailEnd/>
+              </a14:hiddenLine>
+            </a:ext>
+          </a:extLst>
+        </p:spPr>
+        <p:txBody>
+          <a:bodyPr wrap="none">
+            <a:spAutoFit/>
+          </a:bodyPr>
+          <a:lstStyle>
+            <a:lvl1pPr algn="just">
+              <a:buClr>
+                <a:srgbClr val="1E3D7D"/>
+              </a:buClr>
+              <a:buFont typeface="Wingdings" panose="05000000000000000000" pitchFamily="2" charset="2"/>
+              <a:buChar char="§"/>
+              <a:defRPr>
+                <a:solidFill>
+                  <a:schemeClr val="tx1"/>
+                </a:solidFill>
+                <a:latin typeface="Calibri" panose="020F0502020204030204" pitchFamily="34" charset="0"/>
+              </a:defRPr>
+            </a:lvl1pPr>
+            <a:lvl2pPr marL="742950" indent="-285750" algn="just">
+              <a:buClr>
+                <a:srgbClr val="1E3D7D"/>
+              </a:buClr>
+              <a:buFont typeface="Courier New" panose="02070309020205020404" pitchFamily="49" charset="0"/>
+              <a:buChar char="o"/>
+              <a:defRPr>
+                <a:solidFill>
+                  <a:schemeClr val="tx1"/>
+                </a:solidFill>
+                <a:latin typeface="Calibri" panose="020F0502020204030204" pitchFamily="34" charset="0"/>
+              </a:defRPr>
+            </a:lvl2pPr>
+            <a:lvl3pPr marL="1143000" indent="-228600" algn="just">
+              <a:buClr>
+                <a:srgbClr val="1E3D7D"/>
+              </a:buClr>
+              <a:buFont typeface="Arial" panose="020B0604020202020204" pitchFamily="34" charset="0"/>
+              <a:buChar char="•"/>
+              <a:defRPr>
+                <a:solidFill>
+                  <a:schemeClr val="tx1"/>
+                </a:solidFill>
+                <a:latin typeface="Calibri" panose="020F0502020204030204" pitchFamily="34" charset="0"/>
+              </a:defRPr>
+            </a:lvl3pPr>
+            <a:lvl4pPr marL="1600200" indent="-228600" algn="just">
+              <a:buClr>
+                <a:srgbClr val="1E3D7D"/>
+              </a:buClr>
+              <a:buFont typeface="Arial" panose="020B0604020202020204" pitchFamily="34" charset="0"/>
+              <a:buChar char="•"/>
+              <a:defRPr>
+                <a:solidFill>
+                  <a:schemeClr val="tx1"/>
+                </a:solidFill>
+                <a:latin typeface="Calibri" panose="020F0502020204030204" pitchFamily="34" charset="0"/>
+              </a:defRPr>
+            </a:lvl4pPr>
+            <a:lvl5pPr marL="2057400" indent="-228600" algn="just">
+              <a:buClr>
+                <a:srgbClr val="1E3D7D"/>
+              </a:buClr>
+              <a:buFont typeface="Arial" panose="020B0604020202020204" pitchFamily="34" charset="0"/>
+              <a:buChar char="•"/>
+              <a:defRPr>
+                <a:solidFill>
+                  <a:schemeClr val="tx1"/>
+                </a:solidFill>
+                <a:latin typeface="Calibri" panose="020F0502020204030204" pitchFamily="34" charset="0"/>
+              </a:defRPr>
+            </a:lvl5pPr>
+            <a:lvl6pPr marL="2514600" indent="-228600" algn="just" eaLnBrk="0" fontAlgn="base" hangingPunct="0">
+              <a:spcBef>
+                <a:spcPct val="0"/>
+              </a:spcBef>
+              <a:spcAft>
+                <a:spcPct val="0"/>
+              </a:spcAft>
+              <a:buClr>
+                <a:srgbClr val="1E3D7D"/>
+              </a:buClr>
+              <a:buFont typeface="Arial" panose="020B0604020202020204" pitchFamily="34" charset="0"/>
+              <a:buChar char="•"/>
+              <a:defRPr>
+                <a:solidFill>
+                  <a:schemeClr val="tx1"/>
+                </a:solidFill>
+                <a:latin typeface="Calibri" panose="020F0502020204030204" pitchFamily="34" charset="0"/>
+              </a:defRPr>
+            </a:lvl6pPr>
+            <a:lvl7pPr marL="2971800" indent="-228600" algn="just" eaLnBrk="0" fontAlgn="base" hangingPunct="0">
+              <a:spcBef>
+                <a:spcPct val="0"/>
+              </a:spcBef>
+              <a:spcAft>
+                <a:spcPct val="0"/>
+              </a:spcAft>
+              <a:buClr>
+                <a:srgbClr val="1E3D7D"/>
+              </a:buClr>
+              <a:buFont typeface="Arial" panose="020B0604020202020204" pitchFamily="34" charset="0"/>
+              <a:buChar char="•"/>
+              <a:defRPr>
+                <a:solidFill>
+                  <a:schemeClr val="tx1"/>
+                </a:solidFill>
+                <a:latin typeface="Calibri" panose="020F0502020204030204" pitchFamily="34" charset="0"/>
+              </a:defRPr>
+            </a:lvl7pPr>
+            <a:lvl8pPr marL="3429000" indent="-228600" algn="just" eaLnBrk="0" fontAlgn="base" hangingPunct="0">
+              <a:spcBef>
+                <a:spcPct val="0"/>
+              </a:spcBef>
+              <a:spcAft>
+                <a:spcPct val="0"/>
+              </a:spcAft>
+              <a:buClr>
+                <a:srgbClr val="1E3D7D"/>
+              </a:buClr>
+              <a:buFont typeface="Arial" panose="020B0604020202020204" pitchFamily="34" charset="0"/>
+              <a:buChar char="•"/>
+              <a:defRPr>
+                <a:solidFill>
+                  <a:schemeClr val="tx1"/>
+                </a:solidFill>
+                <a:latin typeface="Calibri" panose="020F0502020204030204" pitchFamily="34" charset="0"/>
+              </a:defRPr>
+            </a:lvl8pPr>
+            <a:lvl9pPr marL="3886200" indent="-228600" algn="just" eaLnBrk="0" fontAlgn="base" hangingPunct="0">
+              <a:spcBef>
+                <a:spcPct val="0"/>
+              </a:spcBef>
+              <a:spcAft>
+                <a:spcPct val="0"/>
+              </a:spcAft>
+              <a:buClr>
+                <a:srgbClr val="1E3D7D"/>
+              </a:buClr>
+              <a:buFont typeface="Arial" panose="020B0604020202020204" pitchFamily="34" charset="0"/>
+              <a:buChar char="•"/>
+              <a:defRPr>
+                <a:solidFill>
+                  <a:schemeClr val="tx1"/>
+                </a:solidFill>
+                <a:latin typeface="Calibri" panose="020F0502020204030204" pitchFamily="34" charset="0"/>
+              </a:defRPr>
+            </a:lvl9pPr>
+          </a:lstStyle>
+          <a:p>
+            <a:pPr algn="ctr" eaLnBrk="1" hangingPunct="1">
+              <a:buClrTx/>
+              <a:buFontTx/>
+              <a:buNone/>
+            </a:pPr>
+            <a:r>
+              <a:rPr lang="en-US" altLang="en-US" sz="1400" dirty="0">
+                <a:latin typeface="+mn-lt"/>
+                <a:ea typeface="Verdana" panose="020B0604030504040204" pitchFamily="34" charset="0"/>
+                <a:cs typeface="Verdana" panose="020B0604030504040204" pitchFamily="34" charset="0"/>
+              </a:rPr>
+              <a:t>Name Candidate</a:t>
+            </a:r>
+          </a:p>
+        </p:txBody>
+      </p:sp>
+      <p:sp>
+        <p:nvSpPr>
+          <p:cNvPr id="61" name="TextBox 1">
+            <a:extLst>
+              <a:ext uri="{FF2B5EF4-FFF2-40B4-BE49-F238E27FC236}">
+                <a16:creationId xmlns:a16="http://schemas.microsoft.com/office/drawing/2014/main" id="{7B4A49DF-699D-0D85-F463-C82C253C7AE7}"/>
+              </a:ext>
+            </a:extLst>
+          </p:cNvPr>
+          <p:cNvSpPr txBox="1">
+            <a:spLocks noChangeArrowheads="1"/>
+          </p:cNvSpPr>
+          <p:nvPr/>
+        </p:nvSpPr>
+        <p:spPr bwMode="auto">
+          <a:xfrm>
+            <a:off x="6428692" y="2343952"/>
+            <a:ext cx="1400961" cy="307777"/>
+          </a:xfrm>
+          <a:prstGeom prst="rect">
+            <a:avLst/>
+          </a:prstGeom>
+          <a:noFill/>
+          <a:ln>
+            <a:noFill/>
+          </a:ln>
+          <a:extLst>
+            <a:ext uri="{909E8E84-426E-40DD-AFC4-6F175D3DCCD1}">
+              <a14:hiddenFill xmlns:a14="http://schemas.microsoft.com/office/drawing/2010/main">
+                <a:solidFill>
+                  <a:srgbClr val="FFFFFF"/>
+                </a:solidFill>
+              </a14:hiddenFill>
+            </a:ext>
+            <a:ext uri="{91240B29-F687-4F45-9708-019B960494DF}">
+              <a14:hiddenLine xmlns:a14="http://schemas.microsoft.com/office/drawing/2010/main" w="9525">
+                <a:solidFill>
+                  <a:srgbClr val="000000"/>
+                </a:solidFill>
+                <a:miter lim="800000"/>
+                <a:headEnd/>
+                <a:tailEnd/>
+              </a14:hiddenLine>
+            </a:ext>
+          </a:extLst>
+        </p:spPr>
+        <p:txBody>
+          <a:bodyPr wrap="none">
+            <a:spAutoFit/>
+          </a:bodyPr>
+          <a:lstStyle>
+            <a:lvl1pPr algn="just">
+              <a:buClr>
+                <a:srgbClr val="1E3D7D"/>
+              </a:buClr>
+              <a:buFont typeface="Wingdings" panose="05000000000000000000" pitchFamily="2" charset="2"/>
+              <a:buChar char="§"/>
+              <a:defRPr>
+                <a:solidFill>
+                  <a:schemeClr val="tx1"/>
+                </a:solidFill>
+                <a:latin typeface="Calibri" panose="020F0502020204030204" pitchFamily="34" charset="0"/>
+              </a:defRPr>
+            </a:lvl1pPr>
+            <a:lvl2pPr marL="742950" indent="-285750" algn="just">
+              <a:buClr>
+                <a:srgbClr val="1E3D7D"/>
+              </a:buClr>
+              <a:buFont typeface="Courier New" panose="02070309020205020404" pitchFamily="49" charset="0"/>
+              <a:buChar char="o"/>
+              <a:defRPr>
+                <a:solidFill>
+                  <a:schemeClr val="tx1"/>
+                </a:solidFill>
+                <a:latin typeface="Calibri" panose="020F0502020204030204" pitchFamily="34" charset="0"/>
+              </a:defRPr>
+            </a:lvl2pPr>
+            <a:lvl3pPr marL="1143000" indent="-228600" algn="just">
+              <a:buClr>
+                <a:srgbClr val="1E3D7D"/>
+              </a:buClr>
+              <a:buFont typeface="Arial" panose="020B0604020202020204" pitchFamily="34" charset="0"/>
+              <a:buChar char="•"/>
+              <a:defRPr>
+                <a:solidFill>
+                  <a:schemeClr val="tx1"/>
+                </a:solidFill>
+                <a:latin typeface="Calibri" panose="020F0502020204030204" pitchFamily="34" charset="0"/>
+              </a:defRPr>
+            </a:lvl3pPr>
+            <a:lvl4pPr marL="1600200" indent="-228600" algn="just">
+              <a:buClr>
+                <a:srgbClr val="1E3D7D"/>
+              </a:buClr>
+              <a:buFont typeface="Arial" panose="020B0604020202020204" pitchFamily="34" charset="0"/>
+              <a:buChar char="•"/>
+              <a:defRPr>
+                <a:solidFill>
+                  <a:schemeClr val="tx1"/>
+                </a:solidFill>
+                <a:latin typeface="Calibri" panose="020F0502020204030204" pitchFamily="34" charset="0"/>
+              </a:defRPr>
+            </a:lvl4pPr>
+            <a:lvl5pPr marL="2057400" indent="-228600" algn="just">
+              <a:buClr>
+                <a:srgbClr val="1E3D7D"/>
+              </a:buClr>
+              <a:buFont typeface="Arial" panose="020B0604020202020204" pitchFamily="34" charset="0"/>
+              <a:buChar char="•"/>
+              <a:defRPr>
+                <a:solidFill>
+                  <a:schemeClr val="tx1"/>
+                </a:solidFill>
+                <a:latin typeface="Calibri" panose="020F0502020204030204" pitchFamily="34" charset="0"/>
+              </a:defRPr>
+            </a:lvl5pPr>
+            <a:lvl6pPr marL="2514600" indent="-228600" algn="just" eaLnBrk="0" fontAlgn="base" hangingPunct="0">
+              <a:spcBef>
+                <a:spcPct val="0"/>
+              </a:spcBef>
+              <a:spcAft>
+                <a:spcPct val="0"/>
+              </a:spcAft>
+              <a:buClr>
+                <a:srgbClr val="1E3D7D"/>
+              </a:buClr>
+              <a:buFont typeface="Arial" panose="020B0604020202020204" pitchFamily="34" charset="0"/>
+              <a:buChar char="•"/>
+              <a:defRPr>
+                <a:solidFill>
+                  <a:schemeClr val="tx1"/>
+                </a:solidFill>
+                <a:latin typeface="Calibri" panose="020F0502020204030204" pitchFamily="34" charset="0"/>
+              </a:defRPr>
+            </a:lvl6pPr>
+            <a:lvl7pPr marL="2971800" indent="-228600" algn="just" eaLnBrk="0" fontAlgn="base" hangingPunct="0">
+              <a:spcBef>
+                <a:spcPct val="0"/>
+              </a:spcBef>
+              <a:spcAft>
+                <a:spcPct val="0"/>
+              </a:spcAft>
+              <a:buClr>
+                <a:srgbClr val="1E3D7D"/>
+              </a:buClr>
+              <a:buFont typeface="Arial" panose="020B0604020202020204" pitchFamily="34" charset="0"/>
+              <a:buChar char="•"/>
+              <a:defRPr>
+                <a:solidFill>
+                  <a:schemeClr val="tx1"/>
+                </a:solidFill>
+                <a:latin typeface="Calibri" panose="020F0502020204030204" pitchFamily="34" charset="0"/>
+              </a:defRPr>
+            </a:lvl7pPr>
+            <a:lvl8pPr marL="3429000" indent="-228600" algn="just" eaLnBrk="0" fontAlgn="base" hangingPunct="0">
+              <a:spcBef>
+                <a:spcPct val="0"/>
+              </a:spcBef>
+              <a:spcAft>
+                <a:spcPct val="0"/>
+              </a:spcAft>
+              <a:buClr>
+                <a:srgbClr val="1E3D7D"/>
+              </a:buClr>
+              <a:buFont typeface="Arial" panose="020B0604020202020204" pitchFamily="34" charset="0"/>
+              <a:buChar char="•"/>
+              <a:defRPr>
+                <a:solidFill>
+                  <a:schemeClr val="tx1"/>
+                </a:solidFill>
+                <a:latin typeface="Calibri" panose="020F0502020204030204" pitchFamily="34" charset="0"/>
+              </a:defRPr>
+            </a:lvl8pPr>
+            <a:lvl9pPr marL="3886200" indent="-228600" algn="just" eaLnBrk="0" fontAlgn="base" hangingPunct="0">
+              <a:spcBef>
+                <a:spcPct val="0"/>
+              </a:spcBef>
+              <a:spcAft>
+                <a:spcPct val="0"/>
+              </a:spcAft>
+              <a:buClr>
+                <a:srgbClr val="1E3D7D"/>
+              </a:buClr>
+              <a:buFont typeface="Arial" panose="020B0604020202020204" pitchFamily="34" charset="0"/>
+              <a:buChar char="•"/>
+              <a:defRPr>
+                <a:solidFill>
+                  <a:schemeClr val="tx1"/>
+                </a:solidFill>
+                <a:latin typeface="Calibri" panose="020F0502020204030204" pitchFamily="34" charset="0"/>
+              </a:defRPr>
+            </a:lvl9pPr>
+          </a:lstStyle>
+          <a:p>
+            <a:pPr algn="ctr" eaLnBrk="1" hangingPunct="1">
+              <a:buClrTx/>
+              <a:buFontTx/>
+              <a:buNone/>
+            </a:pPr>
+            <a:r>
+              <a:rPr lang="en-US" altLang="en-US" sz="1400" dirty="0">
+                <a:latin typeface="+mn-lt"/>
+                <a:ea typeface="Verdana" panose="020B0604030504040204" pitchFamily="34" charset="0"/>
+                <a:cs typeface="Verdana" panose="020B0604030504040204" pitchFamily="34" charset="0"/>
+              </a:rPr>
+              <a:t>Name Candidate</a:t>
+            </a:r>
+          </a:p>
+        </p:txBody>
+      </p:sp>
+      <p:sp>
+        <p:nvSpPr>
+          <p:cNvPr id="62" name="TextBox 1">
+            <a:extLst>
+              <a:ext uri="{FF2B5EF4-FFF2-40B4-BE49-F238E27FC236}">
+                <a16:creationId xmlns:a16="http://schemas.microsoft.com/office/drawing/2014/main" id="{664D5160-E92C-A785-C9F9-9B3F44A1B549}"/>
+              </a:ext>
+            </a:extLst>
+          </p:cNvPr>
+          <p:cNvSpPr txBox="1">
+            <a:spLocks noChangeArrowheads="1"/>
+          </p:cNvSpPr>
+          <p:nvPr/>
+        </p:nvSpPr>
+        <p:spPr bwMode="auto">
+          <a:xfrm>
+            <a:off x="6436389" y="3170418"/>
+            <a:ext cx="1400961" cy="307777"/>
+          </a:xfrm>
+          <a:prstGeom prst="rect">
+            <a:avLst/>
+          </a:prstGeom>
+          <a:noFill/>
+          <a:ln>
+            <a:noFill/>
+          </a:ln>
+          <a:extLst>
+            <a:ext uri="{909E8E84-426E-40DD-AFC4-6F175D3DCCD1}">
+              <a14:hiddenFill xmlns:a14="http://schemas.microsoft.com/office/drawing/2010/main">
+                <a:solidFill>
+                  <a:srgbClr val="FFFFFF"/>
+                </a:solidFill>
+              </a14:hiddenFill>
+            </a:ext>
+            <a:ext uri="{91240B29-F687-4F45-9708-019B960494DF}">
+              <a14:hiddenLine xmlns:a14="http://schemas.microsoft.com/office/drawing/2010/main" w="9525">
+                <a:solidFill>
+                  <a:srgbClr val="000000"/>
+                </a:solidFill>
+                <a:miter lim="800000"/>
+                <a:headEnd/>
+                <a:tailEnd/>
+              </a14:hiddenLine>
+            </a:ext>
+          </a:extLst>
+        </p:spPr>
+        <p:txBody>
+          <a:bodyPr wrap="none">
+            <a:spAutoFit/>
+          </a:bodyPr>
+          <a:lstStyle>
+            <a:lvl1pPr algn="just">
+              <a:buClr>
+                <a:srgbClr val="1E3D7D"/>
+              </a:buClr>
+              <a:buFont typeface="Wingdings" panose="05000000000000000000" pitchFamily="2" charset="2"/>
+              <a:buChar char="§"/>
+              <a:defRPr>
+                <a:solidFill>
+                  <a:schemeClr val="tx1"/>
+                </a:solidFill>
+                <a:latin typeface="Calibri" panose="020F0502020204030204" pitchFamily="34" charset="0"/>
+              </a:defRPr>
+            </a:lvl1pPr>
+            <a:lvl2pPr marL="742950" indent="-285750" algn="just">
+              <a:buClr>
+                <a:srgbClr val="1E3D7D"/>
+              </a:buClr>
+              <a:buFont typeface="Courier New" panose="02070309020205020404" pitchFamily="49" charset="0"/>
+              <a:buChar char="o"/>
+              <a:defRPr>
+                <a:solidFill>
+                  <a:schemeClr val="tx1"/>
+                </a:solidFill>
+                <a:latin typeface="Calibri" panose="020F0502020204030204" pitchFamily="34" charset="0"/>
+              </a:defRPr>
+            </a:lvl2pPr>
+            <a:lvl3pPr marL="1143000" indent="-228600" algn="just">
+              <a:buClr>
+                <a:srgbClr val="1E3D7D"/>
+              </a:buClr>
+              <a:buFont typeface="Arial" panose="020B0604020202020204" pitchFamily="34" charset="0"/>
+              <a:buChar char="•"/>
+              <a:defRPr>
+                <a:solidFill>
+                  <a:schemeClr val="tx1"/>
+                </a:solidFill>
+                <a:latin typeface="Calibri" panose="020F0502020204030204" pitchFamily="34" charset="0"/>
+              </a:defRPr>
+            </a:lvl3pPr>
+            <a:lvl4pPr marL="1600200" indent="-228600" algn="just">
+              <a:buClr>
+                <a:srgbClr val="1E3D7D"/>
+              </a:buClr>
+              <a:buFont typeface="Arial" panose="020B0604020202020204" pitchFamily="34" charset="0"/>
+              <a:buChar char="•"/>
+              <a:defRPr>
+                <a:solidFill>
+                  <a:schemeClr val="tx1"/>
+                </a:solidFill>
+                <a:latin typeface="Calibri" panose="020F0502020204030204" pitchFamily="34" charset="0"/>
+              </a:defRPr>
+            </a:lvl4pPr>
+            <a:lvl5pPr marL="2057400" indent="-228600" algn="just">
+              <a:buClr>
+                <a:srgbClr val="1E3D7D"/>
+              </a:buClr>
+              <a:buFont typeface="Arial" panose="020B0604020202020204" pitchFamily="34" charset="0"/>
+              <a:buChar char="•"/>
+              <a:defRPr>
+                <a:solidFill>
+                  <a:schemeClr val="tx1"/>
+                </a:solidFill>
+                <a:latin typeface="Calibri" panose="020F0502020204030204" pitchFamily="34" charset="0"/>
+              </a:defRPr>
+            </a:lvl5pPr>
+            <a:lvl6pPr marL="2514600" indent="-228600" algn="just" eaLnBrk="0" fontAlgn="base" hangingPunct="0">
+              <a:spcBef>
+                <a:spcPct val="0"/>
+              </a:spcBef>
+              <a:spcAft>
+                <a:spcPct val="0"/>
+              </a:spcAft>
+              <a:buClr>
+                <a:srgbClr val="1E3D7D"/>
+              </a:buClr>
+              <a:buFont typeface="Arial" panose="020B0604020202020204" pitchFamily="34" charset="0"/>
+              <a:buChar char="•"/>
+              <a:defRPr>
+                <a:solidFill>
+                  <a:schemeClr val="tx1"/>
+                </a:solidFill>
+                <a:latin typeface="Calibri" panose="020F0502020204030204" pitchFamily="34" charset="0"/>
+              </a:defRPr>
+            </a:lvl6pPr>
+            <a:lvl7pPr marL="2971800" indent="-228600" algn="just" eaLnBrk="0" fontAlgn="base" hangingPunct="0">
+              <a:spcBef>
+                <a:spcPct val="0"/>
+              </a:spcBef>
+              <a:spcAft>
+                <a:spcPct val="0"/>
+              </a:spcAft>
+              <a:buClr>
+                <a:srgbClr val="1E3D7D"/>
+              </a:buClr>
+              <a:buFont typeface="Arial" panose="020B0604020202020204" pitchFamily="34" charset="0"/>
+              <a:buChar char="•"/>
+              <a:defRPr>
+                <a:solidFill>
+                  <a:schemeClr val="tx1"/>
+                </a:solidFill>
+                <a:latin typeface="Calibri" panose="020F0502020204030204" pitchFamily="34" charset="0"/>
+              </a:defRPr>
+            </a:lvl7pPr>
+            <a:lvl8pPr marL="3429000" indent="-228600" algn="just" eaLnBrk="0" fontAlgn="base" hangingPunct="0">
+              <a:spcBef>
+                <a:spcPct val="0"/>
+              </a:spcBef>
+              <a:spcAft>
+                <a:spcPct val="0"/>
+              </a:spcAft>
+              <a:buClr>
+                <a:srgbClr val="1E3D7D"/>
+              </a:buClr>
+              <a:buFont typeface="Arial" panose="020B0604020202020204" pitchFamily="34" charset="0"/>
+              <a:buChar char="•"/>
+              <a:defRPr>
+                <a:solidFill>
+                  <a:schemeClr val="tx1"/>
+                </a:solidFill>
+                <a:latin typeface="Calibri" panose="020F0502020204030204" pitchFamily="34" charset="0"/>
+              </a:defRPr>
+            </a:lvl8pPr>
+            <a:lvl9pPr marL="3886200" indent="-228600" algn="just" eaLnBrk="0" fontAlgn="base" hangingPunct="0">
+              <a:spcBef>
+                <a:spcPct val="0"/>
+              </a:spcBef>
+              <a:spcAft>
+                <a:spcPct val="0"/>
+              </a:spcAft>
+              <a:buClr>
+                <a:srgbClr val="1E3D7D"/>
+              </a:buClr>
+              <a:buFont typeface="Arial" panose="020B0604020202020204" pitchFamily="34" charset="0"/>
+              <a:buChar char="•"/>
+              <a:defRPr>
+                <a:solidFill>
+                  <a:schemeClr val="tx1"/>
+                </a:solidFill>
+                <a:latin typeface="Calibri" panose="020F0502020204030204" pitchFamily="34" charset="0"/>
+              </a:defRPr>
+            </a:lvl9pPr>
+          </a:lstStyle>
+          <a:p>
+            <a:pPr algn="ctr" eaLnBrk="1" hangingPunct="1">
+              <a:buClrTx/>
+              <a:buFontTx/>
+              <a:buNone/>
+            </a:pPr>
+            <a:r>
+              <a:rPr lang="en-US" altLang="en-US" sz="1400" dirty="0">
+                <a:latin typeface="+mn-lt"/>
+                <a:ea typeface="Verdana" panose="020B0604030504040204" pitchFamily="34" charset="0"/>
+                <a:cs typeface="Verdana" panose="020B0604030504040204" pitchFamily="34" charset="0"/>
+              </a:rPr>
+              <a:t>Name Candidate</a:t>
+            </a:r>
+          </a:p>
+        </p:txBody>
+      </p:sp>
+      <p:sp>
+        <p:nvSpPr>
+          <p:cNvPr id="63" name="TextBox 1">
+            <a:extLst>
+              <a:ext uri="{FF2B5EF4-FFF2-40B4-BE49-F238E27FC236}">
+                <a16:creationId xmlns:a16="http://schemas.microsoft.com/office/drawing/2014/main" id="{B7DD9C68-C6AC-B8B0-A932-AE3167DD1226}"/>
+              </a:ext>
+            </a:extLst>
+          </p:cNvPr>
+          <p:cNvSpPr txBox="1">
+            <a:spLocks noChangeArrowheads="1"/>
+          </p:cNvSpPr>
+          <p:nvPr/>
+        </p:nvSpPr>
+        <p:spPr bwMode="auto">
+          <a:xfrm>
+            <a:off x="6436389" y="3995775"/>
+            <a:ext cx="1400961" cy="307777"/>
+          </a:xfrm>
+          <a:prstGeom prst="rect">
+            <a:avLst/>
+          </a:prstGeom>
+          <a:noFill/>
+          <a:ln>
+            <a:noFill/>
+          </a:ln>
+          <a:extLst>
+            <a:ext uri="{909E8E84-426E-40DD-AFC4-6F175D3DCCD1}">
+              <a14:hiddenFill xmlns:a14="http://schemas.microsoft.com/office/drawing/2010/main">
+                <a:solidFill>
+                  <a:srgbClr val="FFFFFF"/>
+                </a:solidFill>
+              </a14:hiddenFill>
+            </a:ext>
+            <a:ext uri="{91240B29-F687-4F45-9708-019B960494DF}">
+              <a14:hiddenLine xmlns:a14="http://schemas.microsoft.com/office/drawing/2010/main" w="9525">
+                <a:solidFill>
+                  <a:srgbClr val="000000"/>
+                </a:solidFill>
+                <a:miter lim="800000"/>
+                <a:headEnd/>
+                <a:tailEnd/>
+              </a14:hiddenLine>
+            </a:ext>
+          </a:extLst>
+        </p:spPr>
+        <p:txBody>
+          <a:bodyPr wrap="none">
+            <a:spAutoFit/>
+          </a:bodyPr>
+          <a:lstStyle>
+            <a:lvl1pPr algn="just">
+              <a:buClr>
+                <a:srgbClr val="1E3D7D"/>
+              </a:buClr>
+              <a:buFont typeface="Wingdings" panose="05000000000000000000" pitchFamily="2" charset="2"/>
+              <a:buChar char="§"/>
+              <a:defRPr>
+                <a:solidFill>
+                  <a:schemeClr val="tx1"/>
+                </a:solidFill>
+                <a:latin typeface="Calibri" panose="020F0502020204030204" pitchFamily="34" charset="0"/>
+              </a:defRPr>
+            </a:lvl1pPr>
+            <a:lvl2pPr marL="742950" indent="-285750" algn="just">
+              <a:buClr>
+                <a:srgbClr val="1E3D7D"/>
+              </a:buClr>
+              <a:buFont typeface="Courier New" panose="02070309020205020404" pitchFamily="49" charset="0"/>
+              <a:buChar char="o"/>
+              <a:defRPr>
+                <a:solidFill>
+                  <a:schemeClr val="tx1"/>
+                </a:solidFill>
+                <a:latin typeface="Calibri" panose="020F0502020204030204" pitchFamily="34" charset="0"/>
+              </a:defRPr>
+            </a:lvl2pPr>
+            <a:lvl3pPr marL="1143000" indent="-228600" algn="just">
+              <a:buClr>
+                <a:srgbClr val="1E3D7D"/>
+              </a:buClr>
+              <a:buFont typeface="Arial" panose="020B0604020202020204" pitchFamily="34" charset="0"/>
+              <a:buChar char="•"/>
+              <a:defRPr>
+                <a:solidFill>
+                  <a:schemeClr val="tx1"/>
+                </a:solidFill>
+                <a:latin typeface="Calibri" panose="020F0502020204030204" pitchFamily="34" charset="0"/>
+              </a:defRPr>
+            </a:lvl3pPr>
+            <a:lvl4pPr marL="1600200" indent="-228600" algn="just">
+              <a:buClr>
+                <a:srgbClr val="1E3D7D"/>
+              </a:buClr>
+              <a:buFont typeface="Arial" panose="020B0604020202020204" pitchFamily="34" charset="0"/>
+              <a:buChar char="•"/>
+              <a:defRPr>
+                <a:solidFill>
+                  <a:schemeClr val="tx1"/>
+                </a:solidFill>
+                <a:latin typeface="Calibri" panose="020F0502020204030204" pitchFamily="34" charset="0"/>
+              </a:defRPr>
+            </a:lvl4pPr>
+            <a:lvl5pPr marL="2057400" indent="-228600" algn="just">
+              <a:buClr>
+                <a:srgbClr val="1E3D7D"/>
+              </a:buClr>
+              <a:buFont typeface="Arial" panose="020B0604020202020204" pitchFamily="34" charset="0"/>
+              <a:buChar char="•"/>
+              <a:defRPr>
+                <a:solidFill>
+                  <a:schemeClr val="tx1"/>
+                </a:solidFill>
+                <a:latin typeface="Calibri" panose="020F0502020204030204" pitchFamily="34" charset="0"/>
+              </a:defRPr>
+            </a:lvl5pPr>
+            <a:lvl6pPr marL="2514600" indent="-228600" algn="just" eaLnBrk="0" fontAlgn="base" hangingPunct="0">
+              <a:spcBef>
+                <a:spcPct val="0"/>
+              </a:spcBef>
+              <a:spcAft>
+                <a:spcPct val="0"/>
+              </a:spcAft>
+              <a:buClr>
+                <a:srgbClr val="1E3D7D"/>
+              </a:buClr>
+              <a:buFont typeface="Arial" panose="020B0604020202020204" pitchFamily="34" charset="0"/>
+              <a:buChar char="•"/>
+              <a:defRPr>
+                <a:solidFill>
+                  <a:schemeClr val="tx1"/>
+                </a:solidFill>
+                <a:latin typeface="Calibri" panose="020F0502020204030204" pitchFamily="34" charset="0"/>
+              </a:defRPr>
+            </a:lvl6pPr>
+            <a:lvl7pPr marL="2971800" indent="-228600" algn="just" eaLnBrk="0" fontAlgn="base" hangingPunct="0">
+              <a:spcBef>
+                <a:spcPct val="0"/>
+              </a:spcBef>
+              <a:spcAft>
+                <a:spcPct val="0"/>
+              </a:spcAft>
+              <a:buClr>
+                <a:srgbClr val="1E3D7D"/>
+              </a:buClr>
+              <a:buFont typeface="Arial" panose="020B0604020202020204" pitchFamily="34" charset="0"/>
+              <a:buChar char="•"/>
+              <a:defRPr>
+                <a:solidFill>
+                  <a:schemeClr val="tx1"/>
+                </a:solidFill>
+                <a:latin typeface="Calibri" panose="020F0502020204030204" pitchFamily="34" charset="0"/>
+              </a:defRPr>
+            </a:lvl7pPr>
+            <a:lvl8pPr marL="3429000" indent="-228600" algn="just" eaLnBrk="0" fontAlgn="base" hangingPunct="0">
+              <a:spcBef>
+                <a:spcPct val="0"/>
+              </a:spcBef>
+              <a:spcAft>
+                <a:spcPct val="0"/>
+              </a:spcAft>
+              <a:buClr>
+                <a:srgbClr val="1E3D7D"/>
+              </a:buClr>
+              <a:buFont typeface="Arial" panose="020B0604020202020204" pitchFamily="34" charset="0"/>
+              <a:buChar char="•"/>
+              <a:defRPr>
+                <a:solidFill>
+                  <a:schemeClr val="tx1"/>
+                </a:solidFill>
+                <a:latin typeface="Calibri" panose="020F0502020204030204" pitchFamily="34" charset="0"/>
+              </a:defRPr>
+            </a:lvl8pPr>
+            <a:lvl9pPr marL="3886200" indent="-228600" algn="just" eaLnBrk="0" fontAlgn="base" hangingPunct="0">
+              <a:spcBef>
+                <a:spcPct val="0"/>
+              </a:spcBef>
+              <a:spcAft>
+                <a:spcPct val="0"/>
+              </a:spcAft>
+              <a:buClr>
+                <a:srgbClr val="1E3D7D"/>
+              </a:buClr>
+              <a:buFont typeface="Arial" panose="020B0604020202020204" pitchFamily="34" charset="0"/>
+              <a:buChar char="•"/>
+              <a:defRPr>
+                <a:solidFill>
+                  <a:schemeClr val="tx1"/>
+                </a:solidFill>
+                <a:latin typeface="Calibri" panose="020F0502020204030204" pitchFamily="34" charset="0"/>
+              </a:defRPr>
+            </a:lvl9pPr>
+          </a:lstStyle>
+          <a:p>
+            <a:pPr algn="ctr" eaLnBrk="1" hangingPunct="1">
+              <a:buClrTx/>
+              <a:buFontTx/>
+              <a:buNone/>
+            </a:pPr>
+            <a:r>
+              <a:rPr lang="en-US" altLang="en-US" sz="1400" dirty="0">
+                <a:latin typeface="+mn-lt"/>
+                <a:ea typeface="Verdana" panose="020B0604030504040204" pitchFamily="34" charset="0"/>
+                <a:cs typeface="Verdana" panose="020B0604030504040204" pitchFamily="34" charset="0"/>
+              </a:rPr>
+              <a:t>Name Candidate</a:t>
+            </a:r>
+          </a:p>
+        </p:txBody>
+      </p:sp>
+      <p:sp>
+        <p:nvSpPr>
+          <p:cNvPr id="4096" name="Rectangle 4095">
+            <a:extLst>
+              <a:ext uri="{FF2B5EF4-FFF2-40B4-BE49-F238E27FC236}">
+                <a16:creationId xmlns:a16="http://schemas.microsoft.com/office/drawing/2014/main" id="{137549EA-DC80-E8A3-6E58-E813E4F64B2E}"/>
+              </a:ext>
+            </a:extLst>
+          </p:cNvPr>
+          <p:cNvSpPr/>
+          <p:nvPr/>
+        </p:nvSpPr>
+        <p:spPr>
+          <a:xfrm>
+            <a:off x="6196315" y="1573767"/>
+            <a:ext cx="137160" cy="137160"/>
+          </a:xfrm>
+          <a:prstGeom prst="rect">
+            <a:avLst/>
+          </a:prstGeom>
+          <a:noFill/>
+          <a:ln>
+            <a:solidFill>
+              <a:schemeClr val="tx1"/>
+            </a:solidFill>
+          </a:ln>
+          <a:effectLst>
+            <a:outerShdw blurRad="44450" dist="27940" dir="5400000" algn="ctr">
+              <a:srgbClr val="000000">
+                <a:alpha val="32000"/>
+              </a:srgbClr>
+            </a:outerShdw>
+          </a:effectLst>
+          <a:scene3d>
+            <a:camera prst="orthographicFront">
+              <a:rot lat="0" lon="0" rev="0"/>
+            </a:camera>
+            <a:lightRig rig="balanced" dir="t">
+              <a:rot lat="0" lon="0" rev="8700000"/>
+            </a:lightRig>
+          </a:scene3d>
+          <a:sp3d>
+            <a:bevelT w="190500" h="38100"/>
+          </a:sp3d>
+        </p:spPr>
+        <p:style>
+          <a:lnRef idx="2">
+            <a:schemeClr val="accent1">
+              <a:shade val="15000"/>
+            </a:schemeClr>
+          </a:lnRef>
+          <a:fillRef idx="1">
+            <a:schemeClr val="accent1"/>
+          </a:fillRef>
+          <a:effectRef idx="0">
+            <a:schemeClr val="accent1"/>
+          </a:effectRef>
+          <a:fontRef idx="minor">
+            <a:schemeClr val="lt1"/>
+          </a:fontRef>
+        </p:style>
+        <p:txBody>
+          <a:bodyPr rtlCol="0" anchor="ctr"/>
+          <a:lstStyle/>
+          <a:p>
+            <a:pPr algn="ctr"/>
+            <a:endParaRPr lang="en-US" sz="1400"/>
+          </a:p>
+        </p:txBody>
+      </p:sp>
+      <p:sp>
+        <p:nvSpPr>
+          <p:cNvPr id="4097" name="Rectangle 4096">
+            <a:extLst>
+              <a:ext uri="{FF2B5EF4-FFF2-40B4-BE49-F238E27FC236}">
+                <a16:creationId xmlns:a16="http://schemas.microsoft.com/office/drawing/2014/main" id="{6B14F867-556B-E924-7C04-CAFA6F87F465}"/>
+              </a:ext>
+            </a:extLst>
+          </p:cNvPr>
+          <p:cNvSpPr/>
+          <p:nvPr/>
+        </p:nvSpPr>
+        <p:spPr>
+          <a:xfrm>
+            <a:off x="6204989" y="2418749"/>
+            <a:ext cx="137160" cy="137160"/>
+          </a:xfrm>
+          <a:prstGeom prst="rect">
+            <a:avLst/>
+          </a:prstGeom>
+          <a:noFill/>
+          <a:ln>
+            <a:solidFill>
+              <a:schemeClr val="tx1"/>
+            </a:solidFill>
+          </a:ln>
+          <a:effectLst>
+            <a:outerShdw blurRad="44450" dist="27940" dir="5400000" algn="ctr">
+              <a:srgbClr val="000000">
+                <a:alpha val="32000"/>
+              </a:srgbClr>
+            </a:outerShdw>
+          </a:effectLst>
+          <a:scene3d>
+            <a:camera prst="orthographicFront">
+              <a:rot lat="0" lon="0" rev="0"/>
+            </a:camera>
+            <a:lightRig rig="balanced" dir="t">
+              <a:rot lat="0" lon="0" rev="8700000"/>
+            </a:lightRig>
+          </a:scene3d>
+          <a:sp3d>
+            <a:bevelT w="190500" h="38100"/>
+          </a:sp3d>
+        </p:spPr>
+        <p:style>
+          <a:lnRef idx="2">
+            <a:schemeClr val="accent1">
+              <a:shade val="15000"/>
+            </a:schemeClr>
+          </a:lnRef>
+          <a:fillRef idx="1">
+            <a:schemeClr val="accent1"/>
+          </a:fillRef>
+          <a:effectRef idx="0">
+            <a:schemeClr val="accent1"/>
+          </a:effectRef>
+          <a:fontRef idx="minor">
+            <a:schemeClr val="lt1"/>
+          </a:fontRef>
+        </p:style>
+        <p:txBody>
+          <a:bodyPr rtlCol="0" anchor="ctr"/>
+          <a:lstStyle/>
+          <a:p>
+            <a:pPr algn="ctr"/>
+            <a:endParaRPr lang="en-US" sz="1400"/>
+          </a:p>
+        </p:txBody>
+      </p:sp>
+      <p:sp>
+        <p:nvSpPr>
+          <p:cNvPr id="4098" name="Rectangle 4097">
+            <a:extLst>
+              <a:ext uri="{FF2B5EF4-FFF2-40B4-BE49-F238E27FC236}">
+                <a16:creationId xmlns:a16="http://schemas.microsoft.com/office/drawing/2014/main" id="{E37D3333-DE3E-2547-3E5D-1A8889683B90}"/>
+              </a:ext>
+            </a:extLst>
+          </p:cNvPr>
+          <p:cNvSpPr/>
+          <p:nvPr/>
+        </p:nvSpPr>
+        <p:spPr>
+          <a:xfrm>
+            <a:off x="6204989" y="3234803"/>
+            <a:ext cx="137160" cy="137160"/>
+          </a:xfrm>
+          <a:prstGeom prst="rect">
+            <a:avLst/>
+          </a:prstGeom>
+          <a:noFill/>
+          <a:ln>
+            <a:solidFill>
+              <a:schemeClr val="tx1"/>
+            </a:solidFill>
+          </a:ln>
+          <a:effectLst>
+            <a:outerShdw blurRad="44450" dist="27940" dir="5400000" algn="ctr">
+              <a:srgbClr val="000000">
+                <a:alpha val="32000"/>
+              </a:srgbClr>
+            </a:outerShdw>
+          </a:effectLst>
+          <a:scene3d>
+            <a:camera prst="orthographicFront">
+              <a:rot lat="0" lon="0" rev="0"/>
+            </a:camera>
+            <a:lightRig rig="balanced" dir="t">
+              <a:rot lat="0" lon="0" rev="8700000"/>
+            </a:lightRig>
+          </a:scene3d>
+          <a:sp3d>
+            <a:bevelT w="190500" h="38100"/>
+          </a:sp3d>
+        </p:spPr>
+        <p:style>
+          <a:lnRef idx="2">
+            <a:schemeClr val="accent1">
+              <a:shade val="15000"/>
+            </a:schemeClr>
+          </a:lnRef>
+          <a:fillRef idx="1">
+            <a:schemeClr val="accent1"/>
+          </a:fillRef>
+          <a:effectRef idx="0">
+            <a:schemeClr val="accent1"/>
+          </a:effectRef>
+          <a:fontRef idx="minor">
+            <a:schemeClr val="lt1"/>
+          </a:fontRef>
+        </p:style>
+        <p:txBody>
+          <a:bodyPr rtlCol="0" anchor="ctr"/>
+          <a:lstStyle/>
+          <a:p>
+            <a:pPr algn="ctr"/>
+            <a:endParaRPr lang="en-US" sz="1400"/>
+          </a:p>
+        </p:txBody>
+      </p:sp>
+      <p:sp>
+        <p:nvSpPr>
+          <p:cNvPr id="4104" name="Rectangle 4103">
+            <a:extLst>
+              <a:ext uri="{FF2B5EF4-FFF2-40B4-BE49-F238E27FC236}">
+                <a16:creationId xmlns:a16="http://schemas.microsoft.com/office/drawing/2014/main" id="{27737E59-4534-F8F4-A128-7AE9F5A81280}"/>
+              </a:ext>
+            </a:extLst>
+          </p:cNvPr>
+          <p:cNvSpPr/>
+          <p:nvPr/>
+        </p:nvSpPr>
+        <p:spPr>
+          <a:xfrm>
+            <a:off x="6201502" y="4069103"/>
+            <a:ext cx="137160" cy="137160"/>
+          </a:xfrm>
+          <a:prstGeom prst="rect">
+            <a:avLst/>
+          </a:prstGeom>
+          <a:noFill/>
+          <a:ln>
+            <a:solidFill>
+              <a:schemeClr val="tx1"/>
+            </a:solidFill>
+          </a:ln>
+          <a:effectLst>
+            <a:outerShdw blurRad="44450" dist="27940" dir="5400000" algn="ctr">
+              <a:srgbClr val="000000">
+                <a:alpha val="32000"/>
+              </a:srgbClr>
+            </a:outerShdw>
+          </a:effectLst>
+          <a:scene3d>
+            <a:camera prst="orthographicFront">
+              <a:rot lat="0" lon="0" rev="0"/>
+            </a:camera>
+            <a:lightRig rig="balanced" dir="t">
+              <a:rot lat="0" lon="0" rev="8700000"/>
+            </a:lightRig>
+          </a:scene3d>
+          <a:sp3d>
+            <a:bevelT w="190500" h="38100"/>
+          </a:sp3d>
+        </p:spPr>
+        <p:style>
+          <a:lnRef idx="2">
+            <a:schemeClr val="accent1">
+              <a:shade val="15000"/>
+            </a:schemeClr>
+          </a:lnRef>
+          <a:fillRef idx="1">
+            <a:schemeClr val="accent1"/>
+          </a:fillRef>
+          <a:effectRef idx="0">
+            <a:schemeClr val="accent1"/>
+          </a:effectRef>
+          <a:fontRef idx="minor">
+            <a:schemeClr val="lt1"/>
+          </a:fontRef>
+        </p:style>
+        <p:txBody>
+          <a:bodyPr rtlCol="0" anchor="ctr"/>
+          <a:lstStyle/>
+          <a:p>
+            <a:pPr algn="ctr"/>
+            <a:endParaRPr lang="en-US" sz="1400"/>
           </a:p>
         </p:txBody>
       </p:sp>
